--- a/slide_thuyet_trinh_QuizAI_final.pptx
+++ b/slide_thuyet_trinh_QuizAI_final.pptx
@@ -21,6 +21,7 @@
     <p:sldId id="269" r:id="rId20"/>
     <p:sldId id="270" r:id="rId21"/>
     <p:sldId id="271" r:id="rId22"/>
+    <p:sldId id="272" r:id="rId23"/>
   </p:sldIdLst>
   <p:sldSz cx="12191695" cy="6858000" type="screen4x3"/>
   <p:notesSz cx="6858000" cy="9144000"/>
@@ -3197,8 +3198,8 @@
         </p:nvSpPr>
         <p:spPr>
           <a:xfrm>
-            <a:off x="1371600" y="1005840"/>
-            <a:ext cx="9448495" cy="4846320"/>
+            <a:off x="1371600" y="914400"/>
+            <a:ext cx="9448495" cy="5029200"/>
           </a:xfrm>
           <a:prstGeom prst="roundRect">
             <a:avLst/>
@@ -3242,8 +3243,8 @@
         </p:nvSpPr>
         <p:spPr>
           <a:xfrm>
-            <a:off x="1645920" y="1371600"/>
-            <a:ext cx="8899855" cy="4114800"/>
+            <a:off x="1645920" y="1234440"/>
+            <a:ext cx="8899855" cy="4389120"/>
           </a:xfrm>
           <a:prstGeom prst="rect">
             <a:avLst/>
@@ -3268,7 +3269,7 @@
               </a:defRPr>
             </a:pPr>
             <a:r>
-              <a:t>BÁO CÁO ĐỒ ÁN • MÔN LẬP TRÌNH MẠNG</a:t>
+              <a:t>BÁO CÁO ĐỒ ÁN CUỐI KỲ • HỌC PHẦN LẬP TRÌNH MẠNG</a:t>
             </a:r>
           </a:p>
           <a:p>
@@ -3288,7 +3289,7 @@
             </a:r>
             <a:br/>
             <a:r>
-              <a:t>Tích Hợp Trí Tuệ Nhân Tạo &amp; Giám Sát Thi Đa Máy</a:t>
+              <a:t>Tích Hợp AI &amp; Giám Sát Thi Đa Thiết Bị</a:t>
             </a:r>
           </a:p>
           <a:p>
@@ -3304,7 +3305,7 @@
               </a:defRPr>
             </a:pPr>
             <a:r>
-              <a:t>Client-Server • RESTful API • TCP/IP • Xác Thực JWT • Chống Gian Lận 3 Lớp</a:t>
+              <a:t>Client-Server • RESTful API • TCP/IP • HTTPS TLS • Anti-Cheat 3 Lớp • Cloud Deployment</a:t>
             </a:r>
           </a:p>
           <a:p>
@@ -3317,7 +3318,7 @@
               </a:defRPr>
             </a:pPr>
             <a:r>
-              <a:t>Giảng viên hướng dẫn: Bộ môn Lập Trình Mạng    |    Sinh viên: Nhóm thực hiện QuizAI</a:t>
+              <a:t>Giảng viên hướng dẫn: Bộ môn Lập Trình Mạng    |    Nhóm sinh viên thực hiện: QuizAI Team</a:t>
             </a:r>
           </a:p>
         </p:txBody>
@@ -3434,8 +3435,8 @@
         </p:nvSpPr>
         <p:spPr>
           <a:xfrm>
-            <a:off x="731520" y="365760"/>
-            <a:ext cx="10728655" cy="1097280"/>
+            <a:off x="731520" y="320040"/>
+            <a:ext cx="10728655" cy="1143000"/>
           </a:xfrm>
           <a:prstGeom prst="rect">
             <a:avLst/>
@@ -3468,7 +3469,7 @@
               <a:spcAft>
                 <a:spcPts val="200"/>
               </a:spcAft>
-              <a:defRPr sz="2300" b="1">
+              <a:defRPr sz="2200" b="1">
                 <a:solidFill>
                   <a:srgbClr val="FFFFFF"/>
                 </a:solidFill>
@@ -3570,7 +3571,7 @@
               </a:defRPr>
             </a:pPr>
             <a:r>
-              <a:t>Các Phương Thức HTTP Chuẩn</a:t>
+              <a:t>Các Phương Thức HTTP Tiêu Chuẩn</a:t>
             </a:r>
           </a:p>
         </p:txBody>
@@ -3599,39 +3600,39 @@
           <a:p>
             <a:pPr>
               <a:spcAft>
-                <a:spcPts val="800"/>
-              </a:spcAft>
-              <a:defRPr sz="1300">
-                <a:solidFill>
-                  <a:srgbClr val="CBD5E1"/>
-                </a:solidFill>
-                <a:latin typeface="Segoe UI"/>
-              </a:defRPr>
-            </a:pPr>
-            <a:r>
-              <a:t>• GET: Lấy tài nguyên (Đọc danh sách đề, xem bảng điểm).</a:t>
-            </a:r>
-          </a:p>
-          <a:p>
-            <a:pPr>
-              <a:spcAft>
-                <a:spcPts val="800"/>
-              </a:spcAft>
-              <a:defRPr sz="1300">
-                <a:solidFill>
-                  <a:srgbClr val="CBD5E1"/>
-                </a:solidFill>
-                <a:latin typeface="Segoe UI"/>
-              </a:defRPr>
-            </a:pPr>
-            <a:r>
-              <a:t>• POST: Tạo tài nguyên mới (Đăng nhập, Bắt đầu thi, Nộp bài).</a:t>
-            </a:r>
-          </a:p>
-          <a:p>
-            <a:pPr>
-              <a:spcAft>
-                <a:spcPts val="800"/>
+                <a:spcPts val="700"/>
+              </a:spcAft>
+              <a:defRPr sz="1300">
+                <a:solidFill>
+                  <a:srgbClr val="CBD5E1"/>
+                </a:solidFill>
+                <a:latin typeface="Segoe UI"/>
+              </a:defRPr>
+            </a:pPr>
+            <a:r>
+              <a:t>• GET: Lấy tài nguyên (Đọc danh sách đề thi, xem bảng điểm).</a:t>
+            </a:r>
+          </a:p>
+          <a:p>
+            <a:pPr>
+              <a:spcAft>
+                <a:spcPts val="700"/>
+              </a:spcAft>
+              <a:defRPr sz="1300">
+                <a:solidFill>
+                  <a:srgbClr val="CBD5E1"/>
+                </a:solidFill>
+                <a:latin typeface="Segoe UI"/>
+              </a:defRPr>
+            </a:pPr>
+            <a:r>
+              <a:t>• POST: Tạo mới tài nguyên (Đăng ký, Đăng nhập, Bắt đầu thi, Nộp bài).</a:t>
+            </a:r>
+          </a:p>
+          <a:p>
+            <a:pPr>
+              <a:spcAft>
+                <a:spcPts val="700"/>
               </a:spcAft>
               <a:defRPr sz="1300">
                 <a:solidFill>
@@ -3647,17 +3648,33 @@
           <a:p>
             <a:pPr>
               <a:spcAft>
-                <a:spcPts val="800"/>
-              </a:spcAft>
-              <a:defRPr sz="1300">
-                <a:solidFill>
-                  <a:srgbClr val="CBD5E1"/>
-                </a:solidFill>
-                <a:latin typeface="Segoe UI"/>
-              </a:defRPr>
-            </a:pPr>
-            <a:r>
-              <a:t>• DELETE: Xóa tài nguyên (Xóa vĩnh viễn đề thi kèm dữ liệu liên quan).</a:t>
+                <a:spcPts val="700"/>
+              </a:spcAft>
+              <a:defRPr sz="1300">
+                <a:solidFill>
+                  <a:srgbClr val="CBD5E1"/>
+                </a:solidFill>
+                <a:latin typeface="Segoe UI"/>
+              </a:defRPr>
+            </a:pPr>
+            <a:r>
+              <a:t>• DELETE: Xóa tài nguyên (Xóa đề thi kèm câu hỏi liên quan).</a:t>
+            </a:r>
+          </a:p>
+          <a:p>
+            <a:pPr>
+              <a:spcAft>
+                <a:spcPts val="700"/>
+              </a:spcAft>
+              <a:defRPr sz="1300">
+                <a:solidFill>
+                  <a:srgbClr val="CBD5E1"/>
+                </a:solidFill>
+                <a:latin typeface="Segoe UI"/>
+              </a:defRPr>
+            </a:pPr>
+            <a:r>
+              <a:t>• OPTIONS: Preflight check kiểm tra quyền CORS trước khi gửi POST.</a:t>
             </a:r>
           </a:p>
         </p:txBody>
@@ -3767,65 +3784,81 @@
           <a:p>
             <a:pPr>
               <a:spcAft>
-                <a:spcPts val="800"/>
-              </a:spcAft>
-              <a:defRPr sz="1300">
-                <a:solidFill>
-                  <a:srgbClr val="CBD5E1"/>
-                </a:solidFill>
-                <a:latin typeface="Segoe UI"/>
-              </a:defRPr>
-            </a:pPr>
-            <a:r>
-              <a:t>• Stateless (Phi trạng thái): Mỗi request chứa đủ thông tin xác thực.</a:t>
-            </a:r>
-          </a:p>
-          <a:p>
-            <a:pPr>
-              <a:spcAft>
-                <a:spcPts val="800"/>
-              </a:spcAft>
-              <a:defRPr sz="1300">
-                <a:solidFill>
-                  <a:srgbClr val="CBD5E1"/>
-                </a:solidFill>
-                <a:latin typeface="Segoe UI"/>
-              </a:defRPr>
-            </a:pPr>
-            <a:r>
-              <a:t>• Định dạng JSON: Gọn nhẹ, tối ưu băng thông đường truyền mạng.</a:t>
-            </a:r>
-          </a:p>
-          <a:p>
-            <a:pPr>
-              <a:spcAft>
-                <a:spcPts val="800"/>
-              </a:spcAft>
-              <a:defRPr sz="1300">
-                <a:solidFill>
-                  <a:srgbClr val="CBD5E1"/>
-                </a:solidFill>
-                <a:latin typeface="Segoe UI"/>
-              </a:defRPr>
-            </a:pPr>
-            <a:r>
-              <a:t>• Mã trạng thái HTTP chuẩn: 200 OK, 201 Created, 401 Unauthorized, 403 Forbidden.</a:t>
-            </a:r>
-          </a:p>
-          <a:p>
-            <a:pPr>
-              <a:spcAft>
-                <a:spcPts val="800"/>
-              </a:spcAft>
-              <a:defRPr sz="1300">
-                <a:solidFill>
-                  <a:srgbClr val="CBD5E1"/>
-                </a:solidFill>
-                <a:latin typeface="Segoe UI"/>
-              </a:defRPr>
-            </a:pPr>
-            <a:r>
-              <a:t>• Swagger UI tích hợp: Tài liệu hóa trực quan tại /swagger.</a:t>
+                <a:spcPts val="700"/>
+              </a:spcAft>
+              <a:defRPr sz="1300">
+                <a:solidFill>
+                  <a:srgbClr val="CBD5E1"/>
+                </a:solidFill>
+                <a:latin typeface="Segoe UI"/>
+              </a:defRPr>
+            </a:pPr>
+            <a:r>
+              <a:t>• Stateless (Phi trạng thái): Mỗi request mang đủ thông tin xác thực.</a:t>
+            </a:r>
+          </a:p>
+          <a:p>
+            <a:pPr>
+              <a:spcAft>
+                <a:spcPts val="700"/>
+              </a:spcAft>
+              <a:defRPr sz="1300">
+                <a:solidFill>
+                  <a:srgbClr val="CBD5E1"/>
+                </a:solidFill>
+                <a:latin typeface="Segoe UI"/>
+              </a:defRPr>
+            </a:pPr>
+            <a:r>
+              <a:t>• Định dạng JSON: Gọn nhẹ, tiết kiệm băng thông đường truyền mạng.</a:t>
+            </a:r>
+          </a:p>
+          <a:p>
+            <a:pPr>
+              <a:spcAft>
+                <a:spcPts val="700"/>
+              </a:spcAft>
+              <a:defRPr sz="1300">
+                <a:solidFill>
+                  <a:srgbClr val="CBD5E1"/>
+                </a:solidFill>
+                <a:latin typeface="Segoe UI"/>
+              </a:defRPr>
+            </a:pPr>
+            <a:r>
+              <a:t>• Mã trạng thái chuẩn: 200 OK, 201 Created, 401 Unauthorized, 403 Forbidden.</a:t>
+            </a:r>
+          </a:p>
+          <a:p>
+            <a:pPr>
+              <a:spcAft>
+                <a:spcPts val="700"/>
+              </a:spcAft>
+              <a:defRPr sz="1300">
+                <a:solidFill>
+                  <a:srgbClr val="CBD5E1"/>
+                </a:solidFill>
+                <a:latin typeface="Segoe UI"/>
+              </a:defRPr>
+            </a:pPr>
+            <a:r>
+              <a:t>• Swagger UI tích hợp: Tài liệu hóa trực quan tại đường dẫn /swagger.</a:t>
+            </a:r>
+          </a:p>
+          <a:p>
+            <a:pPr>
+              <a:spcAft>
+                <a:spcPts val="700"/>
+              </a:spcAft>
+              <a:defRPr sz="1300">
+                <a:solidFill>
+                  <a:srgbClr val="CBD5E1"/>
+                </a:solidFill>
+                <a:latin typeface="Segoe UI"/>
+              </a:defRPr>
+            </a:pPr>
+            <a:r>
+              <a:t>• Khả năng mở rộng (Scalability): Dễ dàng nâng cấp và bảo trì hệ thống.</a:t>
             </a:r>
           </a:p>
         </p:txBody>
@@ -3942,8 +3975,8 @@
         </p:nvSpPr>
         <p:spPr>
           <a:xfrm>
-            <a:off x="731520" y="365760"/>
-            <a:ext cx="10728655" cy="1097280"/>
+            <a:off x="731520" y="320040"/>
+            <a:ext cx="10728655" cy="1143000"/>
           </a:xfrm>
           <a:prstGeom prst="rect">
             <a:avLst/>
@@ -3976,7 +4009,7 @@
               <a:spcAft>
                 <a:spcPts val="200"/>
               </a:spcAft>
-              <a:defRPr sz="2300" b="1">
+              <a:defRPr sz="2200" b="1">
                 <a:solidFill>
                   <a:srgbClr val="FFFFFF"/>
                 </a:solidFill>
@@ -4107,23 +4140,23 @@
           <a:p>
             <a:pPr>
               <a:spcAft>
-                <a:spcPts val="800"/>
-              </a:spcAft>
-              <a:defRPr sz="1300">
-                <a:solidFill>
-                  <a:srgbClr val="CBD5E1"/>
-                </a:solidFill>
-                <a:latin typeface="Segoe UI"/>
-              </a:defRPr>
-            </a:pPr>
-            <a:r>
-              <a:t>• ClientHello: Client gửi phiên bản TLS và danh sách mã hóa hỗ trợ.</a:t>
-            </a:r>
-          </a:p>
-          <a:p>
-            <a:pPr>
-              <a:spcAft>
-                <a:spcPts val="800"/>
+                <a:spcPts val="700"/>
+              </a:spcAft>
+              <a:defRPr sz="1300">
+                <a:solidFill>
+                  <a:srgbClr val="CBD5E1"/>
+                </a:solidFill>
+                <a:latin typeface="Segoe UI"/>
+              </a:defRPr>
+            </a:pPr>
+            <a:r>
+              <a:t>• ClientHello: Gửi phiên bản TLS và danh sách mã hóa (Cipher Suites).</a:t>
+            </a:r>
+          </a:p>
+          <a:p>
+            <a:pPr>
+              <a:spcAft>
+                <a:spcPts val="700"/>
               </a:spcAft>
               <a:defRPr sz="1300">
                 <a:solidFill>
@@ -4139,33 +4172,49 @@
           <a:p>
             <a:pPr>
               <a:spcAft>
-                <a:spcPts val="800"/>
-              </a:spcAft>
-              <a:defRPr sz="1300">
-                <a:solidFill>
-                  <a:srgbClr val="CBD5E1"/>
-                </a:solidFill>
-                <a:latin typeface="Segoe UI"/>
-              </a:defRPr>
-            </a:pPr>
-            <a:r>
-              <a:t>• Key Exchange: Trao đổi khóa bí mật phiên (Session Key) an toàn.</a:t>
-            </a:r>
-          </a:p>
-          <a:p>
-            <a:pPr>
-              <a:spcAft>
-                <a:spcPts val="800"/>
-              </a:spcAft>
-              <a:defRPr sz="1300">
-                <a:solidFill>
-                  <a:srgbClr val="CBD5E1"/>
-                </a:solidFill>
-                <a:latin typeface="Segoe UI"/>
-              </a:defRPr>
-            </a:pPr>
-            <a:r>
-              <a:t>• Mã hóa đối xứng: Toàn bộ gói tin sau đó được mã hóa bằng AES-256.</a:t>
+                <a:spcPts val="700"/>
+              </a:spcAft>
+              <a:defRPr sz="1300">
+                <a:solidFill>
+                  <a:srgbClr val="CBD5E1"/>
+                </a:solidFill>
+                <a:latin typeface="Segoe UI"/>
+              </a:defRPr>
+            </a:pPr>
+            <a:r>
+              <a:t>• Key Exchange: Trao đổi khóa bí mật phiên (Session Key) bất đối xứng.</a:t>
+            </a:r>
+          </a:p>
+          <a:p>
+            <a:pPr>
+              <a:spcAft>
+                <a:spcPts val="700"/>
+              </a:spcAft>
+              <a:defRPr sz="1300">
+                <a:solidFill>
+                  <a:srgbClr val="CBD5E1"/>
+                </a:solidFill>
+                <a:latin typeface="Segoe UI"/>
+              </a:defRPr>
+            </a:pPr>
+            <a:r>
+              <a:t>• Mã hóa đối xứng: Toàn bộ dữ liệu sau đó được mã hóa bằng AES-256.</a:t>
+            </a:r>
+          </a:p>
+          <a:p>
+            <a:pPr>
+              <a:spcAft>
+                <a:spcPts val="700"/>
+              </a:spcAft>
+              <a:defRPr sz="1300">
+                <a:solidFill>
+                  <a:srgbClr val="CBD5E1"/>
+                </a:solidFill>
+                <a:latin typeface="Segoe UI"/>
+              </a:defRPr>
+            </a:pPr>
+            <a:r>
+              <a:t>• Finished: Xác nhận kết nối bảo mật hoàn tất, bắt đầu gửi dữ liệu.</a:t>
             </a:r>
           </a:p>
         </p:txBody>
@@ -4275,39 +4324,39 @@
           <a:p>
             <a:pPr>
               <a:spcAft>
-                <a:spcPts val="800"/>
-              </a:spcAft>
-              <a:defRPr sz="1300">
-                <a:solidFill>
-                  <a:srgbClr val="CBD5E1"/>
-                </a:solidFill>
-                <a:latin typeface="Segoe UI"/>
-              </a:defRPr>
-            </a:pPr>
-            <a:r>
-              <a:t>• Chống bắt gói tin (Wireshark): Kẻ nghe lén chỉ thấy dữ liệu mã hóa.</a:t>
-            </a:r>
-          </a:p>
-          <a:p>
-            <a:pPr>
-              <a:spcAft>
-                <a:spcPts val="800"/>
-              </a:spcAft>
-              <a:defRPr sz="1300">
-                <a:solidFill>
-                  <a:srgbClr val="CBD5E1"/>
-                </a:solidFill>
-                <a:latin typeface="Segoe UI"/>
-              </a:defRPr>
-            </a:pPr>
-            <a:r>
-              <a:t>• Bảo vệ Token &amp; Mật khẩu: Không bị lộ mã JWT trên đường truyền Wi-Fi.</a:t>
-            </a:r>
-          </a:p>
-          <a:p>
-            <a:pPr>
-              <a:spcAft>
-                <a:spcPts val="800"/>
+                <a:spcPts val="700"/>
+              </a:spcAft>
+              <a:defRPr sz="1300">
+                <a:solidFill>
+                  <a:srgbClr val="CBD5E1"/>
+                </a:solidFill>
+                <a:latin typeface="Segoe UI"/>
+              </a:defRPr>
+            </a:pPr>
+            <a:r>
+              <a:t>• Chống bắt gói tin (Sniffing): Wireshark chỉ thấy dòng dữ liệu mã hóa.</a:t>
+            </a:r>
+          </a:p>
+          <a:p>
+            <a:pPr>
+              <a:spcAft>
+                <a:spcPts val="700"/>
+              </a:spcAft>
+              <a:defRPr sz="1300">
+                <a:solidFill>
+                  <a:srgbClr val="CBD5E1"/>
+                </a:solidFill>
+                <a:latin typeface="Segoe UI"/>
+              </a:defRPr>
+            </a:pPr>
+            <a:r>
+              <a:t>• Bảo vệ JWT Token &amp; Pass: Không bị lộ mã xác thực trên mạng Wi-Fi công cộng.</a:t>
+            </a:r>
+          </a:p>
+          <a:p>
+            <a:pPr>
+              <a:spcAft>
+                <a:spcPts val="700"/>
               </a:spcAft>
               <a:defRPr sz="1300">
                 <a:solidFill>
@@ -4323,17 +4372,33 @@
           <a:p>
             <a:pPr>
               <a:spcAft>
-                <a:spcPts val="800"/>
-              </a:spcAft>
-              <a:defRPr sz="1300">
-                <a:solidFill>
-                  <a:srgbClr val="CBD5E1"/>
-                </a:solidFill>
-                <a:latin typeface="Segoe UI"/>
-              </a:defRPr>
-            </a:pPr>
-            <a:r>
-              <a:t>• Toàn vẹn dữ liệu: Đảm bảo đáp án của thí sinh không bị sửa đổi trên mạng.</a:t>
+                <a:spcPts val="700"/>
+              </a:spcAft>
+              <a:defRPr sz="1300">
+                <a:solidFill>
+                  <a:srgbClr val="CBD5E1"/>
+                </a:solidFill>
+                <a:latin typeface="Segoe UI"/>
+              </a:defRPr>
+            </a:pPr>
+            <a:r>
+              <a:t>• Toàn vẹn dữ liệu (Integrity): Chống tấn công Man-in-the-Middle sửa đáp án.</a:t>
+            </a:r>
+          </a:p>
+          <a:p>
+            <a:pPr>
+              <a:spcAft>
+                <a:spcPts val="700"/>
+              </a:spcAft>
+              <a:defRPr sz="1300">
+                <a:solidFill>
+                  <a:srgbClr val="CBD5E1"/>
+                </a:solidFill>
+                <a:latin typeface="Segoe UI"/>
+              </a:defRPr>
+            </a:pPr>
+            <a:r>
+              <a:t>• Tương thích trình duyệt: Không bị cảnh báo 'Not Secure' màu đỏ.</a:t>
             </a:r>
           </a:p>
         </p:txBody>
@@ -4450,8 +4515,8 @@
         </p:nvSpPr>
         <p:spPr>
           <a:xfrm>
-            <a:off x="731520" y="365760"/>
-            <a:ext cx="10728655" cy="1097280"/>
+            <a:off x="731520" y="320040"/>
+            <a:ext cx="10728655" cy="1143000"/>
           </a:xfrm>
           <a:prstGeom prst="rect">
             <a:avLst/>
@@ -4484,7 +4549,7 @@
               <a:spcAft>
                 <a:spcPts val="200"/>
               </a:spcAft>
-              <a:defRPr sz="2300" b="1">
+              <a:defRPr sz="2200" b="1">
                 <a:solidFill>
                   <a:srgbClr val="FFFFFF"/>
                 </a:solidFill>
@@ -4615,7 +4680,7 @@
           <a:p>
             <a:pPr>
               <a:spcAft>
-                <a:spcPts val="800"/>
+                <a:spcPts val="700"/>
               </a:spcAft>
               <a:defRPr sz="1300">
                 <a:solidFill>
@@ -4631,7 +4696,7 @@
           <a:p>
             <a:pPr>
               <a:spcAft>
-                <a:spcPts val="800"/>
+                <a:spcPts val="700"/>
               </a:spcAft>
               <a:defRPr sz="1300">
                 <a:solidFill>
@@ -4647,33 +4712,49 @@
           <a:p>
             <a:pPr>
               <a:spcAft>
-                <a:spcPts val="800"/>
-              </a:spcAft>
-              <a:defRPr sz="1300">
-                <a:solidFill>
-                  <a:srgbClr val="CBD5E1"/>
-                </a:solidFill>
-                <a:latin typeface="Segoe UI"/>
-              </a:defRPr>
-            </a:pPr>
-            <a:r>
-              <a:t>• Xác thực nhanh: Server dùng SecretKey kiểm tra tính hợp lệ chữ ký.</a:t>
-            </a:r>
-          </a:p>
-          <a:p>
-            <a:pPr>
-              <a:spcAft>
-                <a:spcPts val="800"/>
-              </a:spcAft>
-              <a:defRPr sz="1300">
-                <a:solidFill>
-                  <a:srgbClr val="CBD5E1"/>
-                </a:solidFill>
-                <a:latin typeface="Segoe UI"/>
-              </a:defRPr>
-            </a:pPr>
-            <a:r>
-              <a:t>• Axios Interceptor: Tự động đính kèm Bearer Token vào mọi request.</a:t>
+                <a:spcPts val="700"/>
+              </a:spcAft>
+              <a:defRPr sz="1300">
+                <a:solidFill>
+                  <a:srgbClr val="CBD5E1"/>
+                </a:solidFill>
+                <a:latin typeface="Segoe UI"/>
+              </a:defRPr>
+            </a:pPr>
+            <a:r>
+              <a:t>• Phân quyền linh hoạt: Chứa Claim Vai trò (Admin / Student) trong Payload.</a:t>
+            </a:r>
+          </a:p>
+          <a:p>
+            <a:pPr>
+              <a:spcAft>
+                <a:spcPts val="700"/>
+              </a:spcAft>
+              <a:defRPr sz="1300">
+                <a:solidFill>
+                  <a:srgbClr val="CBD5E1"/>
+                </a:solidFill>
+                <a:latin typeface="Segoe UI"/>
+              </a:defRPr>
+            </a:pPr>
+            <a:r>
+              <a:t>• Tự động đính kèm: Axios Interceptor gán Bearer Token vào mọi request.</a:t>
+            </a:r>
+          </a:p>
+          <a:p>
+            <a:pPr>
+              <a:spcAft>
+                <a:spcPts val="700"/>
+              </a:spcAft>
+              <a:defRPr sz="1300">
+                <a:solidFill>
+                  <a:srgbClr val="CBD5E1"/>
+                </a:solidFill>
+                <a:latin typeface="Segoe UI"/>
+              </a:defRPr>
+            </a:pPr>
+            <a:r>
+              <a:t>• Tự động đăng xuất: Chuyển hướng về Login khi Token hết hạn (401).</a:t>
             </a:r>
           </a:p>
         </p:txBody>
@@ -4783,65 +4864,81 @@
           <a:p>
             <a:pPr>
               <a:spcAft>
-                <a:spcPts val="800"/>
-              </a:spcAft>
-              <a:defRPr sz="1300">
-                <a:solidFill>
-                  <a:srgbClr val="CBD5E1"/>
-                </a:solidFill>
-                <a:latin typeface="Segoe UI"/>
-              </a:defRPr>
-            </a:pPr>
-            <a:r>
-              <a:t>• Same-Origin Policy: Trình duyệt mặc định chặn request khác domain/IP.</a:t>
-            </a:r>
-          </a:p>
-          <a:p>
-            <a:pPr>
-              <a:spcAft>
-                <a:spcPts val="800"/>
-              </a:spcAft>
-              <a:defRPr sz="1300">
-                <a:solidFill>
-                  <a:srgbClr val="CBD5E1"/>
-                </a:solidFill>
-                <a:latin typeface="Segoe UI"/>
-              </a:defRPr>
-            </a:pPr>
-            <a:r>
-              <a:t>• Cấu hình nới lỏng: policy.SetIsOriginAllowed(_ =&gt; true).</a:t>
-            </a:r>
-          </a:p>
-          <a:p>
-            <a:pPr>
-              <a:spcAft>
-                <a:spcPts val="800"/>
-              </a:spcAft>
-              <a:defRPr sz="1300">
-                <a:solidFill>
-                  <a:srgbClr val="CBD5E1"/>
-                </a:solidFill>
-                <a:latin typeface="Segoe UI"/>
-              </a:defRPr>
-            </a:pPr>
-            <a:r>
-              <a:t>• Chấp nhận mọi IP: Laptop, điện thoại hay IP LAN đều kết nối được.</a:t>
-            </a:r>
-          </a:p>
-          <a:p>
-            <a:pPr>
-              <a:spcAft>
-                <a:spcPts val="800"/>
-              </a:spcAft>
-              <a:defRPr sz="1300">
-                <a:solidFill>
-                  <a:srgbClr val="CBD5E1"/>
-                </a:solidFill>
-                <a:latin typeface="Segoe UI"/>
-              </a:defRPr>
-            </a:pPr>
-            <a:r>
-              <a:t>• Bảo mật an toàn: Vẫn duy trì kiểm soát nghiêm ngặt bằng JWT Token.</a:t>
+                <a:spcPts val="700"/>
+              </a:spcAft>
+              <a:defRPr sz="1300">
+                <a:solidFill>
+                  <a:srgbClr val="CBD5E1"/>
+                </a:solidFill>
+                <a:latin typeface="Segoe UI"/>
+              </a:defRPr>
+            </a:pPr>
+            <a:r>
+              <a:t>• Same-Origin Policy: Trình duyệt mặc định chặn request khác Origin.</a:t>
+            </a:r>
+          </a:p>
+          <a:p>
+            <a:pPr>
+              <a:spcAft>
+                <a:spcPts val="700"/>
+              </a:spcAft>
+              <a:defRPr sz="1300">
+                <a:solidFill>
+                  <a:srgbClr val="CBD5E1"/>
+                </a:solidFill>
+                <a:latin typeface="Segoe UI"/>
+              </a:defRPr>
+            </a:pPr>
+            <a:r>
+              <a:t>• Cấu hình linh hoạt: Cho phép domain Vercel và mạng LAN kết nối.</a:t>
+            </a:r>
+          </a:p>
+          <a:p>
+            <a:pPr>
+              <a:spcAft>
+                <a:spcPts val="700"/>
+              </a:spcAft>
+              <a:defRPr sz="1300">
+                <a:solidFill>
+                  <a:srgbClr val="CBD5E1"/>
+                </a:solidFill>
+                <a:latin typeface="Segoe UI"/>
+              </a:defRPr>
+            </a:pPr>
+            <a:r>
+              <a:t>• Hỗ trợ Preflight: Phản hồi mã 204 No Content cho các lệnh OPTIONS.</a:t>
+            </a:r>
+          </a:p>
+          <a:p>
+            <a:pPr>
+              <a:spcAft>
+                <a:spcPts val="700"/>
+              </a:spcAft>
+              <a:defRPr sz="1300">
+                <a:solidFill>
+                  <a:srgbClr val="CBD5E1"/>
+                </a:solidFill>
+                <a:latin typeface="Segoe UI"/>
+              </a:defRPr>
+            </a:pPr>
+            <a:r>
+              <a:t>• AllowCredentials: Cho phép truyền tải an toàn Token và Cookie.</a:t>
+            </a:r>
+          </a:p>
+          <a:p>
+            <a:pPr>
+              <a:spcAft>
+                <a:spcPts val="700"/>
+              </a:spcAft>
+              <a:defRPr sz="1300">
+                <a:solidFill>
+                  <a:srgbClr val="CBD5E1"/>
+                </a:solidFill>
+                <a:latin typeface="Segoe UI"/>
+              </a:defRPr>
+            </a:pPr>
+            <a:r>
+              <a:t>• Bảo mật chặt chẽ: Vẫn kiểm soát toàn diện bằng Middleware JWT.</a:t>
             </a:r>
           </a:p>
         </p:txBody>
@@ -4958,8 +5055,8 @@
         </p:nvSpPr>
         <p:spPr>
           <a:xfrm>
-            <a:off x="731520" y="365760"/>
-            <a:ext cx="10728655" cy="1097280"/>
+            <a:off x="731520" y="320040"/>
+            <a:ext cx="10728655" cy="1143000"/>
           </a:xfrm>
           <a:prstGeom prst="rect">
             <a:avLst/>
@@ -4992,7 +5089,7 @@
               <a:spcAft>
                 <a:spcPts val="200"/>
               </a:spcAft>
-              <a:defRPr sz="2300" b="1">
+              <a:defRPr sz="2200" b="1">
                 <a:solidFill>
                   <a:srgbClr val="FFFFFF"/>
                 </a:solidFill>
@@ -5094,7 +5191,7 @@
               </a:defRPr>
             </a:pPr>
             <a:r>
-              <a:t>Lớp 1: Chống Chuyển Tab</a:t>
+              <a:t>Lớp 1: Bắt Chuyển Tab</a:t>
             </a:r>
           </a:p>
         </p:txBody>
@@ -5123,7 +5220,7 @@
           <a:p>
             <a:pPr>
               <a:spcAft>
-                <a:spcPts val="800"/>
+                <a:spcPts val="700"/>
               </a:spcAft>
               <a:defRPr sz="1300">
                 <a:solidFill>
@@ -5139,49 +5236,65 @@
           <a:p>
             <a:pPr>
               <a:spcAft>
-                <a:spcPts val="800"/>
-              </a:spcAft>
-              <a:defRPr sz="1300">
-                <a:solidFill>
-                  <a:srgbClr val="CBD5E1"/>
-                </a:solidFill>
-                <a:latin typeface="Segoe UI"/>
-              </a:defRPr>
-            </a:pPr>
-            <a:r>
-              <a:t>• Cooldown 2.5s: Chống tính đúp.</a:t>
-            </a:r>
-          </a:p>
-          <a:p>
-            <a:pPr>
-              <a:spcAft>
-                <a:spcPts val="800"/>
-              </a:spcAft>
-              <a:defRPr sz="1300">
-                <a:solidFill>
-                  <a:srgbClr val="CBD5E1"/>
-                </a:solidFill>
-                <a:latin typeface="Segoe UI"/>
-              </a:defRPr>
-            </a:pPr>
-            <a:r>
-              <a:t>• Vi phạm lần 1 &amp; 2: Cảnh báo đỏ.</a:t>
-            </a:r>
-          </a:p>
-          <a:p>
-            <a:pPr>
-              <a:spcAft>
-                <a:spcPts val="800"/>
-              </a:spcAft>
-              <a:defRPr sz="1300">
-                <a:solidFill>
-                  <a:srgbClr val="CBD5E1"/>
-                </a:solidFill>
-                <a:latin typeface="Segoe UI"/>
-              </a:defRPr>
-            </a:pPr>
-            <a:r>
-              <a:t>• Vi phạm lần 3: Thu hồi &amp; nộp bài.</a:t>
+                <a:spcPts val="700"/>
+              </a:spcAft>
+              <a:defRPr sz="1300">
+                <a:solidFill>
+                  <a:srgbClr val="CBD5E1"/>
+                </a:solidFill>
+                <a:latin typeface="Segoe UI"/>
+              </a:defRPr>
+            </a:pPr>
+            <a:r>
+              <a:t>• Thuật toán Debounce 2.5s.</a:t>
+            </a:r>
+          </a:p>
+          <a:p>
+            <a:pPr>
+              <a:spcAft>
+                <a:spcPts val="700"/>
+              </a:spcAft>
+              <a:defRPr sz="1300">
+                <a:solidFill>
+                  <a:srgbClr val="CBD5E1"/>
+                </a:solidFill>
+                <a:latin typeface="Segoe UI"/>
+              </a:defRPr>
+            </a:pPr>
+            <a:r>
+              <a:t>• Chống đếm trùng sự kiện.</a:t>
+            </a:r>
+          </a:p>
+          <a:p>
+            <a:pPr>
+              <a:spcAft>
+                <a:spcPts val="700"/>
+              </a:spcAft>
+              <a:defRPr sz="1300">
+                <a:solidFill>
+                  <a:srgbClr val="CBD5E1"/>
+                </a:solidFill>
+                <a:latin typeface="Segoe UI"/>
+              </a:defRPr>
+            </a:pPr>
+            <a:r>
+              <a:t>• Vi phạm 1 &amp; 2: Cảnh báo đỏ.</a:t>
+            </a:r>
+          </a:p>
+          <a:p>
+            <a:pPr>
+              <a:spcAft>
+                <a:spcPts val="700"/>
+              </a:spcAft>
+              <a:defRPr sz="1300">
+                <a:solidFill>
+                  <a:srgbClr val="CBD5E1"/>
+                </a:solidFill>
+                <a:latin typeface="Segoe UI"/>
+              </a:defRPr>
+            </a:pPr>
+            <a:r>
+              <a:t>• Vi phạm 3: Tự động nộp bài.</a:t>
             </a:r>
           </a:p>
         </p:txBody>
@@ -5262,7 +5375,7 @@
               </a:defRPr>
             </a:pPr>
             <a:r>
-              <a:t>Lớp 2: Chặn Sao Chép</a:t>
+              <a:t>Lớp 2: Chặn Chụp Màn Hình</a:t>
             </a:r>
           </a:p>
         </p:txBody>
@@ -5291,55 +5404,71 @@
           <a:p>
             <a:pPr>
               <a:spcAft>
-                <a:spcPts val="800"/>
-              </a:spcAft>
-              <a:defRPr sz="1300">
-                <a:solidFill>
-                  <a:srgbClr val="CBD5E1"/>
-                </a:solidFill>
-                <a:latin typeface="Segoe UI"/>
-              </a:defRPr>
-            </a:pPr>
-            <a:r>
-              <a:t>• Chặn phím PrintScreen (chớp đen).</a:t>
-            </a:r>
-          </a:p>
-          <a:p>
-            <a:pPr>
-              <a:spcAft>
-                <a:spcPts val="800"/>
-              </a:spcAft>
-              <a:defRPr sz="1300">
-                <a:solidFill>
-                  <a:srgbClr val="CBD5E1"/>
-                </a:solidFill>
-                <a:latin typeface="Segoe UI"/>
-              </a:defRPr>
-            </a:pPr>
-            <a:r>
-              <a:t>• Khóa Ctrl+C/X/A, Ctrl+P (in).</a:t>
-            </a:r>
-          </a:p>
-          <a:p>
-            <a:pPr>
-              <a:spcAft>
-                <a:spcPts val="800"/>
-              </a:spcAft>
-              <a:defRPr sz="1300">
-                <a:solidFill>
-                  <a:srgbClr val="CBD5E1"/>
-                </a:solidFill>
-                <a:latin typeface="Segoe UI"/>
-              </a:defRPr>
-            </a:pPr>
-            <a:r>
-              <a:t>• Khóa F12 &amp; DevTools soi đáp án.</a:t>
-            </a:r>
-          </a:p>
-          <a:p>
-            <a:pPr>
-              <a:spcAft>
-                <a:spcPts val="800"/>
+                <a:spcPts val="700"/>
+              </a:spcAft>
+              <a:defRPr sz="1300">
+                <a:solidFill>
+                  <a:srgbClr val="CBD5E1"/>
+                </a:solidFill>
+                <a:latin typeface="Segoe UI"/>
+              </a:defRPr>
+            </a:pPr>
+            <a:r>
+              <a:t>• Chặn phím PrintScreen.</a:t>
+            </a:r>
+          </a:p>
+          <a:p>
+            <a:pPr>
+              <a:spcAft>
+                <a:spcPts val="700"/>
+              </a:spcAft>
+              <a:defRPr sz="1300">
+                <a:solidFill>
+                  <a:srgbClr val="CBD5E1"/>
+                </a:solidFill>
+                <a:latin typeface="Segoe UI"/>
+              </a:defRPr>
+            </a:pPr>
+            <a:r>
+              <a:t>• Màn hình chớp đen khi chụp.</a:t>
+            </a:r>
+          </a:p>
+          <a:p>
+            <a:pPr>
+              <a:spcAft>
+                <a:spcPts val="700"/>
+              </a:spcAft>
+              <a:defRPr sz="1300">
+                <a:solidFill>
+                  <a:srgbClr val="CBD5E1"/>
+                </a:solidFill>
+                <a:latin typeface="Segoe UI"/>
+              </a:defRPr>
+            </a:pPr>
+            <a:r>
+              <a:t>• Chặn Ctrl+C, Ctrl+V, Ctrl+P.</a:t>
+            </a:r>
+          </a:p>
+          <a:p>
+            <a:pPr>
+              <a:spcAft>
+                <a:spcPts val="700"/>
+              </a:spcAft>
+              <a:defRPr sz="1300">
+                <a:solidFill>
+                  <a:srgbClr val="CBD5E1"/>
+                </a:solidFill>
+                <a:latin typeface="Segoe UI"/>
+              </a:defRPr>
+            </a:pPr>
+            <a:r>
+              <a:t>• Chặn F12 &amp; DevTools soi đáp án.</a:t>
+            </a:r>
+          </a:p>
+          <a:p>
+            <a:pPr>
+              <a:spcAft>
+                <a:spcPts val="700"/>
               </a:spcAft>
               <a:defRPr sz="1300">
                 <a:solidFill>
@@ -5430,7 +5559,7 @@
               </a:defRPr>
             </a:pPr>
             <a:r>
-              <a:t>Lớp 3: Watermark Camera</a:t>
+              <a:t>Lớp 3: Watermark Chống Camera</a:t>
             </a:r>
           </a:p>
         </p:txBody>
@@ -5459,65 +5588,81 @@
           <a:p>
             <a:pPr>
               <a:spcAft>
-                <a:spcPts val="800"/>
-              </a:spcAft>
-              <a:defRPr sz="1300">
-                <a:solidFill>
-                  <a:srgbClr val="CBD5E1"/>
-                </a:solidFill>
-                <a:latin typeface="Segoe UI"/>
-              </a:defRPr>
-            </a:pPr>
-            <a:r>
-              <a:t>• In mờ chéo Họ tên &amp; Username.</a:t>
-            </a:r>
-          </a:p>
-          <a:p>
-            <a:pPr>
-              <a:spcAft>
-                <a:spcPts val="800"/>
-              </a:spcAft>
-              <a:defRPr sz="1300">
-                <a:solidFill>
-                  <a:srgbClr val="CBD5E1"/>
-                </a:solidFill>
-                <a:latin typeface="Segoe UI"/>
-              </a:defRPr>
-            </a:pPr>
-            <a:r>
-              <a:t>• Phủ khắp nền màn hình thi.</a:t>
-            </a:r>
-          </a:p>
-          <a:p>
-            <a:pPr>
-              <a:spcAft>
-                <a:spcPts val="800"/>
-              </a:spcAft>
-              <a:defRPr sz="1300">
-                <a:solidFill>
-                  <a:srgbClr val="CBD5E1"/>
-                </a:solidFill>
-                <a:latin typeface="Segoe UI"/>
-              </a:defRPr>
-            </a:pPr>
-            <a:r>
-              <a:t>• Chụp điện thoại lộ rõ danh tính.</a:t>
-            </a:r>
-          </a:p>
-          <a:p>
-            <a:pPr>
-              <a:spcAft>
-                <a:spcPts val="800"/>
-              </a:spcAft>
-              <a:defRPr sz="1300">
-                <a:solidFill>
-                  <a:srgbClr val="CBD5E1"/>
-                </a:solidFill>
-                <a:latin typeface="Segoe UI"/>
-              </a:defRPr>
-            </a:pPr>
-            <a:r>
-              <a:t>• Ghi nhận số vi phạm về máy chủ.</a:t>
+                <a:spcPts val="700"/>
+              </a:spcAft>
+              <a:defRPr sz="1300">
+                <a:solidFill>
+                  <a:srgbClr val="CBD5E1"/>
+                </a:solidFill>
+                <a:latin typeface="Segoe UI"/>
+              </a:defRPr>
+            </a:pPr>
+            <a:r>
+              <a:t>• In chìm Họ tên &amp; Tên đăng nhập.</a:t>
+            </a:r>
+          </a:p>
+          <a:p>
+            <a:pPr>
+              <a:spcAft>
+                <a:spcPts val="700"/>
+              </a:spcAft>
+              <a:defRPr sz="1300">
+                <a:solidFill>
+                  <a:srgbClr val="CBD5E1"/>
+                </a:solidFill>
+                <a:latin typeface="Segoe UI"/>
+              </a:defRPr>
+            </a:pPr>
+            <a:r>
+              <a:t>• Phủ chéo toàn bộ màn hình thi.</a:t>
+            </a:r>
+          </a:p>
+          <a:p>
+            <a:pPr>
+              <a:spcAft>
+                <a:spcPts val="700"/>
+              </a:spcAft>
+              <a:defRPr sz="1300">
+                <a:solidFill>
+                  <a:srgbClr val="CBD5E1"/>
+                </a:solidFill>
+                <a:latin typeface="Segoe UI"/>
+              </a:defRPr>
+            </a:pPr>
+            <a:r>
+              <a:t>• Chụp điện thoại sẽ lộ danh tính.</a:t>
+            </a:r>
+          </a:p>
+          <a:p>
+            <a:pPr>
+              <a:spcAft>
+                <a:spcPts val="700"/>
+              </a:spcAft>
+              <a:defRPr sz="1300">
+                <a:solidFill>
+                  <a:srgbClr val="CBD5E1"/>
+                </a:solidFill>
+                <a:latin typeface="Segoe UI"/>
+              </a:defRPr>
+            </a:pPr>
+            <a:r>
+              <a:t>• Ghi số lần vi phạm vào CSDL.</a:t>
+            </a:r>
+          </a:p>
+          <a:p>
+            <a:pPr>
+              <a:spcAft>
+                <a:spcPts val="700"/>
+              </a:spcAft>
+              <a:defRPr sz="1300">
+                <a:solidFill>
+                  <a:srgbClr val="CBD5E1"/>
+                </a:solidFill>
+                <a:latin typeface="Segoe UI"/>
+              </a:defRPr>
+            </a:pPr>
+            <a:r>
+              <a:t>• Giáo viên đối soát trên Excel.</a:t>
             </a:r>
           </a:p>
         </p:txBody>
@@ -5634,8 +5779,8 @@
         </p:nvSpPr>
         <p:spPr>
           <a:xfrm>
-            <a:off x="731520" y="365760"/>
-            <a:ext cx="10728655" cy="1097280"/>
+            <a:off x="731520" y="320040"/>
+            <a:ext cx="10728655" cy="1143000"/>
           </a:xfrm>
           <a:prstGeom prst="rect">
             <a:avLst/>
@@ -5668,7 +5813,7 @@
               <a:spcAft>
                 <a:spcPts val="200"/>
               </a:spcAft>
-              <a:defRPr sz="2300" b="1">
+              <a:defRPr sz="2200" b="1">
                 <a:solidFill>
                   <a:srgbClr val="FFFFFF"/>
                 </a:solidFill>
@@ -5676,7 +5821,7 @@
               </a:defRPr>
             </a:pPr>
             <a:r>
-              <a:t>Luồng Dữ Liệu Chính Của Hệ Thống (Data Flow)</a:t>
+              <a:t>Luồng Dữ Liệu Cốt Lõi Của Hệ Thống (Data Flow)</a:t>
             </a:r>
           </a:p>
           <a:p>
@@ -5689,7 +5834,7 @@
               </a:defRPr>
             </a:pPr>
             <a:r>
-              <a:t>Hai luồng xử lý cốt lõi: Xác thực tài khoản và Làm bài thi trực tuyến</a:t>
+              <a:t>Các quy trình xử lý chính giữa Client, Server, Database và Gemini AI</a:t>
             </a:r>
           </a:p>
         </p:txBody>
@@ -5703,7 +5848,7 @@
         <p:spPr>
           <a:xfrm>
             <a:off x="731520" y="1645920"/>
-            <a:ext cx="5120640" cy="4663440"/>
+            <a:ext cx="3291840" cy="4663440"/>
           </a:xfrm>
           <a:prstGeom prst="roundRect">
             <a:avLst/>
@@ -5748,7 +5893,7 @@
         <p:spPr>
           <a:xfrm>
             <a:off x="960120" y="1828800"/>
-            <a:ext cx="4663440" cy="365760"/>
+            <a:ext cx="2834640" cy="365760"/>
           </a:xfrm>
           <a:prstGeom prst="rect">
             <a:avLst/>
@@ -5770,7 +5915,7 @@
               </a:defRPr>
             </a:pPr>
             <a:r>
-              <a:t>Luồng 1: Đăng Nhập &amp; Xác Thực</a:t>
+              <a:t>Luồng 1: Xác Thực</a:t>
             </a:r>
           </a:p>
         </p:txBody>
@@ -5783,8 +5928,8 @@
         </p:nvSpPr>
         <p:spPr>
           <a:xfrm>
-            <a:off x="1005840" y="2286000"/>
-            <a:ext cx="4572000" cy="3657600"/>
+            <a:off x="960120" y="2286000"/>
+            <a:ext cx="2834640" cy="3657600"/>
           </a:xfrm>
           <a:prstGeom prst="rect">
             <a:avLst/>
@@ -5799,65 +5944,81 @@
           <a:p>
             <a:pPr>
               <a:spcAft>
-                <a:spcPts val="800"/>
-              </a:spcAft>
-              <a:defRPr sz="1300">
-                <a:solidFill>
-                  <a:srgbClr val="CBD5E1"/>
-                </a:solidFill>
-                <a:latin typeface="Segoe UI"/>
-              </a:defRPr>
-            </a:pPr>
-            <a:r>
-              <a:t>1. Client gửi POST /api/auth/login kèm thông tin đăng nhập.</a:t>
-            </a:r>
-          </a:p>
-          <a:p>
-            <a:pPr>
-              <a:spcAft>
-                <a:spcPts val="800"/>
-              </a:spcAft>
-              <a:defRPr sz="1300">
-                <a:solidFill>
-                  <a:srgbClr val="CBD5E1"/>
-                </a:solidFill>
-                <a:latin typeface="Segoe UI"/>
-              </a:defRPr>
-            </a:pPr>
-            <a:r>
-              <a:t>2. Server kiểm tra Username &amp; so khớp mã băm mật khẩu BCrypt.</a:t>
-            </a:r>
-          </a:p>
-          <a:p>
-            <a:pPr>
-              <a:spcAft>
-                <a:spcPts val="800"/>
-              </a:spcAft>
-              <a:defRPr sz="1300">
-                <a:solidFill>
-                  <a:srgbClr val="CBD5E1"/>
-                </a:solidFill>
-                <a:latin typeface="Segoe UI"/>
-              </a:defRPr>
-            </a:pPr>
-            <a:r>
-              <a:t>3. Server tạo chuỗi JWT Token có chữ ký số -&gt; Trả về Client.</a:t>
-            </a:r>
-          </a:p>
-          <a:p>
-            <a:pPr>
-              <a:spcAft>
-                <a:spcPts val="800"/>
-              </a:spcAft>
-              <a:defRPr sz="1300">
-                <a:solidFill>
-                  <a:srgbClr val="CBD5E1"/>
-                </a:solidFill>
-                <a:latin typeface="Segoe UI"/>
-              </a:defRPr>
-            </a:pPr>
-            <a:r>
-              <a:t>4. Client lưu Token vào LocalStorage và phân hướng theo Role.</a:t>
+                <a:spcPts val="700"/>
+              </a:spcAft>
+              <a:defRPr sz="1300">
+                <a:solidFill>
+                  <a:srgbClr val="CBD5E1"/>
+                </a:solidFill>
+                <a:latin typeface="Segoe UI"/>
+              </a:defRPr>
+            </a:pPr>
+            <a:r>
+              <a:t>1. Gửi POST /auth/login.</a:t>
+            </a:r>
+          </a:p>
+          <a:p>
+            <a:pPr>
+              <a:spcAft>
+                <a:spcPts val="700"/>
+              </a:spcAft>
+              <a:defRPr sz="1300">
+                <a:solidFill>
+                  <a:srgbClr val="CBD5E1"/>
+                </a:solidFill>
+                <a:latin typeface="Segoe UI"/>
+              </a:defRPr>
+            </a:pPr>
+            <a:r>
+              <a:t>2. So khớp BCrypt Hash.</a:t>
+            </a:r>
+          </a:p>
+          <a:p>
+            <a:pPr>
+              <a:spcAft>
+                <a:spcPts val="700"/>
+              </a:spcAft>
+              <a:defRPr sz="1300">
+                <a:solidFill>
+                  <a:srgbClr val="CBD5E1"/>
+                </a:solidFill>
+                <a:latin typeface="Segoe UI"/>
+              </a:defRPr>
+            </a:pPr>
+            <a:r>
+              <a:t>3. Ký số JWT Token.</a:t>
+            </a:r>
+          </a:p>
+          <a:p>
+            <a:pPr>
+              <a:spcAft>
+                <a:spcPts val="700"/>
+              </a:spcAft>
+              <a:defRPr sz="1300">
+                <a:solidFill>
+                  <a:srgbClr val="CBD5E1"/>
+                </a:solidFill>
+                <a:latin typeface="Segoe UI"/>
+              </a:defRPr>
+            </a:pPr>
+            <a:r>
+              <a:t>4. Lưu vào LocalStorage.</a:t>
+            </a:r>
+          </a:p>
+          <a:p>
+            <a:pPr>
+              <a:spcAft>
+                <a:spcPts val="700"/>
+              </a:spcAft>
+              <a:defRPr sz="1300">
+                <a:solidFill>
+                  <a:srgbClr val="CBD5E1"/>
+                </a:solidFill>
+                <a:latin typeface="Segoe UI"/>
+              </a:defRPr>
+            </a:pPr>
+            <a:r>
+              <a:t>5. Phân quyền Admin/User.</a:t>
             </a:r>
           </a:p>
         </p:txBody>
@@ -5870,8 +6031,8 @@
         </p:nvSpPr>
         <p:spPr>
           <a:xfrm>
-            <a:off x="6309360" y="1645920"/>
-            <a:ext cx="5120640" cy="4663440"/>
+            <a:off x="4434840" y="1645920"/>
+            <a:ext cx="3291840" cy="4663440"/>
           </a:xfrm>
           <a:prstGeom prst="roundRect">
             <a:avLst/>
@@ -5915,8 +6076,8 @@
         </p:nvSpPr>
         <p:spPr>
           <a:xfrm>
-            <a:off x="6537960" y="1828800"/>
-            <a:ext cx="4663440" cy="365760"/>
+            <a:off x="4663440" y="1828800"/>
+            <a:ext cx="2834640" cy="365760"/>
           </a:xfrm>
           <a:prstGeom prst="rect">
             <a:avLst/>
@@ -5938,7 +6099,7 @@
               </a:defRPr>
             </a:pPr>
             <a:r>
-              <a:t>Luồng 2: Làm Bài Thi &amp; Chấm Điểm</a:t>
+              <a:t>Luồng 2: Thi &amp; Chấm Điểm</a:t>
             </a:r>
           </a:p>
         </p:txBody>
@@ -5951,8 +6112,8 @@
         </p:nvSpPr>
         <p:spPr>
           <a:xfrm>
-            <a:off x="6583680" y="2286000"/>
-            <a:ext cx="4572000" cy="3657600"/>
+            <a:off x="4663440" y="2286000"/>
+            <a:ext cx="2834640" cy="3657600"/>
           </a:xfrm>
           <a:prstGeom prst="rect">
             <a:avLst/>
@@ -5967,65 +6128,265 @@
           <a:p>
             <a:pPr>
               <a:spcAft>
-                <a:spcPts val="800"/>
-              </a:spcAft>
-              <a:defRPr sz="1300">
-                <a:solidFill>
-                  <a:srgbClr val="CBD5E1"/>
-                </a:solidFill>
-                <a:latin typeface="Segoe UI"/>
-              </a:defRPr>
-            </a:pPr>
-            <a:r>
-              <a:t>1. Bắt đầu: POST /api/submissions/start -&gt; Nhận đề &amp; Server Time.</a:t>
-            </a:r>
-          </a:p>
-          <a:p>
-            <a:pPr>
-              <a:spcAft>
-                <a:spcPts val="800"/>
-              </a:spcAft>
-              <a:defRPr sz="1300">
-                <a:solidFill>
-                  <a:srgbClr val="CBD5E1"/>
-                </a:solidFill>
-                <a:latin typeface="Segoe UI"/>
-              </a:defRPr>
-            </a:pPr>
-            <a:r>
-              <a:t>2. Làm bài: Trộn ngẫu nhiên câu hỏi &amp; Auto-Save vào LocalStorage.</a:t>
-            </a:r>
-          </a:p>
-          <a:p>
-            <a:pPr>
-              <a:spcAft>
-                <a:spcPts val="800"/>
-              </a:spcAft>
-              <a:defRPr sz="1300">
-                <a:solidFill>
-                  <a:srgbClr val="CBD5E1"/>
-                </a:solidFill>
-                <a:latin typeface="Segoe UI"/>
-              </a:defRPr>
-            </a:pPr>
-            <a:r>
-              <a:t>3. Giám sát: Ghi nhận vi phạm chuyển tab (Tối đa 3 lần).</a:t>
-            </a:r>
-          </a:p>
-          <a:p>
-            <a:pPr>
-              <a:spcAft>
-                <a:spcPts val="800"/>
-              </a:spcAft>
-              <a:defRPr sz="1300">
-                <a:solidFill>
-                  <a:srgbClr val="CBD5E1"/>
-                </a:solidFill>
-                <a:latin typeface="Segoe UI"/>
-              </a:defRPr>
-            </a:pPr>
-            <a:r>
-              <a:t>4. Nộp bài: POST /api/submissions/submit -&gt; Chấm điểm &amp; hiện giải thích.</a:t>
+                <a:spcPts val="700"/>
+              </a:spcAft>
+              <a:defRPr sz="1300">
+                <a:solidFill>
+                  <a:srgbClr val="CBD5E1"/>
+                </a:solidFill>
+                <a:latin typeface="Segoe UI"/>
+              </a:defRPr>
+            </a:pPr>
+            <a:r>
+              <a:t>1. Bắt đầu: Nhận đề thi.</a:t>
+            </a:r>
+          </a:p>
+          <a:p>
+            <a:pPr>
+              <a:spcAft>
+                <a:spcPts val="700"/>
+              </a:spcAft>
+              <a:defRPr sz="1300">
+                <a:solidFill>
+                  <a:srgbClr val="CBD5E1"/>
+                </a:solidFill>
+                <a:latin typeface="Segoe UI"/>
+              </a:defRPr>
+            </a:pPr>
+            <a:r>
+              <a:t>2. Client: Trộn đề &amp; Auto-Save.</a:t>
+            </a:r>
+          </a:p>
+          <a:p>
+            <a:pPr>
+              <a:spcAft>
+                <a:spcPts val="700"/>
+              </a:spcAft>
+              <a:defRPr sz="1300">
+                <a:solidFill>
+                  <a:srgbClr val="CBD5E1"/>
+                </a:solidFill>
+                <a:latin typeface="Segoe UI"/>
+              </a:defRPr>
+            </a:pPr>
+            <a:r>
+              <a:t>3. Giám sát: Đếm chuyển tab.</a:t>
+            </a:r>
+          </a:p>
+          <a:p>
+            <a:pPr>
+              <a:spcAft>
+                <a:spcPts val="700"/>
+              </a:spcAft>
+              <a:defRPr sz="1300">
+                <a:solidFill>
+                  <a:srgbClr val="CBD5E1"/>
+                </a:solidFill>
+                <a:latin typeface="Segoe UI"/>
+              </a:defRPr>
+            </a:pPr>
+            <a:r>
+              <a:t>4. Nộp bài: Gửi danh sách chọn.</a:t>
+            </a:r>
+          </a:p>
+          <a:p>
+            <a:pPr>
+              <a:spcAft>
+                <a:spcPts val="700"/>
+              </a:spcAft>
+              <a:defRPr sz="1300">
+                <a:solidFill>
+                  <a:srgbClr val="CBD5E1"/>
+                </a:solidFill>
+                <a:latin typeface="Segoe UI"/>
+              </a:defRPr>
+            </a:pPr>
+            <a:r>
+              <a:t>5. Chấm điểm &amp; hiện giải thích.</a:t>
+            </a:r>
+          </a:p>
+        </p:txBody>
+      </p:sp>
+      <p:sp>
+        <p:nvSpPr>
+          <p:cNvPr id="11" name="Rounded Rectangle 10"/>
+          <p:cNvSpPr/>
+          <p:nvPr/>
+        </p:nvSpPr>
+        <p:spPr>
+          <a:xfrm>
+            <a:off x="8138160" y="1645920"/>
+            <a:ext cx="3291840" cy="4663440"/>
+          </a:xfrm>
+          <a:prstGeom prst="roundRect">
+            <a:avLst/>
+          </a:prstGeom>
+          <a:solidFill>
+            <a:srgbClr val="131B2E"/>
+          </a:solidFill>
+          <a:ln w="12700">
+            <a:solidFill>
+              <a:srgbClr val="283554"/>
+            </a:solidFill>
+          </a:ln>
+        </p:spPr>
+        <p:style>
+          <a:lnRef idx="1">
+            <a:schemeClr val="accent1"/>
+          </a:lnRef>
+          <a:fillRef idx="3">
+            <a:schemeClr val="accent1"/>
+          </a:fillRef>
+          <a:effectRef idx="2">
+            <a:schemeClr val="accent1"/>
+          </a:effectRef>
+          <a:fontRef idx="minor">
+            <a:schemeClr val="lt1"/>
+          </a:fontRef>
+        </p:style>
+        <p:txBody>
+          <a:bodyPr rtlCol="0" anchor="ctr"/>
+          <a:lstStyle/>
+          <a:p>
+            <a:pPr algn="ctr"/>
+          </a:p>
+        </p:txBody>
+      </p:sp>
+      <p:sp>
+        <p:nvSpPr>
+          <p:cNvPr id="12" name="TextBox 11"/>
+          <p:cNvSpPr txBox="1"/>
+          <p:nvPr/>
+        </p:nvSpPr>
+        <p:spPr>
+          <a:xfrm>
+            <a:off x="8366760" y="1828800"/>
+            <a:ext cx="2834640" cy="365760"/>
+          </a:xfrm>
+          <a:prstGeom prst="rect">
+            <a:avLst/>
+          </a:prstGeom>
+          <a:noFill/>
+        </p:spPr>
+        <p:txBody>
+          <a:bodyPr wrap="square" lIns="0" tIns="0" rIns="0" bIns="0">
+            <a:spAutoFit/>
+          </a:bodyPr>
+          <a:lstStyle/>
+          <a:p>
+            <a:pPr>
+              <a:defRPr sz="1500" b="1">
+                <a:solidFill>
+                  <a:srgbClr val="06B6D4"/>
+                </a:solidFill>
+                <a:latin typeface="Segoe UI"/>
+              </a:defRPr>
+            </a:pPr>
+            <a:r>
+              <a:t>Luồng 3: AI Sinh Đề Thi</a:t>
+            </a:r>
+          </a:p>
+        </p:txBody>
+      </p:sp>
+      <p:sp>
+        <p:nvSpPr>
+          <p:cNvPr id="13" name="TextBox 12"/>
+          <p:cNvSpPr txBox="1"/>
+          <p:nvPr/>
+        </p:nvSpPr>
+        <p:spPr>
+          <a:xfrm>
+            <a:off x="8366760" y="2286000"/>
+            <a:ext cx="2834640" cy="3657600"/>
+          </a:xfrm>
+          <a:prstGeom prst="rect">
+            <a:avLst/>
+          </a:prstGeom>
+          <a:noFill/>
+        </p:spPr>
+        <p:txBody>
+          <a:bodyPr wrap="square" lIns="0" tIns="0" rIns="0" bIns="0">
+            <a:spAutoFit/>
+          </a:bodyPr>
+          <a:lstStyle/>
+          <a:p>
+            <a:pPr>
+              <a:spcAft>
+                <a:spcPts val="700"/>
+              </a:spcAft>
+              <a:defRPr sz="1300">
+                <a:solidFill>
+                  <a:srgbClr val="CBD5E1"/>
+                </a:solidFill>
+                <a:latin typeface="Segoe UI"/>
+              </a:defRPr>
+            </a:pPr>
+            <a:r>
+              <a:t>1. Giáo viên nhập chủ đề/tài liệu.</a:t>
+            </a:r>
+          </a:p>
+          <a:p>
+            <a:pPr>
+              <a:spcAft>
+                <a:spcPts val="700"/>
+              </a:spcAft>
+              <a:defRPr sz="1300">
+                <a:solidFill>
+                  <a:srgbClr val="CBD5E1"/>
+                </a:solidFill>
+                <a:latin typeface="Segoe UI"/>
+              </a:defRPr>
+            </a:pPr>
+            <a:r>
+              <a:t>2. Backend gửi Prompt tới Gemini.</a:t>
+            </a:r>
+          </a:p>
+          <a:p>
+            <a:pPr>
+              <a:spcAft>
+                <a:spcPts val="700"/>
+              </a:spcAft>
+              <a:defRPr sz="1300">
+                <a:solidFill>
+                  <a:srgbClr val="CBD5E1"/>
+                </a:solidFill>
+                <a:latin typeface="Segoe UI"/>
+              </a:defRPr>
+            </a:pPr>
+            <a:r>
+              <a:t>3. Nhận phản hồi JSON câu hỏi.</a:t>
+            </a:r>
+          </a:p>
+          <a:p>
+            <a:pPr>
+              <a:spcAft>
+                <a:spcPts val="700"/>
+              </a:spcAft>
+              <a:defRPr sz="1300">
+                <a:solidFill>
+                  <a:srgbClr val="CBD5E1"/>
+                </a:solidFill>
+                <a:latin typeface="Segoe UI"/>
+              </a:defRPr>
+            </a:pPr>
+            <a:r>
+              <a:t>4. Giáo viên duyệt &amp; chỉnh sửa.</a:t>
+            </a:r>
+          </a:p>
+          <a:p>
+            <a:pPr>
+              <a:spcAft>
+                <a:spcPts val="700"/>
+              </a:spcAft>
+              <a:defRPr sz="1300">
+                <a:solidFill>
+                  <a:srgbClr val="CBD5E1"/>
+                </a:solidFill>
+                <a:latin typeface="Segoe UI"/>
+              </a:defRPr>
+            </a:pPr>
+            <a:r>
+              <a:t>5. Lưu vào ngân hàng CSDL.</a:t>
             </a:r>
           </a:p>
         </p:txBody>
@@ -6142,8 +6503,8 @@
         </p:nvSpPr>
         <p:spPr>
           <a:xfrm>
-            <a:off x="731520" y="365760"/>
-            <a:ext cx="10728655" cy="1097280"/>
+            <a:off x="731520" y="320040"/>
+            <a:ext cx="10728655" cy="1143000"/>
           </a:xfrm>
           <a:prstGeom prst="rect">
             <a:avLst/>
@@ -6176,7 +6537,7 @@
               <a:spcAft>
                 <a:spcPts val="200"/>
               </a:spcAft>
-              <a:defRPr sz="2300" b="1">
+              <a:defRPr sz="2200" b="1">
                 <a:solidFill>
                   <a:srgbClr val="FFFFFF"/>
                 </a:solidFill>
@@ -6184,7 +6545,7 @@
               </a:defRPr>
             </a:pPr>
             <a:r>
-              <a:t>Kết Quả Đạt Được &amp; Hiệu Năng Thực Tế</a:t>
+              <a:t>Kết Quả Đạt Được &amp; Đo Lường Hiệu Năng</a:t>
             </a:r>
           </a:p>
           <a:p>
@@ -6197,7 +6558,7 @@
               </a:defRPr>
             </a:pPr>
             <a:r>
-              <a:t>Các số liệu thực nghiệm đo đạc trong quá trình kiểm thử hệ thống</a:t>
+              <a:t>Các chỉ số thực nghiệm đo đạc trong quá trình kiểm thử tải và chạy thực tế</a:t>
             </a:r>
           </a:p>
         </p:txBody>
@@ -6211,7 +6572,7 @@
         <p:spPr>
           <a:xfrm>
             <a:off x="731520" y="1645920"/>
-            <a:ext cx="2468880" cy="2011680"/>
+            <a:ext cx="2468880" cy="1920240"/>
           </a:xfrm>
           <a:prstGeom prst="roundRect">
             <a:avLst/>
@@ -6255,7 +6616,7 @@
         </p:nvSpPr>
         <p:spPr>
           <a:xfrm>
-            <a:off x="822960" y="1828800"/>
+            <a:off x="822960" y="1783080"/>
             <a:ext cx="2286000" cy="1645920"/>
           </a:xfrm>
           <a:prstGeom prst="rect">
@@ -6291,7 +6652,7 @@
               </a:defRPr>
             </a:pPr>
             <a:r>
-              <a:t>Thời gian phản hồi API trung bình qua giao thức HTTP</a:t>
+              <a:t>Thời gian phản hồi API trung bình qua giao thức HTTP/HTTPS</a:t>
             </a:r>
           </a:p>
         </p:txBody>
@@ -6305,7 +6666,7 @@
         <p:spPr>
           <a:xfrm>
             <a:off x="3429000" y="1645920"/>
-            <a:ext cx="2468880" cy="2011680"/>
+            <a:ext cx="2468880" cy="1920240"/>
           </a:xfrm>
           <a:prstGeom prst="roundRect">
             <a:avLst/>
@@ -6349,7 +6710,7 @@
         </p:nvSpPr>
         <p:spPr>
           <a:xfrm>
-            <a:off x="3520440" y="1828800"/>
+            <a:off x="3520440" y="1783080"/>
             <a:ext cx="2286000" cy="1645920"/>
           </a:xfrm>
           <a:prstGeom prst="rect">
@@ -6385,7 +6746,7 @@
               </a:defRPr>
             </a:pPr>
             <a:r>
-              <a:t>Gemini AI sinh hoàn chỉnh 10 câu hỏi kèm giải thích</a:t>
+              <a:t>Gemini AI sinh hoàn chỉnh 10-20 câu hỏi kèm 4 đáp án &amp; giải thích</a:t>
             </a:r>
           </a:p>
         </p:txBody>
@@ -6399,7 +6760,7 @@
         <p:spPr>
           <a:xfrm>
             <a:off x="6126480" y="1645920"/>
-            <a:ext cx="2468880" cy="2011680"/>
+            <a:ext cx="2468880" cy="1920240"/>
           </a:xfrm>
           <a:prstGeom prst="roundRect">
             <a:avLst/>
@@ -6443,7 +6804,7 @@
         </p:nvSpPr>
         <p:spPr>
           <a:xfrm>
-            <a:off x="6217920" y="1828800"/>
+            <a:off x="6217920" y="1783080"/>
             <a:ext cx="2286000" cy="1645920"/>
           </a:xfrm>
           <a:prstGeom prst="rect">
@@ -6479,7 +6840,7 @@
               </a:defRPr>
             </a:pPr>
             <a:r>
-              <a:t>Bảo toàn dữ liệu khi rớt mạng Wi-Fi hoặc F5 tải lại trang</a:t>
+              <a:t>Bảo toàn dữ liệu bài làm khi rớt mạng Wi-Fi hoặc F5 tải lại trang</a:t>
             </a:r>
           </a:p>
         </p:txBody>
@@ -6493,7 +6854,7 @@
         <p:spPr>
           <a:xfrm>
             <a:off x="8823960" y="1645920"/>
-            <a:ext cx="2468880" cy="2011680"/>
+            <a:ext cx="2468880" cy="1920240"/>
           </a:xfrm>
           <a:prstGeom prst="roundRect">
             <a:avLst/>
@@ -6537,7 +6898,7 @@
         </p:nvSpPr>
         <p:spPr>
           <a:xfrm>
-            <a:off x="8915400" y="1828800"/>
+            <a:off x="8915400" y="1783080"/>
             <a:ext cx="2286000" cy="1645920"/>
           </a:xfrm>
           <a:prstGeom prst="rect">
@@ -6573,7 +6934,7 @@
               </a:defRPr>
             </a:pPr>
             <a:r>
-              <a:t>Xuất bảng điểm Excel độ rộng chuẩn, triệt tiêu lỗi ###</a:t>
+              <a:t>Xuất bảng điểm Excel tự căn chỉnh độ rộng cột, triệt tiêu lỗi ###</a:t>
             </a:r>
           </a:p>
         </p:txBody>
@@ -6586,8 +6947,8 @@
         </p:nvSpPr>
         <p:spPr>
           <a:xfrm>
-            <a:off x="731520" y="3931920"/>
-            <a:ext cx="10561320" cy="2377440"/>
+            <a:off x="731520" y="3794760"/>
+            <a:ext cx="10561320" cy="2514600"/>
           </a:xfrm>
           <a:prstGeom prst="roundRect">
             <a:avLst/>
@@ -6631,7 +6992,7 @@
         </p:nvSpPr>
         <p:spPr>
           <a:xfrm>
-            <a:off x="960120" y="4114800"/>
+            <a:off x="960120" y="3977640"/>
             <a:ext cx="10104120" cy="365760"/>
           </a:xfrm>
           <a:prstGeom prst="rect">
@@ -6654,7 +7015,7 @@
               </a:defRPr>
             </a:pPr>
             <a:r>
-              <a:t>Tính Năng Hoàn Thiện Thực Tế</a:t>
+              <a:t>Điểm Nổi Bật Vận Hành Thực Tế</a:t>
             </a:r>
           </a:p>
         </p:txBody>
@@ -6667,8 +7028,8 @@
         </p:nvSpPr>
         <p:spPr>
           <a:xfrm>
-            <a:off x="1005840" y="4480560"/>
-            <a:ext cx="10058400" cy="1645920"/>
+            <a:off x="1005840" y="4343400"/>
+            <a:ext cx="10058400" cy="1737360"/>
           </a:xfrm>
           <a:prstGeom prst="rect">
             <a:avLst/>
@@ -6683,65 +7044,65 @@
           <a:p>
             <a:pPr>
               <a:spcAft>
-                <a:spcPts val="800"/>
-              </a:spcAft>
-              <a:defRPr sz="1300">
-                <a:solidFill>
-                  <a:srgbClr val="CBD5E1"/>
-                </a:solidFill>
-                <a:latin typeface="Segoe UI"/>
-              </a:defRPr>
-            </a:pPr>
-            <a:r>
-              <a:t>✓ Chạy ổn định trên nhiều máy cùng lúc (Mạng LAN &amp; Internet qua Pinggy).</a:t>
-            </a:r>
-          </a:p>
-          <a:p>
-            <a:pPr>
-              <a:spcAft>
-                <a:spcPts val="800"/>
-              </a:spcAft>
-              <a:defRPr sz="1300">
-                <a:solidFill>
-                  <a:srgbClr val="CBD5E1"/>
-                </a:solidFill>
-                <a:latin typeface="Segoe UI"/>
-              </a:defRPr>
-            </a:pPr>
-            <a:r>
-              <a:t>✓ Hệ thống chống gian lận hoạt động mượt mà, phân loại rõ thí sinh trung thực và vi phạm.</a:t>
-            </a:r>
-          </a:p>
-          <a:p>
-            <a:pPr>
-              <a:spcAft>
-                <a:spcPts val="800"/>
-              </a:spcAft>
-              <a:defRPr sz="1300">
-                <a:solidFill>
-                  <a:srgbClr val="CBD5E1"/>
-                </a:solidFill>
-                <a:latin typeface="Segoe UI"/>
-              </a:defRPr>
-            </a:pPr>
-            <a:r>
-              <a:t>✓ Bảng thống kê giáo viên có biểu đồ phổ điểm và xuất file Excel sắc nét.</a:t>
-            </a:r>
-          </a:p>
-          <a:p>
-            <a:pPr>
-              <a:spcAft>
-                <a:spcPts val="800"/>
-              </a:spcAft>
-              <a:defRPr sz="1300">
-                <a:solidFill>
-                  <a:srgbClr val="CBD5E1"/>
-                </a:solidFill>
-                <a:latin typeface="Segoe UI"/>
-              </a:defRPr>
-            </a:pPr>
-            <a:r>
-              <a:t>✓ 100% mã nguồn lưu trữ và đồng bộ liên tục trên GitHub.</a:t>
+                <a:spcPts val="700"/>
+              </a:spcAft>
+              <a:defRPr sz="1300">
+                <a:solidFill>
+                  <a:srgbClr val="CBD5E1"/>
+                </a:solidFill>
+                <a:latin typeface="Segoe UI"/>
+              </a:defRPr>
+            </a:pPr>
+            <a:r>
+              <a:t>✓ Chạy thực tế trên đám mây Production: https://quiz-ai-system.vercel.app/.</a:t>
+            </a:r>
+          </a:p>
+          <a:p>
+            <a:pPr>
+              <a:spcAft>
+                <a:spcPts val="700"/>
+              </a:spcAft>
+              <a:defRPr sz="1300">
+                <a:solidFill>
+                  <a:srgbClr val="CBD5E1"/>
+                </a:solidFill>
+                <a:latin typeface="Segoe UI"/>
+              </a:defRPr>
+            </a:pPr>
+            <a:r>
+              <a:t>✓ Hỗ trợ thi đồng thời nhiều thiết bị qua mạng LAN và Cloudflare Tunnel an toàn.</a:t>
+            </a:r>
+          </a:p>
+          <a:p>
+            <a:pPr>
+              <a:spcAft>
+                <a:spcPts val="700"/>
+              </a:spcAft>
+              <a:defRPr sz="1300">
+                <a:solidFill>
+                  <a:srgbClr val="CBD5E1"/>
+                </a:solidFill>
+                <a:latin typeface="Segoe UI"/>
+              </a:defRPr>
+            </a:pPr>
+            <a:r>
+              <a:t>✓ Hệ thống chống gian lận 3 lớp tự động ghi nhận số lần vi phạm chính xác vào CSDL.</a:t>
+            </a:r>
+          </a:p>
+          <a:p>
+            <a:pPr>
+              <a:spcAft>
+                <a:spcPts val="700"/>
+              </a:spcAft>
+              <a:defRPr sz="1300">
+                <a:solidFill>
+                  <a:srgbClr val="CBD5E1"/>
+                </a:solidFill>
+                <a:latin typeface="Segoe UI"/>
+              </a:defRPr>
+            </a:pPr>
+            <a:r>
+              <a:t>✓ 100% mã nguồn lưu trữ và kiểm soát phiên bản liên tục trên GitHub.</a:t>
             </a:r>
           </a:p>
         </p:txBody>
@@ -6858,8 +7219,8 @@
         </p:nvSpPr>
         <p:spPr>
           <a:xfrm>
-            <a:off x="731520" y="365760"/>
-            <a:ext cx="10728655" cy="1097280"/>
+            <a:off x="731520" y="320040"/>
+            <a:ext cx="10728655" cy="1143000"/>
           </a:xfrm>
           <a:prstGeom prst="rect">
             <a:avLst/>
@@ -6892,7 +7253,7 @@
               <a:spcAft>
                 <a:spcPts val="200"/>
               </a:spcAft>
-              <a:defRPr sz="2300" b="1">
+              <a:defRPr sz="2200" b="1">
                 <a:solidFill>
                   <a:srgbClr val="FFFFFF"/>
                 </a:solidFill>
@@ -6900,7 +7261,7 @@
               </a:defRPr>
             </a:pPr>
             <a:r>
-              <a:t>Kết Luận &amp; Định Hướng Phát Triển Cuối Kỳ</a:t>
+              <a:t>Kết Luận &amp; Hướng Mở Rộng Tương Lai</a:t>
             </a:r>
           </a:p>
           <a:p>
@@ -6913,7 +7274,7 @@
               </a:defRPr>
             </a:pPr>
             <a:r>
-              <a:t>Đóng góp thực tiễn của đề tài và kế hoạch nâng cấp trong giai đoạn tiếp theo</a:t>
+              <a:t>Đóng góp thực tiễn của đề tài và định hướng nâng cấp trong giai đoạn tiếp theo</a:t>
             </a:r>
           </a:p>
         </p:txBody>
@@ -7023,65 +7384,81 @@
           <a:p>
             <a:pPr>
               <a:spcAft>
-                <a:spcPts val="800"/>
-              </a:spcAft>
-              <a:defRPr sz="1300">
-                <a:solidFill>
-                  <a:srgbClr val="CBD5E1"/>
-                </a:solidFill>
-                <a:latin typeface="Segoe UI"/>
-              </a:defRPr>
-            </a:pPr>
-            <a:r>
-              <a:t>• Hoàn thành trọn vẹn kiến trúc mạng Client-Server.</a:t>
-            </a:r>
-          </a:p>
-          <a:p>
-            <a:pPr>
-              <a:spcAft>
-                <a:spcPts val="800"/>
-              </a:spcAft>
-              <a:defRPr sz="1300">
-                <a:solidFill>
-                  <a:srgbClr val="CBD5E1"/>
-                </a:solidFill>
-                <a:latin typeface="Segoe UI"/>
-              </a:defRPr>
-            </a:pPr>
-            <a:r>
-              <a:t>• Vận dụng xuất sắc các giao thức TCP/IP, HTTP, HTTPS &amp; JWT.</a:t>
-            </a:r>
-          </a:p>
-          <a:p>
-            <a:pPr>
-              <a:spcAft>
-                <a:spcPts val="800"/>
-              </a:spcAft>
-              <a:defRPr sz="1300">
-                <a:solidFill>
-                  <a:srgbClr val="CBD5E1"/>
-                </a:solidFill>
-                <a:latin typeface="Segoe UI"/>
-              </a:defRPr>
-            </a:pPr>
-            <a:r>
-              <a:t>• Giải quyết triệt để vấn đề gian lận và rớt mạng khi thi cử.</a:t>
-            </a:r>
-          </a:p>
-          <a:p>
-            <a:pPr>
-              <a:spcAft>
-                <a:spcPts val="800"/>
-              </a:spcAft>
-              <a:defRPr sz="1300">
-                <a:solidFill>
-                  <a:srgbClr val="CBD5E1"/>
-                </a:solidFill>
-                <a:latin typeface="Segoe UI"/>
-              </a:defRPr>
-            </a:pPr>
-            <a:r>
-              <a:t>• Ứng dụng thực tiễn cao: Sẵn sàng dùng cho lớp học và kỳ thi.</a:t>
+                <a:spcPts val="700"/>
+              </a:spcAft>
+              <a:defRPr sz="1300">
+                <a:solidFill>
+                  <a:srgbClr val="CBD5E1"/>
+                </a:solidFill>
+                <a:latin typeface="Segoe UI"/>
+              </a:defRPr>
+            </a:pPr>
+            <a:r>
+              <a:t>• Hoàn thành trọn vẹn kiến trúc mạng Client-Server 3 tầng chuẩn chỉ.</a:t>
+            </a:r>
+          </a:p>
+          <a:p>
+            <a:pPr>
+              <a:spcAft>
+                <a:spcPts val="700"/>
+              </a:spcAft>
+              <a:defRPr sz="1300">
+                <a:solidFill>
+                  <a:srgbClr val="CBD5E1"/>
+                </a:solidFill>
+                <a:latin typeface="Segoe UI"/>
+              </a:defRPr>
+            </a:pPr>
+            <a:r>
+              <a:t>• Vận dụng xuất sắc kiến thức: TCP/IP, HTTP/HTTPS, REST, CORS &amp; JWT.</a:t>
+            </a:r>
+          </a:p>
+          <a:p>
+            <a:pPr>
+              <a:spcAft>
+                <a:spcPts val="700"/>
+              </a:spcAft>
+              <a:defRPr sz="1300">
+                <a:solidFill>
+                  <a:srgbClr val="CBD5E1"/>
+                </a:solidFill>
+                <a:latin typeface="Segoe UI"/>
+              </a:defRPr>
+            </a:pPr>
+            <a:r>
+              <a:t>• Giải quyết triệt để vấn đề gian lận thi cử và mất bài khi rớt mạng.</a:t>
+            </a:r>
+          </a:p>
+          <a:p>
+            <a:pPr>
+              <a:spcAft>
+                <a:spcPts val="700"/>
+              </a:spcAft>
+              <a:defRPr sz="1300">
+                <a:solidFill>
+                  <a:srgbClr val="CBD5E1"/>
+                </a:solidFill>
+                <a:latin typeface="Segoe UI"/>
+              </a:defRPr>
+            </a:pPr>
+            <a:r>
+              <a:t>• Tích hợp thành công GenAI Gemini tạo đề thi thông minh tự động.</a:t>
+            </a:r>
+          </a:p>
+          <a:p>
+            <a:pPr>
+              <a:spcAft>
+                <a:spcPts val="700"/>
+              </a:spcAft>
+              <a:defRPr sz="1300">
+                <a:solidFill>
+                  <a:srgbClr val="CBD5E1"/>
+                </a:solidFill>
+                <a:latin typeface="Segoe UI"/>
+              </a:defRPr>
+            </a:pPr>
+            <a:r>
+              <a:t>• Triển khai thành công lên môi trường đám mây Vercel Production.</a:t>
             </a:r>
           </a:p>
         </p:txBody>
@@ -7162,7 +7539,7 @@
               </a:defRPr>
             </a:pPr>
             <a:r>
-              <a:t>Định Hướng Cuối Kỳ</a:t>
+              <a:t>Hướng Phát Triển Tương Lai</a:t>
             </a:r>
           </a:p>
         </p:txBody>
@@ -7191,7 +7568,7 @@
           <a:p>
             <a:pPr>
               <a:spcAft>
-                <a:spcPts val="800"/>
+                <a:spcPts val="700"/>
               </a:spcAft>
               <a:defRPr sz="1300">
                 <a:solidFill>
@@ -7207,49 +7584,302 @@
           <a:p>
             <a:pPr>
               <a:spcAft>
-                <a:spcPts val="800"/>
-              </a:spcAft>
-              <a:defRPr sz="1300">
-                <a:solidFill>
-                  <a:srgbClr val="CBD5E1"/>
-                </a:solidFill>
-                <a:latin typeface="Segoe UI"/>
-              </a:defRPr>
-            </a:pPr>
-            <a:r>
-              <a:t>• AI Camera: Giám sát nhận diện khuôn mặt qua webcam.</a:t>
-            </a:r>
-          </a:p>
-          <a:p>
-            <a:pPr>
-              <a:spcAft>
-                <a:spcPts val="800"/>
-              </a:spcAft>
-              <a:defRPr sz="1300">
-                <a:solidFill>
-                  <a:srgbClr val="CBD5E1"/>
-                </a:solidFill>
-                <a:latin typeface="Segoe UI"/>
-              </a:defRPr>
-            </a:pPr>
-            <a:r>
-              <a:t>• Docker Container: Đóng gói toàn bộ Backend &amp; DB vào Container.</a:t>
-            </a:r>
-          </a:p>
-          <a:p>
-            <a:pPr>
-              <a:spcAft>
-                <a:spcPts val="800"/>
-              </a:spcAft>
-              <a:defRPr sz="1300">
-                <a:solidFill>
-                  <a:srgbClr val="CBD5E1"/>
-                </a:solidFill>
-                <a:latin typeface="Segoe UI"/>
-              </a:defRPr>
-            </a:pPr>
-            <a:r>
-              <a:t>• Cloud Deployment: Triển khai lên máy chủ đám mây với tên miền riêng.</a:t>
+                <a:spcPts val="700"/>
+              </a:spcAft>
+              <a:defRPr sz="1300">
+                <a:solidFill>
+                  <a:srgbClr val="CBD5E1"/>
+                </a:solidFill>
+                <a:latin typeface="Segoe UI"/>
+              </a:defRPr>
+            </a:pPr>
+            <a:r>
+              <a:t>• AI Camera Proctoring: Nhận diện khuôn mặt &amp; phát hiện quay cóp qua webcam.</a:t>
+            </a:r>
+          </a:p>
+          <a:p>
+            <a:pPr>
+              <a:spcAft>
+                <a:spcPts val="700"/>
+              </a:spcAft>
+              <a:defRPr sz="1300">
+                <a:solidFill>
+                  <a:srgbClr val="CBD5E1"/>
+                </a:solidFill>
+                <a:latin typeface="Segoe UI"/>
+              </a:defRPr>
+            </a:pPr>
+            <a:r>
+              <a:t>• Mobile Application: Đóng gói app đa nền tảng Flutter / React Native.</a:t>
+            </a:r>
+          </a:p>
+          <a:p>
+            <a:pPr>
+              <a:spcAft>
+                <a:spcPts val="700"/>
+              </a:spcAft>
+              <a:defRPr sz="1300">
+                <a:solidFill>
+                  <a:srgbClr val="CBD5E1"/>
+                </a:solidFill>
+                <a:latin typeface="Segoe UI"/>
+              </a:defRPr>
+            </a:pPr>
+            <a:r>
+              <a:t>• Microservices Architecture: Tách riêng dịch vụ AI Generator và Auth Service.</a:t>
+            </a:r>
+          </a:p>
+          <a:p>
+            <a:pPr>
+              <a:spcAft>
+                <a:spcPts val="700"/>
+              </a:spcAft>
+              <a:defRPr sz="1300">
+                <a:solidFill>
+                  <a:srgbClr val="CBD5E1"/>
+                </a:solidFill>
+                <a:latin typeface="Segoe UI"/>
+              </a:defRPr>
+            </a:pPr>
+            <a:r>
+              <a:t>• Database Clustering: Nhân bản CSDL tăng khả năng chịu tải hàng nghìn thí sinh.</a:t>
+            </a:r>
+          </a:p>
+        </p:txBody>
+      </p:sp>
+    </p:spTree>
+  </p:cSld>
+  <p:clrMapOvr>
+    <a:masterClrMapping/>
+  </p:clrMapOvr>
+</p:sld>
+</file>
+
+<file path=ppt/slides/slide17.xml><?xml version="1.0" encoding="utf-8"?>
+<p:sld xmlns:a="http://schemas.openxmlformats.org/drawingml/2006/main" xmlns:p="http://schemas.openxmlformats.org/presentationml/2006/main" xmlns:r="http://schemas.openxmlformats.org/officeDocument/2006/relationships">
+  <p:cSld>
+    <p:spTree>
+      <p:nvGrpSpPr>
+        <p:cNvPr id="1" name=""/>
+        <p:cNvGrpSpPr/>
+        <p:nvPr/>
+      </p:nvGrpSpPr>
+      <p:grpSpPr/>
+      <p:sp>
+        <p:nvSpPr>
+          <p:cNvPr id="2" name="Rectangle 1"/>
+          <p:cNvSpPr/>
+          <p:nvPr/>
+        </p:nvSpPr>
+        <p:spPr>
+          <a:xfrm>
+            <a:off x="0" y="0"/>
+            <a:ext cx="12191695" cy="6858000"/>
+          </a:xfrm>
+          <a:prstGeom prst="rect">
+            <a:avLst/>
+          </a:prstGeom>
+          <a:solidFill>
+            <a:srgbClr val="0B0F19"/>
+          </a:solidFill>
+          <a:ln>
+            <a:noFill/>
+          </a:ln>
+        </p:spPr>
+        <p:style>
+          <a:lnRef idx="1">
+            <a:schemeClr val="accent1"/>
+          </a:lnRef>
+          <a:fillRef idx="3">
+            <a:schemeClr val="accent1"/>
+          </a:fillRef>
+          <a:effectRef idx="2">
+            <a:schemeClr val="accent1"/>
+          </a:effectRef>
+          <a:fontRef idx="minor">
+            <a:schemeClr val="lt1"/>
+          </a:fontRef>
+        </p:style>
+        <p:txBody>
+          <a:bodyPr rtlCol="0" anchor="ctr"/>
+          <a:lstStyle/>
+          <a:p>
+            <a:pPr algn="ctr"/>
+          </a:p>
+        </p:txBody>
+      </p:sp>
+      <p:sp>
+        <p:nvSpPr>
+          <p:cNvPr id="3" name="Rectangle 2"/>
+          <p:cNvSpPr/>
+          <p:nvPr/>
+        </p:nvSpPr>
+        <p:spPr>
+          <a:xfrm>
+            <a:off x="0" y="0"/>
+            <a:ext cx="12191695" cy="73152"/>
+          </a:xfrm>
+          <a:prstGeom prst="rect">
+            <a:avLst/>
+          </a:prstGeom>
+          <a:solidFill>
+            <a:srgbClr val="6366F1"/>
+          </a:solidFill>
+          <a:ln>
+            <a:noFill/>
+          </a:ln>
+        </p:spPr>
+        <p:style>
+          <a:lnRef idx="1">
+            <a:schemeClr val="accent1"/>
+          </a:lnRef>
+          <a:fillRef idx="3">
+            <a:schemeClr val="accent1"/>
+          </a:fillRef>
+          <a:effectRef idx="2">
+            <a:schemeClr val="accent1"/>
+          </a:effectRef>
+          <a:fontRef idx="minor">
+            <a:schemeClr val="lt1"/>
+          </a:fontRef>
+        </p:style>
+        <p:txBody>
+          <a:bodyPr rtlCol="0" anchor="ctr"/>
+          <a:lstStyle/>
+          <a:p>
+            <a:pPr algn="ctr"/>
+          </a:p>
+        </p:txBody>
+      </p:sp>
+      <p:sp>
+        <p:nvSpPr>
+          <p:cNvPr id="4" name="Rounded Rectangle 3"/>
+          <p:cNvSpPr/>
+          <p:nvPr/>
+        </p:nvSpPr>
+        <p:spPr>
+          <a:xfrm>
+            <a:off x="1371600" y="914400"/>
+            <a:ext cx="9448495" cy="5029200"/>
+          </a:xfrm>
+          <a:prstGeom prst="roundRect">
+            <a:avLst/>
+          </a:prstGeom>
+          <a:solidFill>
+            <a:srgbClr val="131B2E"/>
+          </a:solidFill>
+          <a:ln w="19050">
+            <a:solidFill>
+              <a:srgbClr val="283554"/>
+            </a:solidFill>
+          </a:ln>
+        </p:spPr>
+        <p:style>
+          <a:lnRef idx="1">
+            <a:schemeClr val="accent1"/>
+          </a:lnRef>
+          <a:fillRef idx="3">
+            <a:schemeClr val="accent1"/>
+          </a:fillRef>
+          <a:effectRef idx="2">
+            <a:schemeClr val="accent1"/>
+          </a:effectRef>
+          <a:fontRef idx="minor">
+            <a:schemeClr val="lt1"/>
+          </a:fontRef>
+        </p:style>
+        <p:txBody>
+          <a:bodyPr rtlCol="0" anchor="ctr"/>
+          <a:lstStyle/>
+          <a:p>
+            <a:pPr algn="ctr"/>
+          </a:p>
+        </p:txBody>
+      </p:sp>
+      <p:sp>
+        <p:nvSpPr>
+          <p:cNvPr id="5" name="TextBox 4"/>
+          <p:cNvSpPr txBox="1"/>
+          <p:nvPr/>
+        </p:nvSpPr>
+        <p:spPr>
+          <a:xfrm>
+            <a:off x="1645920" y="1280160"/>
+            <a:ext cx="8899855" cy="4297680"/>
+          </a:xfrm>
+          <a:prstGeom prst="rect">
+            <a:avLst/>
+          </a:prstGeom>
+          <a:noFill/>
+        </p:spPr>
+        <p:txBody>
+          <a:bodyPr wrap="square" lIns="0" tIns="0" rIns="0" bIns="0">
+            <a:spAutoFit/>
+          </a:bodyPr>
+          <a:lstStyle/>
+          <a:p>
+            <a:pPr algn="ctr">
+              <a:spcAft>
+                <a:spcPts val="1200"/>
+              </a:spcAft>
+              <a:defRPr sz="1300" b="1">
+                <a:solidFill>
+                  <a:srgbClr val="06B6D4"/>
+                </a:solidFill>
+                <a:latin typeface="Segoe UI"/>
+              </a:defRPr>
+            </a:pPr>
+            <a:r>
+              <a:t>LỜI CẢM ƠN</a:t>
+            </a:r>
+          </a:p>
+          <a:p>
+            <a:pPr algn="ctr">
+              <a:spcAft>
+                <a:spcPts val="1800"/>
+              </a:spcAft>
+              <a:defRPr sz="2600" b="1">
+                <a:solidFill>
+                  <a:srgbClr val="FFFFFF"/>
+                </a:solidFill>
+                <a:latin typeface="Segoe UI"/>
+              </a:defRPr>
+            </a:pPr>
+            <a:r>
+              <a:t>Cảm Ơn Quý Thầy Cô &amp; Hội Đồng Đã Lắng Nghe!</a:t>
+            </a:r>
+          </a:p>
+          <a:p>
+            <a:pPr algn="ctr">
+              <a:spcAft>
+                <a:spcPts val="2400"/>
+              </a:spcAft>
+              <a:defRPr sz="1400">
+                <a:solidFill>
+                  <a:srgbClr val="10B981"/>
+                </a:solidFill>
+                <a:latin typeface="Segoe UI"/>
+              </a:defRPr>
+            </a:pPr>
+            <a:r>
+              <a:t>Hệ Thống Trực Tuyến: https://quiz-ai-system.vercel.app/</a:t>
+            </a:r>
+            <a:br/>
+            <a:r>
+              <a:t>GitHub: https://github.com/hieuqt05/quiz-ai-system</a:t>
+            </a:r>
+          </a:p>
+          <a:p>
+            <a:pPr algn="ctr">
+              <a:defRPr sz="1400" b="1">
+                <a:solidFill>
+                  <a:srgbClr val="CBD5E1"/>
+                </a:solidFill>
+                <a:latin typeface="Segoe UI"/>
+              </a:defRPr>
+            </a:pPr>
+            <a:r>
+              <a:t>Nhóm xin sẵn sàng lắng nghe nhận xét và trả lời các câu hỏi từ Hội Đồng!</a:t>
             </a:r>
           </a:p>
         </p:txBody>
@@ -7366,8 +7996,8 @@
         </p:nvSpPr>
         <p:spPr>
           <a:xfrm>
-            <a:off x="731520" y="365760"/>
-            <a:ext cx="10728655" cy="1097280"/>
+            <a:off x="731520" y="320040"/>
+            <a:ext cx="10728655" cy="1143000"/>
           </a:xfrm>
           <a:prstGeom prst="rect">
             <a:avLst/>
@@ -7400,7 +8030,7 @@
               <a:spcAft>
                 <a:spcPts val="200"/>
               </a:spcAft>
-              <a:defRPr sz="2300" b="1">
+              <a:defRPr sz="2200" b="1">
                 <a:solidFill>
                   <a:srgbClr val="FFFFFF"/>
                 </a:solidFill>
@@ -7531,7 +8161,7 @@
           <a:p>
             <a:pPr>
               <a:spcAft>
-                <a:spcPts val="800"/>
+                <a:spcPts val="700"/>
               </a:spcAft>
               <a:defRPr sz="1300">
                 <a:solidFill>
@@ -7547,7 +8177,7 @@
           <a:p>
             <a:pPr>
               <a:spcAft>
-                <a:spcPts val="800"/>
+                <a:spcPts val="700"/>
               </a:spcAft>
               <a:defRPr sz="1300">
                 <a:solidFill>
@@ -7563,7 +8193,7 @@
           <a:p>
             <a:pPr>
               <a:spcAft>
-                <a:spcPts val="800"/>
+                <a:spcPts val="700"/>
               </a:spcAft>
               <a:defRPr sz="1300">
                 <a:solidFill>
@@ -7579,17 +8209,33 @@
           <a:p>
             <a:pPr>
               <a:spcAft>
-                <a:spcPts val="800"/>
-              </a:spcAft>
-              <a:defRPr sz="1300">
-                <a:solidFill>
-                  <a:srgbClr val="CBD5E1"/>
-                </a:solidFill>
-                <a:latin typeface="Segoe UI"/>
-              </a:defRPr>
-            </a:pPr>
-            <a:r>
-              <a:t>• Rủi ro đường truyền: Rớt mạng Wi-Fi làm mất dữ liệu bài thi đang làm dở.</a:t>
+                <a:spcPts val="700"/>
+              </a:spcAft>
+              <a:defRPr sz="1300">
+                <a:solidFill>
+                  <a:srgbClr val="CBD5E1"/>
+                </a:solidFill>
+                <a:latin typeface="Segoe UI"/>
+              </a:defRPr>
+            </a:pPr>
+            <a:r>
+              <a:t>• Chụp trộm đề: Thí sinh dùng điện thoại hoặc phím tắt chụp màn hình.</a:t>
+            </a:r>
+          </a:p>
+          <a:p>
+            <a:pPr>
+              <a:spcAft>
+                <a:spcPts val="700"/>
+              </a:spcAft>
+              <a:defRPr sz="1300">
+                <a:solidFill>
+                  <a:srgbClr val="CBD5E1"/>
+                </a:solidFill>
+                <a:latin typeface="Segoe UI"/>
+              </a:defRPr>
+            </a:pPr>
+            <a:r>
+              <a:t>• Rủi ro đường truyền: Rớt mạng Wi-Fi làm mất sạch bài thi đang làm.</a:t>
             </a:r>
           </a:p>
         </p:txBody>
@@ -7699,23 +8345,23 @@
           <a:p>
             <a:pPr>
               <a:spcAft>
-                <a:spcPts val="800"/>
-              </a:spcAft>
-              <a:defRPr sz="1300">
-                <a:solidFill>
-                  <a:srgbClr val="CBD5E1"/>
-                </a:solidFill>
-                <a:latin typeface="Segoe UI"/>
-              </a:defRPr>
-            </a:pPr>
-            <a:r>
-              <a:t>• AI Gemini: Tự động sinh bộ đề 10-30 câu chuẩn xác trong vài giây.</a:t>
-            </a:r>
-          </a:p>
-          <a:p>
-            <a:pPr>
-              <a:spcAft>
-                <a:spcPts val="800"/>
+                <a:spcPts val="700"/>
+              </a:spcAft>
+              <a:defRPr sz="1300">
+                <a:solidFill>
+                  <a:srgbClr val="CBD5E1"/>
+                </a:solidFill>
+                <a:latin typeface="Segoe UI"/>
+              </a:defRPr>
+            </a:pPr>
+            <a:r>
+              <a:t>• AI Gemini: Tự động sinh bộ đề 10-30 câu chuẩn xác trong 3-5 giây.</a:t>
+            </a:r>
+          </a:p>
+          <a:p>
+            <a:pPr>
+              <a:spcAft>
+                <a:spcPts val="700"/>
               </a:spcAft>
               <a:defRPr sz="1300">
                 <a:solidFill>
@@ -7731,33 +8377,49 @@
           <a:p>
             <a:pPr>
               <a:spcAft>
-                <a:spcPts val="800"/>
-              </a:spcAft>
-              <a:defRPr sz="1300">
-                <a:solidFill>
-                  <a:srgbClr val="CBD5E1"/>
-                </a:solidFill>
-                <a:latin typeface="Segoe UI"/>
-              </a:defRPr>
-            </a:pPr>
-            <a:r>
-              <a:t>• Trộn đề ngẫu nhiên: Đảo vị trí câu hỏi &amp; 4 đáp án A, B, C, D cho từng máy.</a:t>
-            </a:r>
-          </a:p>
-          <a:p>
-            <a:pPr>
-              <a:spcAft>
-                <a:spcPts val="800"/>
-              </a:spcAft>
-              <a:defRPr sz="1300">
-                <a:solidFill>
-                  <a:srgbClr val="CBD5E1"/>
-                </a:solidFill>
-                <a:latin typeface="Segoe UI"/>
-              </a:defRPr>
-            </a:pPr>
-            <a:r>
-              <a:t>• Auto-Save Real-time: Bảo toàn dữ liệu 100% khi rớt mạng hoặc sập nguồn.</a:t>
+                <a:spcPts val="700"/>
+              </a:spcAft>
+              <a:defRPr sz="1300">
+                <a:solidFill>
+                  <a:srgbClr val="CBD5E1"/>
+                </a:solidFill>
+                <a:latin typeface="Segoe UI"/>
+              </a:defRPr>
+            </a:pPr>
+            <a:r>
+              <a:t>• Dynamic Watermark: In mờ danh tính thí sinh chống chụp ảnh bằng điện thoại.</a:t>
+            </a:r>
+          </a:p>
+          <a:p>
+            <a:pPr>
+              <a:spcAft>
+                <a:spcPts val="700"/>
+              </a:spcAft>
+              <a:defRPr sz="1300">
+                <a:solidFill>
+                  <a:srgbClr val="CBD5E1"/>
+                </a:solidFill>
+                <a:latin typeface="Segoe UI"/>
+              </a:defRPr>
+            </a:pPr>
+            <a:r>
+              <a:t>• Trộn đề Fisher-Yates: Đảo ngẫu nhiên vị trí câu hỏi &amp; đáp án A, B, C, D.</a:t>
+            </a:r>
+          </a:p>
+          <a:p>
+            <a:pPr>
+              <a:spcAft>
+                <a:spcPts val="700"/>
+              </a:spcAft>
+              <a:defRPr sz="1300">
+                <a:solidFill>
+                  <a:srgbClr val="CBD5E1"/>
+                </a:solidFill>
+                <a:latin typeface="Segoe UI"/>
+              </a:defRPr>
+            </a:pPr>
+            <a:r>
+              <a:t>• Auto-Save Real-time: Bảo toàn 100% dữ liệu bài làm khi rớt mạng hoặc F5.</a:t>
             </a:r>
           </a:p>
         </p:txBody>
@@ -7874,8 +8536,8 @@
         </p:nvSpPr>
         <p:spPr>
           <a:xfrm>
-            <a:off x="731520" y="365760"/>
-            <a:ext cx="10728655" cy="1097280"/>
+            <a:off x="731520" y="320040"/>
+            <a:ext cx="10728655" cy="1143000"/>
           </a:xfrm>
           <a:prstGeom prst="rect">
             <a:avLst/>
@@ -7908,7 +8570,7 @@
               <a:spcAft>
                 <a:spcPts val="200"/>
               </a:spcAft>
-              <a:defRPr sz="2300" b="1">
+              <a:defRPr sz="2200" b="1">
                 <a:solidFill>
                   <a:srgbClr val="FFFFFF"/>
                 </a:solidFill>
@@ -8010,7 +8672,7 @@
               </a:defRPr>
             </a:pPr>
             <a:r>
-              <a:t>Backend &amp; Network</a:t>
+              <a:t>Backend &amp; Architecture</a:t>
             </a:r>
           </a:p>
         </p:txBody>
@@ -8039,23 +8701,23 @@
           <a:p>
             <a:pPr>
               <a:spcAft>
-                <a:spcPts val="800"/>
-              </a:spcAft>
-              <a:defRPr sz="1300">
-                <a:solidFill>
-                  <a:srgbClr val="CBD5E1"/>
-                </a:solidFill>
-                <a:latin typeface="Segoe UI"/>
-              </a:defRPr>
-            </a:pPr>
-            <a:r>
-              <a:t>• Xây dựng ASP.NET Core 9 API.</a:t>
-            </a:r>
-          </a:p>
-          <a:p>
-            <a:pPr>
-              <a:spcAft>
-                <a:spcPts val="800"/>
+                <a:spcPts val="700"/>
+              </a:spcAft>
+              <a:defRPr sz="1300">
+                <a:solidFill>
+                  <a:srgbClr val="CBD5E1"/>
+                </a:solidFill>
+                <a:latin typeface="Segoe UI"/>
+              </a:defRPr>
+            </a:pPr>
+            <a:r>
+              <a:t>• Lập trình ASP.NET Core 9 API.</a:t>
+            </a:r>
+          </a:p>
+          <a:p>
+            <a:pPr>
+              <a:spcAft>
+                <a:spcPts val="700"/>
               </a:spcAft>
               <a:defRPr sz="1300">
                 <a:solidFill>
@@ -8071,33 +8733,49 @@
           <a:p>
             <a:pPr>
               <a:spcAft>
-                <a:spcPts val="800"/>
-              </a:spcAft>
-              <a:defRPr sz="1300">
-                <a:solidFill>
-                  <a:srgbClr val="CBD5E1"/>
-                </a:solidFill>
-                <a:latin typeface="Segoe UI"/>
-              </a:defRPr>
-            </a:pPr>
-            <a:r>
-              <a:t>• Tích hợp Gemini AI &amp; JWT Auth.</a:t>
-            </a:r>
-          </a:p>
-          <a:p>
-            <a:pPr>
-              <a:spcAft>
-                <a:spcPts val="800"/>
-              </a:spcAft>
-              <a:defRPr sz="1300">
-                <a:solidFill>
-                  <a:srgbClr val="CBD5E1"/>
-                </a:solidFill>
-                <a:latin typeface="Segoe UI"/>
-              </a:defRPr>
-            </a:pPr>
-            <a:r>
-              <a:t>• Thiết kế Database SQL Server.</a:t>
+                <a:spcPts val="700"/>
+              </a:spcAft>
+              <a:defRPr sz="1300">
+                <a:solidFill>
+                  <a:srgbClr val="CBD5E1"/>
+                </a:solidFill>
+                <a:latin typeface="Segoe UI"/>
+              </a:defRPr>
+            </a:pPr>
+            <a:r>
+              <a:t>• Tích hợp Google Gemini AI.</a:t>
+            </a:r>
+          </a:p>
+          <a:p>
+            <a:pPr>
+              <a:spcAft>
+                <a:spcPts val="700"/>
+              </a:spcAft>
+              <a:defRPr sz="1300">
+                <a:solidFill>
+                  <a:srgbClr val="CBD5E1"/>
+                </a:solidFill>
+                <a:latin typeface="Segoe UI"/>
+              </a:defRPr>
+            </a:pPr>
+            <a:r>
+              <a:t>• Xác thực JWT &amp; Mã hóa BCrypt.</a:t>
+            </a:r>
+          </a:p>
+          <a:p>
+            <a:pPr>
+              <a:spcAft>
+                <a:spcPts val="700"/>
+              </a:spcAft>
+              <a:defRPr sz="1300">
+                <a:solidFill>
+                  <a:srgbClr val="CBD5E1"/>
+                </a:solidFill>
+                <a:latin typeface="Segoe UI"/>
+              </a:defRPr>
+            </a:pPr>
+            <a:r>
+              <a:t>• Thiết kế CSDL SQL Server &amp; EF Core.</a:t>
             </a:r>
           </a:p>
         </p:txBody>
@@ -8178,7 +8856,7 @@
               </a:defRPr>
             </a:pPr>
             <a:r>
-              <a:t>Frontend &amp; UI/UX</a:t>
+              <a:t>Frontend &amp; UX/UI</a:t>
             </a:r>
           </a:p>
         </p:txBody>
@@ -8207,55 +8885,71 @@
           <a:p>
             <a:pPr>
               <a:spcAft>
-                <a:spcPts val="800"/>
-              </a:spcAft>
-              <a:defRPr sz="1300">
-                <a:solidFill>
-                  <a:srgbClr val="CBD5E1"/>
-                </a:solidFill>
-                <a:latin typeface="Segoe UI"/>
-              </a:defRPr>
-            </a:pPr>
-            <a:r>
-              <a:t>• Phát triển giao diện React 19 SPA.</a:t>
-            </a:r>
-          </a:p>
-          <a:p>
-            <a:pPr>
-              <a:spcAft>
-                <a:spcPts val="800"/>
-              </a:spcAft>
-              <a:defRPr sz="1300">
-                <a:solidFill>
-                  <a:srgbClr val="CBD5E1"/>
-                </a:solidFill>
-                <a:latin typeface="Segoe UI"/>
-              </a:defRPr>
-            </a:pPr>
-            <a:r>
-              <a:t>• Thiết kế Dark Mode với TailwindCSS.</a:t>
-            </a:r>
-          </a:p>
-          <a:p>
-            <a:pPr>
-              <a:spcAft>
-                <a:spcPts val="800"/>
-              </a:spcAft>
-              <a:defRPr sz="1300">
-                <a:solidFill>
-                  <a:srgbClr val="CBD5E1"/>
-                </a:solidFill>
-                <a:latin typeface="Segoe UI"/>
-              </a:defRPr>
-            </a:pPr>
-            <a:r>
-              <a:t>• Xử lý Auto-Save &amp; Trộn đề ngẫu nhiên.</a:t>
-            </a:r>
-          </a:p>
-          <a:p>
-            <a:pPr>
-              <a:spcAft>
-                <a:spcPts val="800"/>
+                <a:spcPts val="700"/>
+              </a:spcAft>
+              <a:defRPr sz="1300">
+                <a:solidFill>
+                  <a:srgbClr val="CBD5E1"/>
+                </a:solidFill>
+                <a:latin typeface="Segoe UI"/>
+              </a:defRPr>
+            </a:pPr>
+            <a:r>
+              <a:t>• Xây dựng giao diện React 19 SPA.</a:t>
+            </a:r>
+          </a:p>
+          <a:p>
+            <a:pPr>
+              <a:spcAft>
+                <a:spcPts val="700"/>
+              </a:spcAft>
+              <a:defRPr sz="1300">
+                <a:solidFill>
+                  <a:srgbClr val="CBD5E1"/>
+                </a:solidFill>
+                <a:latin typeface="Segoe UI"/>
+              </a:defRPr>
+            </a:pPr>
+            <a:r>
+              <a:t>• Dark Mode hiện đại với TailwindCSS.</a:t>
+            </a:r>
+          </a:p>
+          <a:p>
+            <a:pPr>
+              <a:spcAft>
+                <a:spcPts val="700"/>
+              </a:spcAft>
+              <a:defRPr sz="1300">
+                <a:solidFill>
+                  <a:srgbClr val="CBD5E1"/>
+                </a:solidFill>
+                <a:latin typeface="Segoe UI"/>
+              </a:defRPr>
+            </a:pPr>
+            <a:r>
+              <a:t>• Xử lý Auto-Save &amp; Countdown Timer.</a:t>
+            </a:r>
+          </a:p>
+          <a:p>
+            <a:pPr>
+              <a:spcAft>
+                <a:spcPts val="700"/>
+              </a:spcAft>
+              <a:defRPr sz="1300">
+                <a:solidFill>
+                  <a:srgbClr val="CBD5E1"/>
+                </a:solidFill>
+                <a:latin typeface="Segoe UI"/>
+              </a:defRPr>
+            </a:pPr>
+            <a:r>
+              <a:t>• Trộn đề ngẫu nhiên per attempt.</a:t>
+            </a:r>
+          </a:p>
+          <a:p>
+            <a:pPr>
+              <a:spcAft>
+                <a:spcPts val="700"/>
               </a:spcAft>
               <a:defRPr sz="1300">
                 <a:solidFill>
@@ -8346,7 +9040,7 @@
               </a:defRPr>
             </a:pPr>
             <a:r>
-              <a:t>Security &amp; Testing</a:t>
+              <a:t>Security &amp; Cloud DevOps</a:t>
             </a:r>
           </a:p>
         </p:txBody>
@@ -8375,65 +9069,81 @@
           <a:p>
             <a:pPr>
               <a:spcAft>
-                <a:spcPts val="800"/>
-              </a:spcAft>
-              <a:defRPr sz="1300">
-                <a:solidFill>
-                  <a:srgbClr val="CBD5E1"/>
-                </a:solidFill>
-                <a:latin typeface="Segoe UI"/>
-              </a:defRPr>
-            </a:pPr>
-            <a:r>
-              <a:t>• Lập trình module Chống gian lận 3 lớp.</a:t>
-            </a:r>
-          </a:p>
-          <a:p>
-            <a:pPr>
-              <a:spcAft>
-                <a:spcPts val="800"/>
-              </a:spcAft>
-              <a:defRPr sz="1300">
-                <a:solidFill>
-                  <a:srgbClr val="CBD5E1"/>
-                </a:solidFill>
-                <a:latin typeface="Segoe UI"/>
-              </a:defRPr>
-            </a:pPr>
-            <a:r>
-              <a:t>• Thiết lập SSH Tunnel (Pinggy / QR).</a:t>
-            </a:r>
-          </a:p>
-          <a:p>
-            <a:pPr>
-              <a:spcAft>
-                <a:spcPts val="800"/>
-              </a:spcAft>
-              <a:defRPr sz="1300">
-                <a:solidFill>
-                  <a:srgbClr val="CBD5E1"/>
-                </a:solidFill>
-                <a:latin typeface="Segoe UI"/>
-              </a:defRPr>
-            </a:pPr>
-            <a:r>
-              <a:t>• Kiểm thử chịu lỗi mạng &amp; Stress test.</a:t>
-            </a:r>
-          </a:p>
-          <a:p>
-            <a:pPr>
-              <a:spcAft>
-                <a:spcPts val="800"/>
-              </a:spcAft>
-              <a:defRPr sz="1300">
-                <a:solidFill>
-                  <a:srgbClr val="CBD5E1"/>
-                </a:solidFill>
-                <a:latin typeface="Segoe UI"/>
-              </a:defRPr>
-            </a:pPr>
-            <a:r>
-              <a:t>• Đóng gói tài liệu &amp; Slide thuyết trình.</a:t>
+                <a:spcPts val="700"/>
+              </a:spcAft>
+              <a:defRPr sz="1300">
+                <a:solidFill>
+                  <a:srgbClr val="CBD5E1"/>
+                </a:solidFill>
+                <a:latin typeface="Segoe UI"/>
+              </a:defRPr>
+            </a:pPr>
+            <a:r>
+              <a:t>• Phát triển module Anti-Cheat 3 lớp.</a:t>
+            </a:r>
+          </a:p>
+          <a:p>
+            <a:pPr>
+              <a:spcAft>
+                <a:spcPts val="700"/>
+              </a:spcAft>
+              <a:defRPr sz="1300">
+                <a:solidFill>
+                  <a:srgbClr val="CBD5E1"/>
+                </a:solidFill>
+                <a:latin typeface="Segoe UI"/>
+              </a:defRPr>
+            </a:pPr>
+            <a:r>
+              <a:t>• Kỹ thuật Debounce chống đếm trùng tab.</a:t>
+            </a:r>
+          </a:p>
+          <a:p>
+            <a:pPr>
+              <a:spcAft>
+                <a:spcPts val="700"/>
+              </a:spcAft>
+              <a:defRPr sz="1300">
+                <a:solidFill>
+                  <a:srgbClr val="CBD5E1"/>
+                </a:solidFill>
+                <a:latin typeface="Segoe UI"/>
+              </a:defRPr>
+            </a:pPr>
+            <a:r>
+              <a:t>• Thiết lập Cloudflare Tunnel &amp; HTTPS.</a:t>
+            </a:r>
+          </a:p>
+          <a:p>
+            <a:pPr>
+              <a:spcAft>
+                <a:spcPts val="700"/>
+              </a:spcAft>
+              <a:defRPr sz="1300">
+                <a:solidFill>
+                  <a:srgbClr val="CBD5E1"/>
+                </a:solidFill>
+                <a:latin typeface="Segoe UI"/>
+              </a:defRPr>
+            </a:pPr>
+            <a:r>
+              <a:t>• Triển khai đám mây Vercel Production.</a:t>
+            </a:r>
+          </a:p>
+          <a:p>
+            <a:pPr>
+              <a:spcAft>
+                <a:spcPts val="700"/>
+              </a:spcAft>
+              <a:defRPr sz="1300">
+                <a:solidFill>
+                  <a:srgbClr val="CBD5E1"/>
+                </a:solidFill>
+                <a:latin typeface="Segoe UI"/>
+              </a:defRPr>
+            </a:pPr>
+            <a:r>
+              <a:t>• Kiểm thử tải đa thiết bị &amp; Báo cáo.</a:t>
             </a:r>
           </a:p>
         </p:txBody>
@@ -8550,8 +9260,8 @@
         </p:nvSpPr>
         <p:spPr>
           <a:xfrm>
-            <a:off x="731520" y="365760"/>
-            <a:ext cx="10728655" cy="1097280"/>
+            <a:off x="731520" y="320040"/>
+            <a:ext cx="10728655" cy="1143000"/>
           </a:xfrm>
           <a:prstGeom prst="rect">
             <a:avLst/>
@@ -8584,7 +9294,7 @@
               <a:spcAft>
                 <a:spcPts val="200"/>
               </a:spcAft>
-              <a:defRPr sz="2300" b="1">
+              <a:defRPr sz="2200" b="1">
                 <a:solidFill>
                   <a:srgbClr val="FFFFFF"/>
                 </a:solidFill>
@@ -8605,7 +9315,7 @@
               </a:defRPr>
             </a:pPr>
             <a:r>
-              <a:t>Quy trình phát triển phần mềm theo từng giai đoạn chuẩn chỉ</a:t>
+              <a:t>Quy trình phát triển chuẩn công nghiệp từ thiết kế đến triển khai thực tế</a:t>
             </a:r>
           </a:p>
         </p:txBody>
@@ -8715,39 +9425,39 @@
           <a:p>
             <a:pPr>
               <a:spcAft>
-                <a:spcPts val="800"/>
-              </a:spcAft>
-              <a:defRPr sz="1300">
-                <a:solidFill>
-                  <a:srgbClr val="CBD5E1"/>
-                </a:solidFill>
-                <a:latin typeface="Segoe UI"/>
-              </a:defRPr>
-            </a:pPr>
-            <a:r>
-              <a:t>• Phân tích yêu cầu.</a:t>
-            </a:r>
-          </a:p>
-          <a:p>
-            <a:pPr>
-              <a:spcAft>
-                <a:spcPts val="800"/>
-              </a:spcAft>
-              <a:defRPr sz="1300">
-                <a:solidFill>
-                  <a:srgbClr val="CBD5E1"/>
-                </a:solidFill>
-                <a:latin typeface="Segoe UI"/>
-              </a:defRPr>
-            </a:pPr>
-            <a:r>
-              <a:t>• Thiết kế sơ đồ mạng.</a:t>
-            </a:r>
-          </a:p>
-          <a:p>
-            <a:pPr>
-              <a:spcAft>
-                <a:spcPts val="800"/>
+                <a:spcPts val="700"/>
+              </a:spcAft>
+              <a:defRPr sz="1300">
+                <a:solidFill>
+                  <a:srgbClr val="CBD5E1"/>
+                </a:solidFill>
+                <a:latin typeface="Segoe UI"/>
+              </a:defRPr>
+            </a:pPr>
+            <a:r>
+              <a:t>• Khảo sát nghiệp vụ.</a:t>
+            </a:r>
+          </a:p>
+          <a:p>
+            <a:pPr>
+              <a:spcAft>
+                <a:spcPts val="700"/>
+              </a:spcAft>
+              <a:defRPr sz="1300">
+                <a:solidFill>
+                  <a:srgbClr val="CBD5E1"/>
+                </a:solidFill>
+                <a:latin typeface="Segoe UI"/>
+              </a:defRPr>
+            </a:pPr>
+            <a:r>
+              <a:t>• Thiết kế mô hình mạng.</a:t>
+            </a:r>
+          </a:p>
+          <a:p>
+            <a:pPr>
+              <a:spcAft>
+                <a:spcPts val="700"/>
               </a:spcAft>
               <a:defRPr sz="1300">
                 <a:solidFill>
@@ -8763,7 +9473,7 @@
           <a:p>
             <a:pPr>
               <a:spcAft>
-                <a:spcPts val="800"/>
+                <a:spcPts val="700"/>
               </a:spcAft>
               <a:defRPr sz="1300">
                 <a:solidFill>
@@ -8883,7 +9593,7 @@
           <a:p>
             <a:pPr>
               <a:spcAft>
-                <a:spcPts val="800"/>
+                <a:spcPts val="700"/>
               </a:spcAft>
               <a:defRPr sz="1300">
                 <a:solidFill>
@@ -8899,7 +9609,7 @@
           <a:p>
             <a:pPr>
               <a:spcAft>
-                <a:spcPts val="800"/>
+                <a:spcPts val="700"/>
               </a:spcAft>
               <a:defRPr sz="1300">
                 <a:solidFill>
@@ -8915,7 +9625,7 @@
           <a:p>
             <a:pPr>
               <a:spcAft>
-                <a:spcPts val="800"/>
+                <a:spcPts val="700"/>
               </a:spcAft>
               <a:defRPr sz="1300">
                 <a:solidFill>
@@ -8931,17 +9641,17 @@
           <a:p>
             <a:pPr>
               <a:spcAft>
-                <a:spcPts val="800"/>
-              </a:spcAft>
-              <a:defRPr sz="1300">
-                <a:solidFill>
-                  <a:srgbClr val="CBD5E1"/>
-                </a:solidFill>
-                <a:latin typeface="Segoe UI"/>
-              </a:defRPr>
-            </a:pPr>
-            <a:r>
-              <a:t>• Mã hóa mật khẩu BCrypt.</a:t>
+                <a:spcPts val="700"/>
+              </a:spcAft>
+              <a:defRPr sz="1300">
+                <a:solidFill>
+                  <a:srgbClr val="CBD5E1"/>
+                </a:solidFill>
+                <a:latin typeface="Segoe UI"/>
+              </a:defRPr>
+            </a:pPr>
+            <a:r>
+              <a:t>• Xử lý Token JWT &amp; Auth.</a:t>
             </a:r>
           </a:p>
         </p:txBody>
@@ -9051,39 +9761,23 @@
           <a:p>
             <a:pPr>
               <a:spcAft>
-                <a:spcPts val="800"/>
-              </a:spcAft>
-              <a:defRPr sz="1300">
-                <a:solidFill>
-                  <a:srgbClr val="CBD5E1"/>
-                </a:solidFill>
-                <a:latin typeface="Segoe UI"/>
-              </a:defRPr>
-            </a:pPr>
-            <a:r>
-              <a:t>• Mạng LAN &amp; Tunneling.</a:t>
-            </a:r>
-          </a:p>
-          <a:p>
-            <a:pPr>
-              <a:spcAft>
-                <a:spcPts val="800"/>
-              </a:spcAft>
-              <a:defRPr sz="1300">
-                <a:solidFill>
-                  <a:srgbClr val="CBD5E1"/>
-                </a:solidFill>
-                <a:latin typeface="Segoe UI"/>
-              </a:defRPr>
-            </a:pPr>
-            <a:r>
-              <a:t>• Anti-Cheat 3 lớp bảo vệ.</a:t>
-            </a:r>
-          </a:p>
-          <a:p>
-            <a:pPr>
-              <a:spcAft>
-                <a:spcPts val="800"/>
+                <a:spcPts val="700"/>
+              </a:spcAft>
+              <a:defRPr sz="1300">
+                <a:solidFill>
+                  <a:srgbClr val="CBD5E1"/>
+                </a:solidFill>
+                <a:latin typeface="Segoe UI"/>
+              </a:defRPr>
+            </a:pPr>
+            <a:r>
+              <a:t>• Anti-Cheat 3 lớp toàn diện.</a:t>
+            </a:r>
+          </a:p>
+          <a:p>
+            <a:pPr>
+              <a:spcAft>
+                <a:spcPts val="700"/>
               </a:spcAft>
               <a:defRPr sz="1300">
                 <a:solidFill>
@@ -9099,17 +9793,33 @@
           <a:p>
             <a:pPr>
               <a:spcAft>
-                <a:spcPts val="800"/>
-              </a:spcAft>
-              <a:defRPr sz="1300">
-                <a:solidFill>
-                  <a:srgbClr val="CBD5E1"/>
-                </a:solidFill>
-                <a:latin typeface="Segoe UI"/>
-              </a:defRPr>
-            </a:pPr>
-            <a:r>
-              <a:t>• Xuất báo cáo Excel .xlsx.</a:t>
+                <a:spcPts val="700"/>
+              </a:spcAft>
+              <a:defRPr sz="1300">
+                <a:solidFill>
+                  <a:srgbClr val="CBD5E1"/>
+                </a:solidFill>
+                <a:latin typeface="Segoe UI"/>
+              </a:defRPr>
+            </a:pPr>
+            <a:r>
+              <a:t>• Xuất Excel (.xlsx) chuẩn.</a:t>
+            </a:r>
+          </a:p>
+          <a:p>
+            <a:pPr>
+              <a:spcAft>
+                <a:spcPts val="700"/>
+              </a:spcAft>
+              <a:defRPr sz="1300">
+                <a:solidFill>
+                  <a:srgbClr val="CBD5E1"/>
+                </a:solidFill>
+                <a:latin typeface="Segoe UI"/>
+              </a:defRPr>
+            </a:pPr>
+            <a:r>
+              <a:t>• Chạy đa máy mạng LAN.</a:t>
             </a:r>
           </a:p>
         </p:txBody>
@@ -9219,65 +9929,65 @@
           <a:p>
             <a:pPr>
               <a:spcAft>
-                <a:spcPts val="800"/>
-              </a:spcAft>
-              <a:defRPr sz="1300">
-                <a:solidFill>
-                  <a:srgbClr val="CBD5E1"/>
-                </a:solidFill>
-                <a:latin typeface="Segoe UI"/>
-              </a:defRPr>
-            </a:pPr>
-            <a:r>
-              <a:t>• Kiểm thử tải đa máy.</a:t>
-            </a:r>
-          </a:p>
-          <a:p>
-            <a:pPr>
-              <a:spcAft>
-                <a:spcPts val="800"/>
-              </a:spcAft>
-              <a:defRPr sz="1300">
-                <a:solidFill>
-                  <a:srgbClr val="CBD5E1"/>
-                </a:solidFill>
-                <a:latin typeface="Segoe UI"/>
-              </a:defRPr>
-            </a:pPr>
-            <a:r>
-              <a:t>• Viết tài liệu đồ án.</a:t>
-            </a:r>
-          </a:p>
-          <a:p>
-            <a:pPr>
-              <a:spcAft>
-                <a:spcPts val="800"/>
-              </a:spcAft>
-              <a:defRPr sz="1300">
-                <a:solidFill>
-                  <a:srgbClr val="CBD5E1"/>
-                </a:solidFill>
-                <a:latin typeface="Segoe UI"/>
-              </a:defRPr>
-            </a:pPr>
-            <a:r>
-              <a:t>• Đồng bộ mã nguồn GitHub.</a:t>
-            </a:r>
-          </a:p>
-          <a:p>
-            <a:pPr>
-              <a:spcAft>
-                <a:spcPts val="800"/>
-              </a:spcAft>
-              <a:defRPr sz="1300">
-                <a:solidFill>
-                  <a:srgbClr val="CBD5E1"/>
-                </a:solidFill>
-                <a:latin typeface="Segoe UI"/>
-              </a:defRPr>
-            </a:pPr>
-            <a:r>
-              <a:t>• Sẵn sàng báo cáo nghiệm thu.</a:t>
+                <a:spcPts val="700"/>
+              </a:spcAft>
+              <a:defRPr sz="1300">
+                <a:solidFill>
+                  <a:srgbClr val="CBD5E1"/>
+                </a:solidFill>
+                <a:latin typeface="Segoe UI"/>
+              </a:defRPr>
+            </a:pPr>
+            <a:r>
+              <a:t>• Cloudflare Tunnel &amp; HTTPS.</a:t>
+            </a:r>
+          </a:p>
+          <a:p>
+            <a:pPr>
+              <a:spcAft>
+                <a:spcPts val="700"/>
+              </a:spcAft>
+              <a:defRPr sz="1300">
+                <a:solidFill>
+                  <a:srgbClr val="CBD5E1"/>
+                </a:solidFill>
+                <a:latin typeface="Segoe UI"/>
+              </a:defRPr>
+            </a:pPr>
+            <a:r>
+              <a:t>• Deploy Vercel Production.</a:t>
+            </a:r>
+          </a:p>
+          <a:p>
+            <a:pPr>
+              <a:spcAft>
+                <a:spcPts val="700"/>
+              </a:spcAft>
+              <a:defRPr sz="1300">
+                <a:solidFill>
+                  <a:srgbClr val="CBD5E1"/>
+                </a:solidFill>
+                <a:latin typeface="Segoe UI"/>
+              </a:defRPr>
+            </a:pPr>
+            <a:r>
+              <a:t>• Kiểm thử tải đa thiết bị.</a:t>
+            </a:r>
+          </a:p>
+          <a:p>
+            <a:pPr>
+              <a:spcAft>
+                <a:spcPts val="700"/>
+              </a:spcAft>
+              <a:defRPr sz="1300">
+                <a:solidFill>
+                  <a:srgbClr val="CBD5E1"/>
+                </a:solidFill>
+                <a:latin typeface="Segoe UI"/>
+              </a:defRPr>
+            </a:pPr>
+            <a:r>
+              <a:t>• Nghiệm thu đồ án cuối kỳ.</a:t>
             </a:r>
           </a:p>
         </p:txBody>
@@ -9394,8 +10104,8 @@
         </p:nvSpPr>
         <p:spPr>
           <a:xfrm>
-            <a:off x="731520" y="365760"/>
-            <a:ext cx="10728655" cy="1097280"/>
+            <a:off x="731520" y="320040"/>
+            <a:ext cx="10728655" cy="1143000"/>
           </a:xfrm>
           <a:prstGeom prst="rect">
             <a:avLst/>
@@ -9428,7 +10138,7 @@
               <a:spcAft>
                 <a:spcPts val="200"/>
               </a:spcAft>
-              <a:defRPr sz="2300" b="1">
+              <a:defRPr sz="2200" b="1">
                 <a:solidFill>
                   <a:srgbClr val="FFFFFF"/>
                 </a:solidFill>
@@ -9449,7 +10159,7 @@
               </a:defRPr>
             </a:pPr>
             <a:r>
-              <a:t>Đầy đủ nghiệp vụ cho Học sinh, Giáo viên và Quản trị viên</a:t>
+              <a:t>Phân quyền chặt chẽ giữa Thí sinh và Quản trị viên / Giáo viên</a:t>
             </a:r>
           </a:p>
         </p:txBody>
@@ -9530,7 +10240,7 @@
               </a:defRPr>
             </a:pPr>
             <a:r>
-              <a:t>Phân Hệ Học Sinh (Thí Sinh)</a:t>
+              <a:t>Phân Hệ Thí Sinh (Student)</a:t>
             </a:r>
           </a:p>
         </p:txBody>
@@ -9559,81 +10269,81 @@
           <a:p>
             <a:pPr>
               <a:spcAft>
-                <a:spcPts val="800"/>
-              </a:spcAft>
-              <a:defRPr sz="1300">
-                <a:solidFill>
-                  <a:srgbClr val="CBD5E1"/>
-                </a:solidFill>
-                <a:latin typeface="Segoe UI"/>
-              </a:defRPr>
-            </a:pPr>
-            <a:r>
-              <a:t>• Đăng ký / Đăng nhập: Tài khoản bảo mật với JWT.</a:t>
-            </a:r>
-          </a:p>
-          <a:p>
-            <a:pPr>
-              <a:spcAft>
-                <a:spcPts val="800"/>
-              </a:spcAft>
-              <a:defRPr sz="1300">
-                <a:solidFill>
-                  <a:srgbClr val="CBD5E1"/>
-                </a:solidFill>
-                <a:latin typeface="Segoe UI"/>
-              </a:defRPr>
-            </a:pPr>
-            <a:r>
-              <a:t>• Làm bài trực tuyến: Đồng hồ đếm ngược đồng bộ Server UTC.</a:t>
-            </a:r>
-          </a:p>
-          <a:p>
-            <a:pPr>
-              <a:spcAft>
-                <a:spcPts val="800"/>
-              </a:spcAft>
-              <a:defRPr sz="1300">
-                <a:solidFill>
-                  <a:srgbClr val="CBD5E1"/>
-                </a:solidFill>
-                <a:latin typeface="Segoe UI"/>
-              </a:defRPr>
-            </a:pPr>
-            <a:r>
-              <a:t>• Trộn đề: Câu hỏi &amp; 4 đáp án A, B, C, D đảo ngẫu nhiên.</a:t>
-            </a:r>
-          </a:p>
-          <a:p>
-            <a:pPr>
-              <a:spcAft>
-                <a:spcPts val="800"/>
-              </a:spcAft>
-              <a:defRPr sz="1300">
-                <a:solidFill>
-                  <a:srgbClr val="CBD5E1"/>
-                </a:solidFill>
-                <a:latin typeface="Segoe UI"/>
-              </a:defRPr>
-            </a:pPr>
-            <a:r>
-              <a:t>• Chống mất dữ liệu: Tự động lưu đáp án (Auto-Save) real-time.</a:t>
-            </a:r>
-          </a:p>
-          <a:p>
-            <a:pPr>
-              <a:spcAft>
-                <a:spcPts val="800"/>
-              </a:spcAft>
-              <a:defRPr sz="1300">
-                <a:solidFill>
-                  <a:srgbClr val="CBD5E1"/>
-                </a:solidFill>
-                <a:latin typeface="Segoe UI"/>
-              </a:defRPr>
-            </a:pPr>
-            <a:r>
-              <a:t>• Xem kết quả: Chấm điểm tức thì kèm giải thích chi tiết đáp án.</a:t>
+                <a:spcPts val="700"/>
+              </a:spcAft>
+              <a:defRPr sz="1300">
+                <a:solidFill>
+                  <a:srgbClr val="CBD5E1"/>
+                </a:solidFill>
+                <a:latin typeface="Segoe UI"/>
+              </a:defRPr>
+            </a:pPr>
+            <a:r>
+              <a:t>• Đăng ký / Đăng nhập: Bảo mật xác thực qua JWT Token.</a:t>
+            </a:r>
+          </a:p>
+          <a:p>
+            <a:pPr>
+              <a:spcAft>
+                <a:spcPts val="700"/>
+              </a:spcAft>
+              <a:defRPr sz="1300">
+                <a:solidFill>
+                  <a:srgbClr val="CBD5E1"/>
+                </a:solidFill>
+                <a:latin typeface="Segoe UI"/>
+              </a:defRPr>
+            </a:pPr>
+            <a:r>
+              <a:t>• Phòng thi trực tuyến: Đồng hồ đếm ngược đồng bộ Server UTC.</a:t>
+            </a:r>
+          </a:p>
+          <a:p>
+            <a:pPr>
+              <a:spcAft>
+                <a:spcPts val="700"/>
+              </a:spcAft>
+              <a:defRPr sz="1300">
+                <a:solidFill>
+                  <a:srgbClr val="CBD5E1"/>
+                </a:solidFill>
+                <a:latin typeface="Segoe UI"/>
+              </a:defRPr>
+            </a:pPr>
+            <a:r>
+              <a:t>• Trộn đề thông minh: Đảo ngẫu nhiên câu hỏi &amp; 4 đáp án A-B-C-D.</a:t>
+            </a:r>
+          </a:p>
+          <a:p>
+            <a:pPr>
+              <a:spcAft>
+                <a:spcPts val="700"/>
+              </a:spcAft>
+              <a:defRPr sz="1300">
+                <a:solidFill>
+                  <a:srgbClr val="CBD5E1"/>
+                </a:solidFill>
+                <a:latin typeface="Segoe UI"/>
+              </a:defRPr>
+            </a:pPr>
+            <a:r>
+              <a:t>• Auto-Save an toàn: Tự động lưu bài làm vào LocalStorage.</a:t>
+            </a:r>
+          </a:p>
+          <a:p>
+            <a:pPr>
+              <a:spcAft>
+                <a:spcPts val="700"/>
+              </a:spcAft>
+              <a:defRPr sz="1300">
+                <a:solidFill>
+                  <a:srgbClr val="CBD5E1"/>
+                </a:solidFill>
+                <a:latin typeface="Segoe UI"/>
+              </a:defRPr>
+            </a:pPr>
+            <a:r>
+              <a:t>• Xem kết quả: Chấm điểm tức thì, xem đáp án &amp; giải thích chi tiết.</a:t>
             </a:r>
           </a:p>
         </p:txBody>
@@ -9714,7 +10424,7 @@
               </a:defRPr>
             </a:pPr>
             <a:r>
-              <a:t>Phân Hệ Quản Trị &amp; Giáo Viên</a:t>
+              <a:t>Phân Hệ Giáo Viên &amp; Quản Trị (Admin)</a:t>
             </a:r>
           </a:p>
         </p:txBody>
@@ -9743,81 +10453,81 @@
           <a:p>
             <a:pPr>
               <a:spcAft>
-                <a:spcPts val="800"/>
-              </a:spcAft>
-              <a:defRPr sz="1300">
-                <a:solidFill>
-                  <a:srgbClr val="CBD5E1"/>
-                </a:solidFill>
-                <a:latin typeface="Segoe UI"/>
-              </a:defRPr>
-            </a:pPr>
-            <a:r>
-              <a:t>• AI Tạo đề: Nhập văn bản/chủ đề -&gt; Gemini AI sinh trắc nghiệm.</a:t>
-            </a:r>
-          </a:p>
-          <a:p>
-            <a:pPr>
-              <a:spcAft>
-                <a:spcPts val="800"/>
-              </a:spcAft>
-              <a:defRPr sz="1300">
-                <a:solidFill>
-                  <a:srgbClr val="CBD5E1"/>
-                </a:solidFill>
-                <a:latin typeface="Segoe UI"/>
-              </a:defRPr>
-            </a:pPr>
-            <a:r>
-              <a:t>• Kiểm duyệt: Xem trước, sửa đổi hoặc xóa câu hỏi AI.</a:t>
-            </a:r>
-          </a:p>
-          <a:p>
-            <a:pPr>
-              <a:spcAft>
-                <a:spcPts val="800"/>
-              </a:spcAft>
-              <a:defRPr sz="1300">
-                <a:solidFill>
-                  <a:srgbClr val="CBD5E1"/>
-                </a:solidFill>
-                <a:latin typeface="Segoe UI"/>
-              </a:defRPr>
-            </a:pPr>
-            <a:r>
-              <a:t>• Quản lý đề: Tạo, xuất bản, xóa đề thi (Cascade Delete).</a:t>
-            </a:r>
-          </a:p>
-          <a:p>
-            <a:pPr>
-              <a:spcAft>
-                <a:spcPts val="800"/>
-              </a:spcAft>
-              <a:defRPr sz="1300">
-                <a:solidFill>
-                  <a:srgbClr val="CBD5E1"/>
-                </a:solidFill>
-                <a:latin typeface="Segoe UI"/>
-              </a:defRPr>
-            </a:pPr>
-            <a:r>
-              <a:t>• Giám sát vi phạm: Bôi đỏ cảnh báo thí sinh rời màn hình.</a:t>
-            </a:r>
-          </a:p>
-          <a:p>
-            <a:pPr>
-              <a:spcAft>
-                <a:spcPts val="800"/>
-              </a:spcAft>
-              <a:defRPr sz="1300">
-                <a:solidFill>
-                  <a:srgbClr val="CBD5E1"/>
-                </a:solidFill>
-                <a:latin typeface="Segoe UI"/>
-              </a:defRPr>
-            </a:pPr>
-            <a:r>
-              <a:t>• Xuất Excel (.xlsx): 1-Click tải bảng điểm chuẩn Microsoft Excel.</a:t>
+                <a:spcPts val="700"/>
+              </a:spcAft>
+              <a:defRPr sz="1300">
+                <a:solidFill>
+                  <a:srgbClr val="CBD5E1"/>
+                </a:solidFill>
+                <a:latin typeface="Segoe UI"/>
+              </a:defRPr>
+            </a:pPr>
+            <a:r>
+              <a:t>• AI Tạo đề tự động: Nhập chủ đề/tài liệu -&gt; Gemini AI sinh đề thi.</a:t>
+            </a:r>
+          </a:p>
+          <a:p>
+            <a:pPr>
+              <a:spcAft>
+                <a:spcPts val="700"/>
+              </a:spcAft>
+              <a:defRPr sz="1300">
+                <a:solidFill>
+                  <a:srgbClr val="CBD5E1"/>
+                </a:solidFill>
+                <a:latin typeface="Segoe UI"/>
+              </a:defRPr>
+            </a:pPr>
+            <a:r>
+              <a:t>• Kiểm duyệt câu hỏi: Xem trước, chỉnh sửa, phê duyệt hoặc xóa.</a:t>
+            </a:r>
+          </a:p>
+          <a:p>
+            <a:pPr>
+              <a:spcAft>
+                <a:spcPts val="700"/>
+              </a:spcAft>
+              <a:defRPr sz="1300">
+                <a:solidFill>
+                  <a:srgbClr val="CBD5E1"/>
+                </a:solidFill>
+                <a:latin typeface="Segoe UI"/>
+              </a:defRPr>
+            </a:pPr>
+            <a:r>
+              <a:t>• Quản lý đề &amp; Tài khoản: CRUD đề thi, kích hoạt/khóa tài khoản.</a:t>
+            </a:r>
+          </a:p>
+          <a:p>
+            <a:pPr>
+              <a:spcAft>
+                <a:spcPts val="700"/>
+              </a:spcAft>
+              <a:defRPr sz="1300">
+                <a:solidFill>
+                  <a:srgbClr val="CBD5E1"/>
+                </a:solidFill>
+                <a:latin typeface="Segoe UI"/>
+              </a:defRPr>
+            </a:pPr>
+            <a:r>
+              <a:t>• Giám sát vi phạm: Bảng theo dõi số lần gian lận rời màn hình.</a:t>
+            </a:r>
+          </a:p>
+          <a:p>
+            <a:pPr>
+              <a:spcAft>
+                <a:spcPts val="700"/>
+              </a:spcAft>
+              <a:defRPr sz="1300">
+                <a:solidFill>
+                  <a:srgbClr val="CBD5E1"/>
+                </a:solidFill>
+                <a:latin typeface="Segoe UI"/>
+              </a:defRPr>
+            </a:pPr>
+            <a:r>
+              <a:t>• Xuất báo cáo Excel: Tải file .xlsx định dạng chuẩn, không lỗi ###.</a:t>
             </a:r>
           </a:p>
         </p:txBody>
@@ -9934,8 +10644,8 @@
         </p:nvSpPr>
         <p:spPr>
           <a:xfrm>
-            <a:off x="731520" y="365760"/>
-            <a:ext cx="10728655" cy="1097280"/>
+            <a:off x="731520" y="320040"/>
+            <a:ext cx="10728655" cy="1143000"/>
           </a:xfrm>
           <a:prstGeom prst="rect">
             <a:avLst/>
@@ -9968,7 +10678,7 @@
               <a:spcAft>
                 <a:spcPts val="200"/>
               </a:spcAft>
-              <a:defRPr sz="2300" b="1">
+              <a:defRPr sz="2200" b="1">
                 <a:solidFill>
                   <a:srgbClr val="FFFFFF"/>
                 </a:solidFill>
@@ -9976,7 +10686,7 @@
               </a:defRPr>
             </a:pPr>
             <a:r>
-              <a:t>Ngăn Xếp Công Nghệ (Technology Stack)</a:t>
+              <a:t>Ngăn Xếp Công Nghệ Toàn Diện (Tech Stack)</a:t>
             </a:r>
           </a:p>
           <a:p>
@@ -9989,7 +10699,7 @@
               </a:defRPr>
             </a:pPr>
             <a:r>
-              <a:t>Sử dụng các công nghệ hiện đại, ổn định và tối ưu hiệu năng mạng</a:t>
+              <a:t>Kết hợp công nghệ hiện đại đảm bảo hiệu năng mạng, bảo mật và độ ổn định</a:t>
             </a:r>
           </a:p>
         </p:txBody>
@@ -10099,23 +10809,23 @@
           <a:p>
             <a:pPr>
               <a:spcAft>
-                <a:spcPts val="800"/>
-              </a:spcAft>
-              <a:defRPr sz="1300">
-                <a:solidFill>
-                  <a:srgbClr val="CBD5E1"/>
-                </a:solidFill>
-                <a:latin typeface="Segoe UI"/>
-              </a:defRPr>
-            </a:pPr>
-            <a:r>
-              <a:t>• React 19: Xây dựng SPA mượt mà.</a:t>
-            </a:r>
-          </a:p>
-          <a:p>
-            <a:pPr>
-              <a:spcAft>
-                <a:spcPts val="800"/>
+                <a:spcPts val="700"/>
+              </a:spcAft>
+              <a:defRPr sz="1300">
+                <a:solidFill>
+                  <a:srgbClr val="CBD5E1"/>
+                </a:solidFill>
+                <a:latin typeface="Segoe UI"/>
+              </a:defRPr>
+            </a:pPr>
+            <a:r>
+              <a:t>• React 19: Xây dựng SPA tốc độ cao.</a:t>
+            </a:r>
+          </a:p>
+          <a:p>
+            <a:pPr>
+              <a:spcAft>
+                <a:spcPts val="700"/>
               </a:spcAft>
               <a:defRPr sz="1300">
                 <a:solidFill>
@@ -10131,7 +10841,7 @@
           <a:p>
             <a:pPr>
               <a:spcAft>
-                <a:spcPts val="800"/>
+                <a:spcPts val="700"/>
               </a:spcAft>
               <a:defRPr sz="1300">
                 <a:solidFill>
@@ -10147,33 +10857,33 @@
           <a:p>
             <a:pPr>
               <a:spcAft>
-                <a:spcPts val="800"/>
-              </a:spcAft>
-              <a:defRPr sz="1300">
-                <a:solidFill>
-                  <a:srgbClr val="CBD5E1"/>
-                </a:solidFill>
-                <a:latin typeface="Segoe UI"/>
-              </a:defRPr>
-            </a:pPr>
-            <a:r>
-              <a:t>• Axios: Tự đính kèm JWT Bearer.</a:t>
-            </a:r>
-          </a:p>
-          <a:p>
-            <a:pPr>
-              <a:spcAft>
-                <a:spcPts val="800"/>
-              </a:spcAft>
-              <a:defRPr sz="1300">
-                <a:solidFill>
-                  <a:srgbClr val="CBD5E1"/>
-                </a:solidFill>
-                <a:latin typeface="Segoe UI"/>
-              </a:defRPr>
-            </a:pPr>
-            <a:r>
-              <a:t>• SheetJS (xlsx): Xuất bảng tính chuẩn.</a:t>
+                <a:spcPts val="700"/>
+              </a:spcAft>
+              <a:defRPr sz="1300">
+                <a:solidFill>
+                  <a:srgbClr val="CBD5E1"/>
+                </a:solidFill>
+                <a:latin typeface="Segoe UI"/>
+              </a:defRPr>
+            </a:pPr>
+            <a:r>
+              <a:t>• Axios: Tự đính kèm Bearer Token.</a:t>
+            </a:r>
+          </a:p>
+          <a:p>
+            <a:pPr>
+              <a:spcAft>
+                <a:spcPts val="700"/>
+              </a:spcAft>
+              <a:defRPr sz="1300">
+                <a:solidFill>
+                  <a:srgbClr val="CBD5E1"/>
+                </a:solidFill>
+                <a:latin typeface="Segoe UI"/>
+              </a:defRPr>
+            </a:pPr>
+            <a:r>
+              <a:t>• SheetJS (xlsx): Xuất file Excel chuẩn.</a:t>
             </a:r>
           </a:p>
         </p:txBody>
@@ -10254,7 +10964,7 @@
               </a:defRPr>
             </a:pPr>
             <a:r>
-              <a:t>Backend Stack</a:t>
+              <a:t>Backend &amp; AI Stack</a:t>
             </a:r>
           </a:p>
         </p:txBody>
@@ -10283,7 +10993,7 @@
           <a:p>
             <a:pPr>
               <a:spcAft>
-                <a:spcPts val="800"/>
+                <a:spcPts val="700"/>
               </a:spcAft>
               <a:defRPr sz="1300">
                 <a:solidFill>
@@ -10299,23 +11009,39 @@
           <a:p>
             <a:pPr>
               <a:spcAft>
-                <a:spcPts val="800"/>
-              </a:spcAft>
-              <a:defRPr sz="1300">
-                <a:solidFill>
-                  <a:srgbClr val="CBD5E1"/>
-                </a:solidFill>
-                <a:latin typeface="Segoe UI"/>
-              </a:defRPr>
-            </a:pPr>
-            <a:r>
-              <a:t>• Kestrel Server: Độ trễ phản hồi &lt;120ms.</a:t>
-            </a:r>
-          </a:p>
-          <a:p>
-            <a:pPr>
-              <a:spcAft>
-                <a:spcPts val="800"/>
+                <a:spcPts val="700"/>
+              </a:spcAft>
+              <a:defRPr sz="1300">
+                <a:solidFill>
+                  <a:srgbClr val="CBD5E1"/>
+                </a:solidFill>
+                <a:latin typeface="Segoe UI"/>
+              </a:defRPr>
+            </a:pPr>
+            <a:r>
+              <a:t>• Kestrel Server: Độ trễ cực thấp &lt;120ms.</a:t>
+            </a:r>
+          </a:p>
+          <a:p>
+            <a:pPr>
+              <a:spcAft>
+                <a:spcPts val="700"/>
+              </a:spcAft>
+              <a:defRPr sz="1300">
+                <a:solidFill>
+                  <a:srgbClr val="CBD5E1"/>
+                </a:solidFill>
+                <a:latin typeface="Segoe UI"/>
+              </a:defRPr>
+            </a:pPr>
+            <a:r>
+              <a:t>• Google Gemini API: GenAI tạo trắc nghiệm.</a:t>
+            </a:r>
+          </a:p>
+          <a:p>
+            <a:pPr>
+              <a:spcAft>
+                <a:spcPts val="700"/>
               </a:spcAft>
               <a:defRPr sz="1300">
                 <a:solidFill>
@@ -10331,33 +11057,17 @@
           <a:p>
             <a:pPr>
               <a:spcAft>
-                <a:spcPts val="800"/>
-              </a:spcAft>
-              <a:defRPr sz="1300">
-                <a:solidFill>
-                  <a:srgbClr val="CBD5E1"/>
-                </a:solidFill>
-                <a:latin typeface="Segoe UI"/>
-              </a:defRPr>
-            </a:pPr>
-            <a:r>
-              <a:t>• BCrypt.Net: Băm mật khẩu có Salt.</a:t>
-            </a:r>
-          </a:p>
-          <a:p>
-            <a:pPr>
-              <a:spcAft>
-                <a:spcPts val="800"/>
-              </a:spcAft>
-              <a:defRPr sz="1300">
-                <a:solidFill>
-                  <a:srgbClr val="CBD5E1"/>
-                </a:solidFill>
-                <a:latin typeface="Segoe UI"/>
-              </a:defRPr>
-            </a:pPr>
-            <a:r>
-              <a:t>• Google Gemini API: GenAI tạo câu hỏi.</a:t>
+                <a:spcPts val="700"/>
+              </a:spcAft>
+              <a:defRPr sz="1300">
+                <a:solidFill>
+                  <a:srgbClr val="CBD5E1"/>
+                </a:solidFill>
+                <a:latin typeface="Segoe UI"/>
+              </a:defRPr>
+            </a:pPr>
+            <a:r>
+              <a:t>• BCrypt.Net: Băm mật khẩu an toàn.</a:t>
             </a:r>
           </a:p>
         </p:txBody>
@@ -10438,7 +11148,7 @@
               </a:defRPr>
             </a:pPr>
             <a:r>
-              <a:t>Database &amp; Network</a:t>
+              <a:t>Database &amp; Cloud DevOps</a:t>
             </a:r>
           </a:p>
         </p:txBody>
@@ -10467,7 +11177,7 @@
           <a:p>
             <a:pPr>
               <a:spcAft>
-                <a:spcPts val="800"/>
+                <a:spcPts val="700"/>
               </a:spcAft>
               <a:defRPr sz="1300">
                 <a:solidFill>
@@ -10483,7 +11193,7 @@
           <a:p>
             <a:pPr>
               <a:spcAft>
-                <a:spcPts val="800"/>
+                <a:spcPts val="700"/>
               </a:spcAft>
               <a:defRPr sz="1300">
                 <a:solidFill>
@@ -10499,49 +11209,49 @@
           <a:p>
             <a:pPr>
               <a:spcAft>
-                <a:spcPts val="800"/>
-              </a:spcAft>
-              <a:defRPr sz="1300">
-                <a:solidFill>
-                  <a:srgbClr val="CBD5E1"/>
-                </a:solidFill>
-                <a:latin typeface="Segoe UI"/>
-              </a:defRPr>
-            </a:pPr>
-            <a:r>
-              <a:t>• IP Binding 0.0.0.0: Mở mạng LAN.</a:t>
-            </a:r>
-          </a:p>
-          <a:p>
-            <a:pPr>
-              <a:spcAft>
-                <a:spcPts val="800"/>
-              </a:spcAft>
-              <a:defRPr sz="1300">
-                <a:solidFill>
-                  <a:srgbClr val="CBD5E1"/>
-                </a:solidFill>
-                <a:latin typeface="Segoe UI"/>
-              </a:defRPr>
-            </a:pPr>
-            <a:r>
-              <a:t>• SSH Reverse Tunnel: Pinggy HTTPS/QR.</a:t>
-            </a:r>
-          </a:p>
-          <a:p>
-            <a:pPr>
-              <a:spcAft>
-                <a:spcPts val="800"/>
-              </a:spcAft>
-              <a:defRPr sz="1300">
-                <a:solidFill>
-                  <a:srgbClr val="CBD5E1"/>
-                </a:solidFill>
-                <a:latin typeface="Segoe UI"/>
-              </a:defRPr>
-            </a:pPr>
-            <a:r>
-              <a:t>• UTF-8 BOM: Chuẩn hóa font tiếng Việt.</a:t>
+                <a:spcPts val="700"/>
+              </a:spcAft>
+              <a:defRPr sz="1300">
+                <a:solidFill>
+                  <a:srgbClr val="CBD5E1"/>
+                </a:solidFill>
+                <a:latin typeface="Segoe UI"/>
+              </a:defRPr>
+            </a:pPr>
+            <a:r>
+              <a:t>• Vercel Cloud: Hosting Frontend toàn cầu.</a:t>
+            </a:r>
+          </a:p>
+          <a:p>
+            <a:pPr>
+              <a:spcAft>
+                <a:spcPts val="700"/>
+              </a:spcAft>
+              <a:defRPr sz="1300">
+                <a:solidFill>
+                  <a:srgbClr val="CBD5E1"/>
+                </a:solidFill>
+                <a:latin typeface="Segoe UI"/>
+              </a:defRPr>
+            </a:pPr>
+            <a:r>
+              <a:t>• Cloudflare Tunnel: Kênh HTTPS bảo mật.</a:t>
+            </a:r>
+          </a:p>
+          <a:p>
+            <a:pPr>
+              <a:spcAft>
+                <a:spcPts val="700"/>
+              </a:spcAft>
+              <a:defRPr sz="1300">
+                <a:solidFill>
+                  <a:srgbClr val="CBD5E1"/>
+                </a:solidFill>
+                <a:latin typeface="Segoe UI"/>
+              </a:defRPr>
+            </a:pPr>
+            <a:r>
+              <a:t>• GitHub CI/CD: Tự động deploy khi push.</a:t>
             </a:r>
           </a:p>
         </p:txBody>
@@ -10658,8 +11368,8 @@
         </p:nvSpPr>
         <p:spPr>
           <a:xfrm>
-            <a:off x="731520" y="365760"/>
-            <a:ext cx="10728655" cy="1097280"/>
+            <a:off x="731520" y="320040"/>
+            <a:ext cx="10728655" cy="1143000"/>
           </a:xfrm>
           <a:prstGeom prst="rect">
             <a:avLst/>
@@ -10692,7 +11402,7 @@
               <a:spcAft>
                 <a:spcPts val="200"/>
               </a:spcAft>
-              <a:defRPr sz="2300" b="1">
+              <a:defRPr sz="2200" b="1">
                 <a:solidFill>
                   <a:srgbClr val="FFFFFF"/>
                 </a:solidFill>
@@ -10823,7 +11533,7 @@
           <a:p>
             <a:pPr>
               <a:spcAft>
-                <a:spcPts val="800"/>
+                <a:spcPts val="700"/>
               </a:spcAft>
               <a:defRPr sz="1300">
                 <a:solidFill>
@@ -10839,23 +11549,23 @@
           <a:p>
             <a:pPr>
               <a:spcAft>
-                <a:spcPts val="800"/>
-              </a:spcAft>
-              <a:defRPr sz="1300">
-                <a:solidFill>
-                  <a:srgbClr val="CBD5E1"/>
-                </a:solidFill>
-                <a:latin typeface="Segoe UI"/>
-              </a:defRPr>
-            </a:pPr>
-            <a:r>
-              <a:t>• Gửi yêu cầu qua giao thức HTTP/HTTPS.</a:t>
-            </a:r>
-          </a:p>
-          <a:p>
-            <a:pPr>
-              <a:spcAft>
-                <a:spcPts val="800"/>
+                <a:spcPts val="700"/>
+              </a:spcAft>
+              <a:defRPr sz="1300">
+                <a:solidFill>
+                  <a:srgbClr val="CBD5E1"/>
+                </a:solidFill>
+                <a:latin typeface="Segoe UI"/>
+              </a:defRPr>
+            </a:pPr>
+            <a:r>
+              <a:t>• Giao tiếp qua HTTP/HTTPS REST API.</a:t>
+            </a:r>
+          </a:p>
+          <a:p>
+            <a:pPr>
+              <a:spcAft>
+                <a:spcPts val="700"/>
               </a:spcAft>
               <a:defRPr sz="1300">
                 <a:solidFill>
@@ -10871,33 +11581,33 @@
           <a:p>
             <a:pPr>
               <a:spcAft>
-                <a:spcPts val="800"/>
-              </a:spcAft>
-              <a:defRPr sz="1300">
-                <a:solidFill>
-                  <a:srgbClr val="CBD5E1"/>
-                </a:solidFill>
-                <a:latin typeface="Segoe UI"/>
-              </a:defRPr>
-            </a:pPr>
-            <a:r>
-              <a:t>• Xử lý xáo trộn đề trên SessionStorage.</a:t>
-            </a:r>
-          </a:p>
-          <a:p>
-            <a:pPr>
-              <a:spcAft>
-                <a:spcPts val="800"/>
-              </a:spcAft>
-              <a:defRPr sz="1300">
-                <a:solidFill>
-                  <a:srgbClr val="CBD5E1"/>
-                </a:solidFill>
-                <a:latin typeface="Segoe UI"/>
-              </a:defRPr>
-            </a:pPr>
-            <a:r>
-              <a:t>• Bắt sự kiện gian lận chuyển tab/chụp ảnh.</a:t>
+                <a:spcPts val="700"/>
+              </a:spcAft>
+              <a:defRPr sz="1300">
+                <a:solidFill>
+                  <a:srgbClr val="CBD5E1"/>
+                </a:solidFill>
+                <a:latin typeface="Segoe UI"/>
+              </a:defRPr>
+            </a:pPr>
+            <a:r>
+              <a:t>• Xáo trộn câu hỏi trên SessionStorage.</a:t>
+            </a:r>
+          </a:p>
+          <a:p>
+            <a:pPr>
+              <a:spcAft>
+                <a:spcPts val="700"/>
+              </a:spcAft>
+              <a:defRPr sz="1300">
+                <a:solidFill>
+                  <a:srgbClr val="CBD5E1"/>
+                </a:solidFill>
+                <a:latin typeface="Segoe UI"/>
+              </a:defRPr>
+            </a:pPr>
+            <a:r>
+              <a:t>• Bắt gian lận chuyển tab &amp; chụp ảnh.</a:t>
             </a:r>
           </a:p>
         </p:txBody>
@@ -11007,81 +11717,81 @@
           <a:p>
             <a:pPr>
               <a:spcAft>
-                <a:spcPts val="800"/>
-              </a:spcAft>
-              <a:defRPr sz="1300">
-                <a:solidFill>
-                  <a:srgbClr val="CBD5E1"/>
-                </a:solidFill>
-                <a:latin typeface="Segoe UI"/>
-              </a:defRPr>
-            </a:pPr>
-            <a:r>
-              <a:t>• Tiếp nhận &amp; điều phối RESTful API.</a:t>
-            </a:r>
-          </a:p>
-          <a:p>
-            <a:pPr>
-              <a:spcAft>
-                <a:spcPts val="800"/>
-              </a:spcAft>
-              <a:defRPr sz="1300">
-                <a:solidFill>
-                  <a:srgbClr val="CBD5E1"/>
-                </a:solidFill>
-                <a:latin typeface="Segoe UI"/>
-              </a:defRPr>
-            </a:pPr>
-            <a:r>
-              <a:t>• Kiểm tra quyền hạn bằng Middleware JWT.</a:t>
-            </a:r>
-          </a:p>
-          <a:p>
-            <a:pPr>
-              <a:spcAft>
-                <a:spcPts val="800"/>
-              </a:spcAft>
-              <a:defRPr sz="1300">
-                <a:solidFill>
-                  <a:srgbClr val="CBD5E1"/>
-                </a:solidFill>
-                <a:latin typeface="Segoe UI"/>
-              </a:defRPr>
-            </a:pPr>
-            <a:r>
-              <a:t>• Tính toán điểm số &amp; đếm vi phạm.</a:t>
-            </a:r>
-          </a:p>
-          <a:p>
-            <a:pPr>
-              <a:spcAft>
-                <a:spcPts val="800"/>
-              </a:spcAft>
-              <a:defRPr sz="1300">
-                <a:solidFill>
-                  <a:srgbClr val="CBD5E1"/>
-                </a:solidFill>
-                <a:latin typeface="Segoe UI"/>
-              </a:defRPr>
-            </a:pPr>
-            <a:r>
-              <a:t>• Đồng bộ giờ làm bài theo UTC Server.</a:t>
-            </a:r>
-          </a:p>
-          <a:p>
-            <a:pPr>
-              <a:spcAft>
-                <a:spcPts val="800"/>
-              </a:spcAft>
-              <a:defRPr sz="1300">
-                <a:solidFill>
-                  <a:srgbClr val="CBD5E1"/>
-                </a:solidFill>
-                <a:latin typeface="Segoe UI"/>
-              </a:defRPr>
-            </a:pPr>
-            <a:r>
-              <a:t>• Kết nối Google AI Studio qua HTTPS.</a:t>
+                <a:spcPts val="700"/>
+              </a:spcAft>
+              <a:defRPr sz="1300">
+                <a:solidFill>
+                  <a:srgbClr val="CBD5E1"/>
+                </a:solidFill>
+                <a:latin typeface="Segoe UI"/>
+              </a:defRPr>
+            </a:pPr>
+            <a:r>
+              <a:t>• Điều phối các Controller RESTful API.</a:t>
+            </a:r>
+          </a:p>
+          <a:p>
+            <a:pPr>
+              <a:spcAft>
+                <a:spcPts val="700"/>
+              </a:spcAft>
+              <a:defRPr sz="1300">
+                <a:solidFill>
+                  <a:srgbClr val="CBD5E1"/>
+                </a:solidFill>
+                <a:latin typeface="Segoe UI"/>
+              </a:defRPr>
+            </a:pPr>
+            <a:r>
+              <a:t>• Middleware kiểm tra chữ ký số JWT.</a:t>
+            </a:r>
+          </a:p>
+          <a:p>
+            <a:pPr>
+              <a:spcAft>
+                <a:spcPts val="700"/>
+              </a:spcAft>
+              <a:defRPr sz="1300">
+                <a:solidFill>
+                  <a:srgbClr val="CBD5E1"/>
+                </a:solidFill>
+                <a:latin typeface="Segoe UI"/>
+              </a:defRPr>
+            </a:pPr>
+            <a:r>
+              <a:t>• Tính toán điểm số &amp; ghi nhận vi phạm.</a:t>
+            </a:r>
+          </a:p>
+          <a:p>
+            <a:pPr>
+              <a:spcAft>
+                <a:spcPts val="700"/>
+              </a:spcAft>
+              <a:defRPr sz="1300">
+                <a:solidFill>
+                  <a:srgbClr val="CBD5E1"/>
+                </a:solidFill>
+                <a:latin typeface="Segoe UI"/>
+              </a:defRPr>
+            </a:pPr>
+            <a:r>
+              <a:t>• Đồng bộ thời gian thi theo Server UTC.</a:t>
+            </a:r>
+          </a:p>
+          <a:p>
+            <a:pPr>
+              <a:spcAft>
+                <a:spcPts val="700"/>
+              </a:spcAft>
+              <a:defRPr sz="1300">
+                <a:solidFill>
+                  <a:srgbClr val="CBD5E1"/>
+                </a:solidFill>
+                <a:latin typeface="Segoe UI"/>
+              </a:defRPr>
+            </a:pPr>
+            <a:r>
+              <a:t>• Gọi Google AI Studio qua HTTPS API.</a:t>
             </a:r>
           </a:p>
         </p:txBody>
@@ -11191,39 +11901,39 @@
           <a:p>
             <a:pPr>
               <a:spcAft>
-                <a:spcPts val="800"/>
-              </a:spcAft>
-              <a:defRPr sz="1300">
-                <a:solidFill>
-                  <a:srgbClr val="CBD5E1"/>
-                </a:solidFill>
-                <a:latin typeface="Segoe UI"/>
-              </a:defRPr>
-            </a:pPr>
-            <a:r>
-              <a:t>• Lưu trữ bền vững dữ liệu ACID.</a:t>
-            </a:r>
-          </a:p>
-          <a:p>
-            <a:pPr>
-              <a:spcAft>
-                <a:spcPts val="800"/>
-              </a:spcAft>
-              <a:defRPr sz="1300">
-                <a:solidFill>
-                  <a:srgbClr val="CBD5E1"/>
-                </a:solidFill>
-                <a:latin typeface="Segoe UI"/>
-              </a:defRPr>
-            </a:pPr>
-            <a:r>
-              <a:t>• Bảng Users: Tài khoản &amp; Hash BCrypt.</a:t>
-            </a:r>
-          </a:p>
-          <a:p>
-            <a:pPr>
-              <a:spcAft>
-                <a:spcPts val="800"/>
+                <a:spcPts val="700"/>
+              </a:spcAft>
+              <a:defRPr sz="1300">
+                <a:solidFill>
+                  <a:srgbClr val="CBD5E1"/>
+                </a:solidFill>
+                <a:latin typeface="Segoe UI"/>
+              </a:defRPr>
+            </a:pPr>
+            <a:r>
+              <a:t>• Lưu trữ bền vững dữ liệu chuẩn ACID.</a:t>
+            </a:r>
+          </a:p>
+          <a:p>
+            <a:pPr>
+              <a:spcAft>
+                <a:spcPts val="700"/>
+              </a:spcAft>
+              <a:defRPr sz="1300">
+                <a:solidFill>
+                  <a:srgbClr val="CBD5E1"/>
+                </a:solidFill>
+                <a:latin typeface="Segoe UI"/>
+              </a:defRPr>
+            </a:pPr>
+            <a:r>
+              <a:t>• Bảng Users: Tài khoản &amp; Hash mật khẩu.</a:t>
+            </a:r>
+          </a:p>
+          <a:p>
+            <a:pPr>
+              <a:spcAft>
+                <a:spcPts val="700"/>
               </a:spcAft>
               <a:defRPr sz="1300">
                 <a:solidFill>
@@ -11239,7 +11949,7 @@
           <a:p>
             <a:pPr>
               <a:spcAft>
-                <a:spcPts val="800"/>
+                <a:spcPts val="700"/>
               </a:spcAft>
               <a:defRPr sz="1300">
                 <a:solidFill>
@@ -11255,7 +11965,7 @@
           <a:p>
             <a:pPr>
               <a:spcAft>
-                <a:spcPts val="800"/>
+                <a:spcPts val="700"/>
               </a:spcAft>
               <a:defRPr sz="1300">
                 <a:solidFill>
@@ -11382,8 +12092,8 @@
         </p:nvSpPr>
         <p:spPr>
           <a:xfrm>
-            <a:off x="731520" y="365760"/>
-            <a:ext cx="10728655" cy="1097280"/>
+            <a:off x="731520" y="320040"/>
+            <a:ext cx="10728655" cy="1143000"/>
           </a:xfrm>
           <a:prstGeom prst="rect">
             <a:avLst/>
@@ -11408,7 +12118,7 @@
               </a:defRPr>
             </a:pPr>
             <a:r>
-              <a:t>07. MẠNG ĐA MÁY</a:t>
+              <a:t>07. TRIỂN KHAI MẠNG</a:t>
             </a:r>
           </a:p>
           <a:p>
@@ -11416,7 +12126,7 @@
               <a:spcAft>
                 <a:spcPts val="200"/>
               </a:spcAft>
-              <a:defRPr sz="2300" b="1">
+              <a:defRPr sz="2200" b="1">
                 <a:solidFill>
                   <a:srgbClr val="FFFFFF"/>
                 </a:solidFill>
@@ -11424,7 +12134,7 @@
               </a:defRPr>
             </a:pPr>
             <a:r>
-              <a:t>Cơ Chế Chạy Đa Máy: LAN &amp; Public Internet</a:t>
+              <a:t>Cơ Chế Triển Khai Mạng: LAN &amp; Cloud Production</a:t>
             </a:r>
           </a:p>
           <a:p>
@@ -11547,7 +12257,7 @@
           <a:p>
             <a:pPr>
               <a:spcAft>
-                <a:spcPts val="800"/>
+                <a:spcPts val="700"/>
               </a:spcAft>
               <a:defRPr sz="1300">
                 <a:solidFill>
@@ -11563,39 +12273,55 @@
           <a:p>
             <a:pPr>
               <a:spcAft>
-                <a:spcPts val="800"/>
-              </a:spcAft>
-              <a:defRPr sz="1300">
-                <a:solidFill>
-                  <a:srgbClr val="CBD5E1"/>
-                </a:solidFill>
-                <a:latin typeface="Segoe UI"/>
-              </a:defRPr>
-            </a:pPr>
-            <a:r>
-              <a:t>• Vite Reverse Proxy: Chuyển tiếp /api/* về Backend Kestrel.</a:t>
-            </a:r>
-          </a:p>
-          <a:p>
-            <a:pPr>
-              <a:spcAft>
-                <a:spcPts val="800"/>
-              </a:spcAft>
-              <a:defRPr sz="1300">
-                <a:solidFill>
-                  <a:srgbClr val="CBD5E1"/>
-                </a:solidFill>
-                <a:latin typeface="Segoe UI"/>
-              </a:defRPr>
-            </a:pPr>
-            <a:r>
-              <a:t>• Truy cập tức thì: Máy con gõ http://192.168.x.x:5173.</a:t>
-            </a:r>
-          </a:p>
-          <a:p>
-            <a:pPr>
-              <a:spcAft>
-                <a:spcPts val="800"/>
+                <a:spcPts val="700"/>
+              </a:spcAft>
+              <a:defRPr sz="1300">
+                <a:solidFill>
+                  <a:srgbClr val="CBD5E1"/>
+                </a:solidFill>
+                <a:latin typeface="Segoe UI"/>
+              </a:defRPr>
+            </a:pPr>
+            <a:r>
+              <a:t>• Vite Reverse Proxy: Chuyển tiếp ngầm /api/* về Backend Kestrel.</a:t>
+            </a:r>
+          </a:p>
+          <a:p>
+            <a:pPr>
+              <a:spcAft>
+                <a:spcPts val="700"/>
+              </a:spcAft>
+              <a:defRPr sz="1300">
+                <a:solidFill>
+                  <a:srgbClr val="CBD5E1"/>
+                </a:solidFill>
+                <a:latin typeface="Segoe UI"/>
+              </a:defRPr>
+            </a:pPr>
+            <a:r>
+              <a:t>• Mở Firewall Windows: Lệnh netsh mở port cho các máy con kết nối.</a:t>
+            </a:r>
+          </a:p>
+          <a:p>
+            <a:pPr>
+              <a:spcAft>
+                <a:spcPts val="700"/>
+              </a:spcAft>
+              <a:defRPr sz="1300">
+                <a:solidFill>
+                  <a:srgbClr val="CBD5E1"/>
+                </a:solidFill>
+                <a:latin typeface="Segoe UI"/>
+              </a:defRPr>
+            </a:pPr>
+            <a:r>
+              <a:t>• Truy cập tức thì: Học sinh mở http://192.168.x.x:5173.</a:t>
+            </a:r>
+          </a:p>
+          <a:p>
+            <a:pPr>
+              <a:spcAft>
+                <a:spcPts val="700"/>
               </a:spcAft>
               <a:defRPr sz="1300">
                 <a:solidFill>
@@ -11680,13 +12406,13 @@
             <a:pPr>
               <a:defRPr sz="1500" b="1">
                 <a:solidFill>
-                  <a:srgbClr val="6366F1"/>
-                </a:solidFill>
-                <a:latin typeface="Segoe UI"/>
-              </a:defRPr>
-            </a:pPr>
-            <a:r>
-              <a:t>2. Public Internet (Khác mạng / 4G)</a:t>
+                  <a:srgbClr val="10B981"/>
+                </a:solidFill>
+                <a:latin typeface="Segoe UI"/>
+              </a:defRPr>
+            </a:pPr>
+            <a:r>
+              <a:t>2. Cloud Production (Vercel &amp; Cloudflare)</a:t>
             </a:r>
           </a:p>
         </p:txBody>
@@ -11715,65 +12441,81 @@
           <a:p>
             <a:pPr>
               <a:spcAft>
-                <a:spcPts val="800"/>
-              </a:spcAft>
-              <a:defRPr sz="1300">
-                <a:solidFill>
-                  <a:srgbClr val="CBD5E1"/>
-                </a:solidFill>
-                <a:latin typeface="Segoe UI"/>
-              </a:defRPr>
-            </a:pPr>
-            <a:r>
-              <a:t>• SSH Reverse Tunnel: Pinggy mã hóa dữ liệu qua cổng 443.</a:t>
-            </a:r>
-          </a:p>
-          <a:p>
-            <a:pPr>
-              <a:spcAft>
-                <a:spcPts val="800"/>
-              </a:spcAft>
-              <a:defRPr sz="1300">
-                <a:solidFill>
-                  <a:srgbClr val="CBD5E1"/>
-                </a:solidFill>
-                <a:latin typeface="Segoe UI"/>
-              </a:defRPr>
-            </a:pPr>
-            <a:r>
-              <a:t>• Bỏ qua Firewall: Vượt qua bộ lọc AP Isolation của trường học.</a:t>
-            </a:r>
-          </a:p>
-          <a:p>
-            <a:pPr>
-              <a:spcAft>
-                <a:spcPts val="800"/>
-              </a:spcAft>
-              <a:defRPr sz="1300">
-                <a:solidFill>
-                  <a:srgbClr val="CBD5E1"/>
-                </a:solidFill>
-                <a:latin typeface="Segoe UI"/>
-              </a:defRPr>
-            </a:pPr>
-            <a:r>
-              <a:t>• Mã QR tiện lợi: Điện thoại chỉ cần bật camera quét mã để thi.</a:t>
-            </a:r>
-          </a:p>
-          <a:p>
-            <a:pPr>
-              <a:spcAft>
-                <a:spcPts val="800"/>
-              </a:spcAft>
-              <a:defRPr sz="1300">
-                <a:solidFill>
-                  <a:srgbClr val="CBD5E1"/>
-                </a:solidFill>
-                <a:latin typeface="Segoe UI"/>
-              </a:defRPr>
-            </a:pPr>
-            <a:r>
-              <a:t>• Bảo mật TLS: Mã hóa End-to-End an toàn tuyệt đối.</a:t>
+                <a:spcPts val="700"/>
+              </a:spcAft>
+              <a:defRPr sz="1300">
+                <a:solidFill>
+                  <a:srgbClr val="CBD5E1"/>
+                </a:solidFill>
+                <a:latin typeface="Segoe UI"/>
+              </a:defRPr>
+            </a:pPr>
+            <a:r>
+              <a:t>• Tên miền chính thức: https://quiz-ai-system.vercel.app/.</a:t>
+            </a:r>
+          </a:p>
+          <a:p>
+            <a:pPr>
+              <a:spcAft>
+                <a:spcPts val="700"/>
+              </a:spcAft>
+              <a:defRPr sz="1300">
+                <a:solidFill>
+                  <a:srgbClr val="CBD5E1"/>
+                </a:solidFill>
+                <a:latin typeface="Segoe UI"/>
+              </a:defRPr>
+            </a:pPr>
+            <a:r>
+              <a:t>• CDN Toàn cầu: Vercel Edge Network tải giao diện siêu tốc.</a:t>
+            </a:r>
+          </a:p>
+          <a:p>
+            <a:pPr>
+              <a:spcAft>
+                <a:spcPts val="700"/>
+              </a:spcAft>
+              <a:defRPr sz="1300">
+                <a:solidFill>
+                  <a:srgbClr val="CBD5E1"/>
+                </a:solidFill>
+                <a:latin typeface="Segoe UI"/>
+              </a:defRPr>
+            </a:pPr>
+            <a:r>
+              <a:t>• Cloudflare HTTPS Tunnel: Kết nối an toàn không cần mở port modem.</a:t>
+            </a:r>
+          </a:p>
+          <a:p>
+            <a:pPr>
+              <a:spcAft>
+                <a:spcPts val="700"/>
+              </a:spcAft>
+              <a:defRPr sz="1300">
+                <a:solidFill>
+                  <a:srgbClr val="CBD5E1"/>
+                </a:solidFill>
+                <a:latin typeface="Segoe UI"/>
+              </a:defRPr>
+            </a:pPr>
+            <a:r>
+              <a:t>• Vượt qua rào cản mạng: Chạy mượt mà trên 4G/5G và mạng ngoài trường.</a:t>
+            </a:r>
+          </a:p>
+          <a:p>
+            <a:pPr>
+              <a:spcAft>
+                <a:spcPts val="700"/>
+              </a:spcAft>
+              <a:defRPr sz="1300">
+                <a:solidFill>
+                  <a:srgbClr val="CBD5E1"/>
+                </a:solidFill>
+                <a:latin typeface="Segoe UI"/>
+              </a:defRPr>
+            </a:pPr>
+            <a:r>
+              <a:t>• CI/CD Tự động: Commit code lên GitHub tự động cập nhật hệ thống.</a:t>
             </a:r>
           </a:p>
         </p:txBody>
@@ -11890,8 +12632,8 @@
         </p:nvSpPr>
         <p:spPr>
           <a:xfrm>
-            <a:off x="731520" y="365760"/>
-            <a:ext cx="10728655" cy="1097280"/>
+            <a:off x="731520" y="320040"/>
+            <a:ext cx="10728655" cy="1143000"/>
           </a:xfrm>
           <a:prstGeom prst="rect">
             <a:avLst/>
@@ -11924,7 +12666,7 @@
               <a:spcAft>
                 <a:spcPts val="200"/>
               </a:spcAft>
-              <a:defRPr sz="2300" b="1">
+              <a:defRPr sz="2200" b="1">
                 <a:solidFill>
                   <a:srgbClr val="FFFFFF"/>
                 </a:solidFill>
@@ -12055,7 +12797,7 @@
           <a:p>
             <a:pPr>
               <a:spcAft>
-                <a:spcPts val="800"/>
+                <a:spcPts val="700"/>
               </a:spcAft>
               <a:defRPr sz="1300">
                 <a:solidFill>
@@ -12071,7 +12813,7 @@
           <a:p>
             <a:pPr>
               <a:spcAft>
-                <a:spcPts val="800"/>
+                <a:spcPts val="700"/>
               </a:spcAft>
               <a:defRPr sz="1300">
                 <a:solidFill>
@@ -12087,7 +12829,7 @@
           <a:p>
             <a:pPr>
               <a:spcAft>
-                <a:spcPts val="800"/>
+                <a:spcPts val="700"/>
               </a:spcAft>
               <a:defRPr sz="1300">
                 <a:solidFill>
@@ -12103,7 +12845,23 @@
           <a:p>
             <a:pPr>
               <a:spcAft>
-                <a:spcPts val="800"/>
+                <a:spcPts val="700"/>
+              </a:spcAft>
+              <a:defRPr sz="1300">
+                <a:solidFill>
+                  <a:srgbClr val="CBD5E1"/>
+                </a:solidFill>
+                <a:latin typeface="Segoe UI"/>
+              </a:defRPr>
+            </a:pPr>
+            <a:r>
+              <a:t>• Đúng thứ tự: Gói tin đến đích luôn được sắp xếp chính xác.</a:t>
+            </a:r>
+          </a:p>
+          <a:p>
+            <a:pPr>
+              <a:spcAft>
+                <a:spcPts val="700"/>
               </a:spcAft>
               <a:defRPr sz="1300">
                 <a:solidFill>
@@ -12223,7 +12981,7 @@
           <a:p>
             <a:pPr>
               <a:spcAft>
-                <a:spcPts val="800"/>
+                <a:spcPts val="700"/>
               </a:spcAft>
               <a:defRPr sz="1300">
                 <a:solidFill>
@@ -12239,7 +12997,7 @@
           <a:p>
             <a:pPr>
               <a:spcAft>
-                <a:spcPts val="800"/>
+                <a:spcPts val="700"/>
               </a:spcAft>
               <a:defRPr sz="1300">
                 <a:solidFill>
@@ -12255,7 +13013,7 @@
           <a:p>
             <a:pPr>
               <a:spcAft>
-                <a:spcPts val="800"/>
+                <a:spcPts val="700"/>
               </a:spcAft>
               <a:defRPr sz="1300">
                 <a:solidFill>
@@ -12271,7 +13029,23 @@
           <a:p>
             <a:pPr>
               <a:spcAft>
-                <a:spcPts val="800"/>
+                <a:spcPts val="700"/>
+              </a:spcAft>
+              <a:defRPr sz="1300">
+                <a:solidFill>
+                  <a:srgbClr val="CBD5E1"/>
+                </a:solidFill>
+                <a:latin typeface="Segoe UI"/>
+              </a:defRPr>
+            </a:pPr>
+            <a:r>
+              <a:t>• Quá trình ngắt kết nối (4-Way Handshake): FIN -&gt; ACK -&gt; FIN -&gt; ACK.</a:t>
+            </a:r>
+          </a:p>
+          <a:p>
+            <a:pPr>
+              <a:spcAft>
+                <a:spcPts val="700"/>
               </a:spcAft>
               <a:defRPr sz="1300">
                 <a:solidFill>

--- a/slide_thuyet_trinh_QuizAI_final.pptx
+++ b/slide_thuyet_trinh_QuizAI_final.pptx
@@ -3119,7 +3119,7 @@
             <a:avLst/>
           </a:prstGeom>
           <a:solidFill>
-            <a:srgbClr val="0B0F19"/>
+            <a:srgbClr val="FFFFFF"/>
           </a:solidFill>
           <a:ln>
             <a:noFill/>
@@ -3162,7 +3162,7 @@
             <a:avLst/>
           </a:prstGeom>
           <a:solidFill>
-            <a:srgbClr val="6366F1"/>
+            <a:srgbClr val="4338CA"/>
           </a:solidFill>
           <a:ln>
             <a:noFill/>
@@ -3205,11 +3205,11 @@
             <a:avLst/>
           </a:prstGeom>
           <a:solidFill>
-            <a:srgbClr val="131B2E"/>
+            <a:srgbClr val="F8FAFC"/>
           </a:solidFill>
           <a:ln w="19050">
             <a:solidFill>
-              <a:srgbClr val="283554"/>
+              <a:srgbClr val="E2E8F0"/>
             </a:solidFill>
           </a:ln>
         </p:spPr>
@@ -3263,7 +3263,7 @@
               </a:spcAft>
               <a:defRPr sz="1200" b="1">
                 <a:solidFill>
-                  <a:srgbClr val="06B6D4"/>
+                  <a:srgbClr val="4338CA"/>
                 </a:solidFill>
                 <a:latin typeface="Segoe UI"/>
               </a:defRPr>
@@ -3279,7 +3279,7 @@
               </a:spcAft>
               <a:defRPr sz="2800" b="1">
                 <a:solidFill>
-                  <a:srgbClr val="FFFFFF"/>
+                  <a:srgbClr val="0F172A"/>
                 </a:solidFill>
                 <a:latin typeface="Segoe UI"/>
               </a:defRPr>
@@ -3299,7 +3299,7 @@
               </a:spcAft>
               <a:defRPr sz="1400">
                 <a:solidFill>
-                  <a:srgbClr val="CBD5E1"/>
+                  <a:srgbClr val="334155"/>
                 </a:solidFill>
                 <a:latin typeface="Segoe UI"/>
               </a:defRPr>
@@ -3312,7 +3312,7 @@
             <a:pPr algn="ctr">
               <a:defRPr sz="1300" b="1">
                 <a:solidFill>
-                  <a:srgbClr val="94A3B8"/>
+                  <a:srgbClr val="64748B"/>
                 </a:solidFill>
                 <a:latin typeface="Segoe UI"/>
               </a:defRPr>
@@ -3356,7 +3356,7 @@
             <a:avLst/>
           </a:prstGeom>
           <a:solidFill>
-            <a:srgbClr val="0B0F19"/>
+            <a:srgbClr val="FFFFFF"/>
           </a:solidFill>
           <a:ln>
             <a:noFill/>
@@ -3399,7 +3399,7 @@
             <a:avLst/>
           </a:prstGeom>
           <a:solidFill>
-            <a:srgbClr val="6366F1"/>
+            <a:srgbClr val="4338CA"/>
           </a:solidFill>
           <a:ln>
             <a:noFill/>
@@ -3455,7 +3455,7 @@
               </a:spcAft>
               <a:defRPr sz="1100" b="1">
                 <a:solidFill>
-                  <a:srgbClr val="06B6D4"/>
+                  <a:srgbClr val="4338CA"/>
                 </a:solidFill>
                 <a:latin typeface="Segoe UI"/>
               </a:defRPr>
@@ -3471,7 +3471,7 @@
               </a:spcAft>
               <a:defRPr sz="2200" b="1">
                 <a:solidFill>
-                  <a:srgbClr val="FFFFFF"/>
+                  <a:srgbClr val="0F172A"/>
                 </a:solidFill>
                 <a:latin typeface="Segoe UI"/>
               </a:defRPr>
@@ -3484,7 +3484,7 @@
             <a:pPr>
               <a:defRPr sz="1300">
                 <a:solidFill>
-                  <a:srgbClr val="94A3B8"/>
+                  <a:srgbClr val="64748B"/>
                 </a:solidFill>
                 <a:latin typeface="Segoe UI"/>
               </a:defRPr>
@@ -3510,11 +3510,11 @@
             <a:avLst/>
           </a:prstGeom>
           <a:solidFill>
-            <a:srgbClr val="131B2E"/>
+            <a:srgbClr val="F8FAFC"/>
           </a:solidFill>
-          <a:ln w="12700">
+          <a:ln w="15240">
             <a:solidFill>
-              <a:srgbClr val="283554"/>
+              <a:srgbClr val="E2E8F0"/>
             </a:solidFill>
           </a:ln>
         </p:spPr>
@@ -3565,7 +3565,7 @@
             <a:pPr>
               <a:defRPr sz="1500" b="1">
                 <a:solidFill>
-                  <a:srgbClr val="06B6D4"/>
+                  <a:srgbClr val="0369A1"/>
                 </a:solidFill>
                 <a:latin typeface="Segoe UI"/>
               </a:defRPr>
@@ -3604,7 +3604,7 @@
               </a:spcAft>
               <a:defRPr sz="1300">
                 <a:solidFill>
-                  <a:srgbClr val="CBD5E1"/>
+                  <a:srgbClr val="334155"/>
                 </a:solidFill>
                 <a:latin typeface="Segoe UI"/>
               </a:defRPr>
@@ -3620,7 +3620,7 @@
               </a:spcAft>
               <a:defRPr sz="1300">
                 <a:solidFill>
-                  <a:srgbClr val="CBD5E1"/>
+                  <a:srgbClr val="334155"/>
                 </a:solidFill>
                 <a:latin typeface="Segoe UI"/>
               </a:defRPr>
@@ -3636,7 +3636,7 @@
               </a:spcAft>
               <a:defRPr sz="1300">
                 <a:solidFill>
-                  <a:srgbClr val="CBD5E1"/>
+                  <a:srgbClr val="334155"/>
                 </a:solidFill>
                 <a:latin typeface="Segoe UI"/>
               </a:defRPr>
@@ -3652,7 +3652,7 @@
               </a:spcAft>
               <a:defRPr sz="1300">
                 <a:solidFill>
-                  <a:srgbClr val="CBD5E1"/>
+                  <a:srgbClr val="334155"/>
                 </a:solidFill>
                 <a:latin typeface="Segoe UI"/>
               </a:defRPr>
@@ -3668,7 +3668,7 @@
               </a:spcAft>
               <a:defRPr sz="1300">
                 <a:solidFill>
-                  <a:srgbClr val="CBD5E1"/>
+                  <a:srgbClr val="334155"/>
                 </a:solidFill>
                 <a:latin typeface="Segoe UI"/>
               </a:defRPr>
@@ -3694,11 +3694,11 @@
             <a:avLst/>
           </a:prstGeom>
           <a:solidFill>
-            <a:srgbClr val="131B2E"/>
+            <a:srgbClr val="F8FAFC"/>
           </a:solidFill>
-          <a:ln w="12700">
+          <a:ln w="15240">
             <a:solidFill>
-              <a:srgbClr val="283554"/>
+              <a:srgbClr val="E2E8F0"/>
             </a:solidFill>
           </a:ln>
         </p:spPr>
@@ -3749,7 +3749,7 @@
             <a:pPr>
               <a:defRPr sz="1500" b="1">
                 <a:solidFill>
-                  <a:srgbClr val="6366F1"/>
+                  <a:srgbClr val="4338CA"/>
                 </a:solidFill>
                 <a:latin typeface="Segoe UI"/>
               </a:defRPr>
@@ -3788,7 +3788,7 @@
               </a:spcAft>
               <a:defRPr sz="1300">
                 <a:solidFill>
-                  <a:srgbClr val="CBD5E1"/>
+                  <a:srgbClr val="334155"/>
                 </a:solidFill>
                 <a:latin typeface="Segoe UI"/>
               </a:defRPr>
@@ -3804,7 +3804,7 @@
               </a:spcAft>
               <a:defRPr sz="1300">
                 <a:solidFill>
-                  <a:srgbClr val="CBD5E1"/>
+                  <a:srgbClr val="334155"/>
                 </a:solidFill>
                 <a:latin typeface="Segoe UI"/>
               </a:defRPr>
@@ -3820,7 +3820,7 @@
               </a:spcAft>
               <a:defRPr sz="1300">
                 <a:solidFill>
-                  <a:srgbClr val="CBD5E1"/>
+                  <a:srgbClr val="334155"/>
                 </a:solidFill>
                 <a:latin typeface="Segoe UI"/>
               </a:defRPr>
@@ -3836,7 +3836,7 @@
               </a:spcAft>
               <a:defRPr sz="1300">
                 <a:solidFill>
-                  <a:srgbClr val="CBD5E1"/>
+                  <a:srgbClr val="334155"/>
                 </a:solidFill>
                 <a:latin typeface="Segoe UI"/>
               </a:defRPr>
@@ -3852,7 +3852,7 @@
               </a:spcAft>
               <a:defRPr sz="1300">
                 <a:solidFill>
-                  <a:srgbClr val="CBD5E1"/>
+                  <a:srgbClr val="334155"/>
                 </a:solidFill>
                 <a:latin typeface="Segoe UI"/>
               </a:defRPr>
@@ -3896,7 +3896,7 @@
             <a:avLst/>
           </a:prstGeom>
           <a:solidFill>
-            <a:srgbClr val="0B0F19"/>
+            <a:srgbClr val="FFFFFF"/>
           </a:solidFill>
           <a:ln>
             <a:noFill/>
@@ -3939,7 +3939,7 @@
             <a:avLst/>
           </a:prstGeom>
           <a:solidFill>
-            <a:srgbClr val="6366F1"/>
+            <a:srgbClr val="4338CA"/>
           </a:solidFill>
           <a:ln>
             <a:noFill/>
@@ -3995,7 +3995,7 @@
               </a:spcAft>
               <a:defRPr sz="1100" b="1">
                 <a:solidFill>
-                  <a:srgbClr val="06B6D4"/>
+                  <a:srgbClr val="4338CA"/>
                 </a:solidFill>
                 <a:latin typeface="Segoe UI"/>
               </a:defRPr>
@@ -4011,7 +4011,7 @@
               </a:spcAft>
               <a:defRPr sz="2200" b="1">
                 <a:solidFill>
-                  <a:srgbClr val="FFFFFF"/>
+                  <a:srgbClr val="0F172A"/>
                 </a:solidFill>
                 <a:latin typeface="Segoe UI"/>
               </a:defRPr>
@@ -4024,7 +4024,7 @@
             <a:pPr>
               <a:defRPr sz="1300">
                 <a:solidFill>
-                  <a:srgbClr val="94A3B8"/>
+                  <a:srgbClr val="64748B"/>
                 </a:solidFill>
                 <a:latin typeface="Segoe UI"/>
               </a:defRPr>
@@ -4050,11 +4050,11 @@
             <a:avLst/>
           </a:prstGeom>
           <a:solidFill>
-            <a:srgbClr val="131B2E"/>
+            <a:srgbClr val="F8FAFC"/>
           </a:solidFill>
-          <a:ln w="12700">
+          <a:ln w="15240">
             <a:solidFill>
-              <a:srgbClr val="283554"/>
+              <a:srgbClr val="E2E8F0"/>
             </a:solidFill>
           </a:ln>
         </p:spPr>
@@ -4105,7 +4105,7 @@
             <a:pPr>
               <a:defRPr sz="1500" b="1">
                 <a:solidFill>
-                  <a:srgbClr val="6366F1"/>
+                  <a:srgbClr val="4338CA"/>
                 </a:solidFill>
                 <a:latin typeface="Segoe UI"/>
               </a:defRPr>
@@ -4144,7 +4144,7 @@
               </a:spcAft>
               <a:defRPr sz="1300">
                 <a:solidFill>
-                  <a:srgbClr val="CBD5E1"/>
+                  <a:srgbClr val="334155"/>
                 </a:solidFill>
                 <a:latin typeface="Segoe UI"/>
               </a:defRPr>
@@ -4160,7 +4160,7 @@
               </a:spcAft>
               <a:defRPr sz="1300">
                 <a:solidFill>
-                  <a:srgbClr val="CBD5E1"/>
+                  <a:srgbClr val="334155"/>
                 </a:solidFill>
                 <a:latin typeface="Segoe UI"/>
               </a:defRPr>
@@ -4176,7 +4176,7 @@
               </a:spcAft>
               <a:defRPr sz="1300">
                 <a:solidFill>
-                  <a:srgbClr val="CBD5E1"/>
+                  <a:srgbClr val="334155"/>
                 </a:solidFill>
                 <a:latin typeface="Segoe UI"/>
               </a:defRPr>
@@ -4192,7 +4192,7 @@
               </a:spcAft>
               <a:defRPr sz="1300">
                 <a:solidFill>
-                  <a:srgbClr val="CBD5E1"/>
+                  <a:srgbClr val="334155"/>
                 </a:solidFill>
                 <a:latin typeface="Segoe UI"/>
               </a:defRPr>
@@ -4208,7 +4208,7 @@
               </a:spcAft>
               <a:defRPr sz="1300">
                 <a:solidFill>
-                  <a:srgbClr val="CBD5E1"/>
+                  <a:srgbClr val="334155"/>
                 </a:solidFill>
                 <a:latin typeface="Segoe UI"/>
               </a:defRPr>
@@ -4234,11 +4234,11 @@
             <a:avLst/>
           </a:prstGeom>
           <a:solidFill>
-            <a:srgbClr val="131B2E"/>
+            <a:srgbClr val="F8FAFC"/>
           </a:solidFill>
-          <a:ln w="12700">
+          <a:ln w="15240">
             <a:solidFill>
-              <a:srgbClr val="283554"/>
+              <a:srgbClr val="E2E8F0"/>
             </a:solidFill>
           </a:ln>
         </p:spPr>
@@ -4289,7 +4289,7 @@
             <a:pPr>
               <a:defRPr sz="1500" b="1">
                 <a:solidFill>
-                  <a:srgbClr val="10B981"/>
+                  <a:srgbClr val="047857"/>
                 </a:solidFill>
                 <a:latin typeface="Segoe UI"/>
               </a:defRPr>
@@ -4328,7 +4328,7 @@
               </a:spcAft>
               <a:defRPr sz="1300">
                 <a:solidFill>
-                  <a:srgbClr val="CBD5E1"/>
+                  <a:srgbClr val="334155"/>
                 </a:solidFill>
                 <a:latin typeface="Segoe UI"/>
               </a:defRPr>
@@ -4344,7 +4344,7 @@
               </a:spcAft>
               <a:defRPr sz="1300">
                 <a:solidFill>
-                  <a:srgbClr val="CBD5E1"/>
+                  <a:srgbClr val="334155"/>
                 </a:solidFill>
                 <a:latin typeface="Segoe UI"/>
               </a:defRPr>
@@ -4360,7 +4360,7 @@
               </a:spcAft>
               <a:defRPr sz="1300">
                 <a:solidFill>
-                  <a:srgbClr val="CBD5E1"/>
+                  <a:srgbClr val="334155"/>
                 </a:solidFill>
                 <a:latin typeface="Segoe UI"/>
               </a:defRPr>
@@ -4376,7 +4376,7 @@
               </a:spcAft>
               <a:defRPr sz="1300">
                 <a:solidFill>
-                  <a:srgbClr val="CBD5E1"/>
+                  <a:srgbClr val="334155"/>
                 </a:solidFill>
                 <a:latin typeface="Segoe UI"/>
               </a:defRPr>
@@ -4392,7 +4392,7 @@
               </a:spcAft>
               <a:defRPr sz="1300">
                 <a:solidFill>
-                  <a:srgbClr val="CBD5E1"/>
+                  <a:srgbClr val="334155"/>
                 </a:solidFill>
                 <a:latin typeface="Segoe UI"/>
               </a:defRPr>
@@ -4436,7 +4436,7 @@
             <a:avLst/>
           </a:prstGeom>
           <a:solidFill>
-            <a:srgbClr val="0B0F19"/>
+            <a:srgbClr val="FFFFFF"/>
           </a:solidFill>
           <a:ln>
             <a:noFill/>
@@ -4479,7 +4479,7 @@
             <a:avLst/>
           </a:prstGeom>
           <a:solidFill>
-            <a:srgbClr val="6366F1"/>
+            <a:srgbClr val="4338CA"/>
           </a:solidFill>
           <a:ln>
             <a:noFill/>
@@ -4535,7 +4535,7 @@
               </a:spcAft>
               <a:defRPr sz="1100" b="1">
                 <a:solidFill>
-                  <a:srgbClr val="06B6D4"/>
+                  <a:srgbClr val="4338CA"/>
                 </a:solidFill>
                 <a:latin typeface="Segoe UI"/>
               </a:defRPr>
@@ -4551,7 +4551,7 @@
               </a:spcAft>
               <a:defRPr sz="2200" b="1">
                 <a:solidFill>
-                  <a:srgbClr val="FFFFFF"/>
+                  <a:srgbClr val="0F172A"/>
                 </a:solidFill>
                 <a:latin typeface="Segoe UI"/>
               </a:defRPr>
@@ -4564,7 +4564,7 @@
             <a:pPr>
               <a:defRPr sz="1300">
                 <a:solidFill>
-                  <a:srgbClr val="94A3B8"/>
+                  <a:srgbClr val="64748B"/>
                 </a:solidFill>
                 <a:latin typeface="Segoe UI"/>
               </a:defRPr>
@@ -4590,11 +4590,11 @@
             <a:avLst/>
           </a:prstGeom>
           <a:solidFill>
-            <a:srgbClr val="131B2E"/>
+            <a:srgbClr val="F8FAFC"/>
           </a:solidFill>
-          <a:ln w="12700">
+          <a:ln w="15240">
             <a:solidFill>
-              <a:srgbClr val="283554"/>
+              <a:srgbClr val="E2E8F0"/>
             </a:solidFill>
           </a:ln>
         </p:spPr>
@@ -4645,7 +4645,7 @@
             <a:pPr>
               <a:defRPr sz="1500" b="1">
                 <a:solidFill>
-                  <a:srgbClr val="06B6D4"/>
+                  <a:srgbClr val="0369A1"/>
                 </a:solidFill>
                 <a:latin typeface="Segoe UI"/>
               </a:defRPr>
@@ -4684,7 +4684,7 @@
               </a:spcAft>
               <a:defRPr sz="1300">
                 <a:solidFill>
-                  <a:srgbClr val="CBD5E1"/>
+                  <a:srgbClr val="334155"/>
                 </a:solidFill>
                 <a:latin typeface="Segoe UI"/>
               </a:defRPr>
@@ -4700,7 +4700,7 @@
               </a:spcAft>
               <a:defRPr sz="1300">
                 <a:solidFill>
-                  <a:srgbClr val="CBD5E1"/>
+                  <a:srgbClr val="334155"/>
                 </a:solidFill>
                 <a:latin typeface="Segoe UI"/>
               </a:defRPr>
@@ -4716,7 +4716,7 @@
               </a:spcAft>
               <a:defRPr sz="1300">
                 <a:solidFill>
-                  <a:srgbClr val="CBD5E1"/>
+                  <a:srgbClr val="334155"/>
                 </a:solidFill>
                 <a:latin typeface="Segoe UI"/>
               </a:defRPr>
@@ -4732,7 +4732,7 @@
               </a:spcAft>
               <a:defRPr sz="1300">
                 <a:solidFill>
-                  <a:srgbClr val="CBD5E1"/>
+                  <a:srgbClr val="334155"/>
                 </a:solidFill>
                 <a:latin typeface="Segoe UI"/>
               </a:defRPr>
@@ -4748,7 +4748,7 @@
               </a:spcAft>
               <a:defRPr sz="1300">
                 <a:solidFill>
-                  <a:srgbClr val="CBD5E1"/>
+                  <a:srgbClr val="334155"/>
                 </a:solidFill>
                 <a:latin typeface="Segoe UI"/>
               </a:defRPr>
@@ -4774,11 +4774,11 @@
             <a:avLst/>
           </a:prstGeom>
           <a:solidFill>
-            <a:srgbClr val="131B2E"/>
+            <a:srgbClr val="F8FAFC"/>
           </a:solidFill>
-          <a:ln w="12700">
+          <a:ln w="15240">
             <a:solidFill>
-              <a:srgbClr val="283554"/>
+              <a:srgbClr val="E2E8F0"/>
             </a:solidFill>
           </a:ln>
         </p:spPr>
@@ -4829,7 +4829,7 @@
             <a:pPr>
               <a:defRPr sz="1500" b="1">
                 <a:solidFill>
-                  <a:srgbClr val="F59E0B"/>
+                  <a:srgbClr val="B45309"/>
                 </a:solidFill>
                 <a:latin typeface="Segoe UI"/>
               </a:defRPr>
@@ -4868,7 +4868,7 @@
               </a:spcAft>
               <a:defRPr sz="1300">
                 <a:solidFill>
-                  <a:srgbClr val="CBD5E1"/>
+                  <a:srgbClr val="334155"/>
                 </a:solidFill>
                 <a:latin typeface="Segoe UI"/>
               </a:defRPr>
@@ -4884,7 +4884,7 @@
               </a:spcAft>
               <a:defRPr sz="1300">
                 <a:solidFill>
-                  <a:srgbClr val="CBD5E1"/>
+                  <a:srgbClr val="334155"/>
                 </a:solidFill>
                 <a:latin typeface="Segoe UI"/>
               </a:defRPr>
@@ -4900,7 +4900,7 @@
               </a:spcAft>
               <a:defRPr sz="1300">
                 <a:solidFill>
-                  <a:srgbClr val="CBD5E1"/>
+                  <a:srgbClr val="334155"/>
                 </a:solidFill>
                 <a:latin typeface="Segoe UI"/>
               </a:defRPr>
@@ -4916,7 +4916,7 @@
               </a:spcAft>
               <a:defRPr sz="1300">
                 <a:solidFill>
-                  <a:srgbClr val="CBD5E1"/>
+                  <a:srgbClr val="334155"/>
                 </a:solidFill>
                 <a:latin typeface="Segoe UI"/>
               </a:defRPr>
@@ -4932,7 +4932,7 @@
               </a:spcAft>
               <a:defRPr sz="1300">
                 <a:solidFill>
-                  <a:srgbClr val="CBD5E1"/>
+                  <a:srgbClr val="334155"/>
                 </a:solidFill>
                 <a:latin typeface="Segoe UI"/>
               </a:defRPr>
@@ -4976,7 +4976,7 @@
             <a:avLst/>
           </a:prstGeom>
           <a:solidFill>
-            <a:srgbClr val="0B0F19"/>
+            <a:srgbClr val="FFFFFF"/>
           </a:solidFill>
           <a:ln>
             <a:noFill/>
@@ -5019,7 +5019,7 @@
             <a:avLst/>
           </a:prstGeom>
           <a:solidFill>
-            <a:srgbClr val="6366F1"/>
+            <a:srgbClr val="4338CA"/>
           </a:solidFill>
           <a:ln>
             <a:noFill/>
@@ -5075,7 +5075,7 @@
               </a:spcAft>
               <a:defRPr sz="1100" b="1">
                 <a:solidFill>
-                  <a:srgbClr val="06B6D4"/>
+                  <a:srgbClr val="4338CA"/>
                 </a:solidFill>
                 <a:latin typeface="Segoe UI"/>
               </a:defRPr>
@@ -5091,7 +5091,7 @@
               </a:spcAft>
               <a:defRPr sz="2200" b="1">
                 <a:solidFill>
-                  <a:srgbClr val="FFFFFF"/>
+                  <a:srgbClr val="0F172A"/>
                 </a:solidFill>
                 <a:latin typeface="Segoe UI"/>
               </a:defRPr>
@@ -5104,7 +5104,7 @@
             <a:pPr>
               <a:defRPr sz="1300">
                 <a:solidFill>
-                  <a:srgbClr val="94A3B8"/>
+                  <a:srgbClr val="64748B"/>
                 </a:solidFill>
                 <a:latin typeface="Segoe UI"/>
               </a:defRPr>
@@ -5130,11 +5130,11 @@
             <a:avLst/>
           </a:prstGeom>
           <a:solidFill>
-            <a:srgbClr val="131B2E"/>
+            <a:srgbClr val="F8FAFC"/>
           </a:solidFill>
-          <a:ln w="12700">
+          <a:ln w="15240">
             <a:solidFill>
-              <a:srgbClr val="283554"/>
+              <a:srgbClr val="E2E8F0"/>
             </a:solidFill>
           </a:ln>
         </p:spPr>
@@ -5185,7 +5185,7 @@
             <a:pPr>
               <a:defRPr sz="1500" b="1">
                 <a:solidFill>
-                  <a:srgbClr val="EF4444"/>
+                  <a:srgbClr val="B91C1C"/>
                 </a:solidFill>
                 <a:latin typeface="Segoe UI"/>
               </a:defRPr>
@@ -5224,7 +5224,7 @@
               </a:spcAft>
               <a:defRPr sz="1300">
                 <a:solidFill>
-                  <a:srgbClr val="CBD5E1"/>
+                  <a:srgbClr val="334155"/>
                 </a:solidFill>
                 <a:latin typeface="Segoe UI"/>
               </a:defRPr>
@@ -5240,7 +5240,7 @@
               </a:spcAft>
               <a:defRPr sz="1300">
                 <a:solidFill>
-                  <a:srgbClr val="CBD5E1"/>
+                  <a:srgbClr val="334155"/>
                 </a:solidFill>
                 <a:latin typeface="Segoe UI"/>
               </a:defRPr>
@@ -5256,7 +5256,7 @@
               </a:spcAft>
               <a:defRPr sz="1300">
                 <a:solidFill>
-                  <a:srgbClr val="CBD5E1"/>
+                  <a:srgbClr val="334155"/>
                 </a:solidFill>
                 <a:latin typeface="Segoe UI"/>
               </a:defRPr>
@@ -5272,7 +5272,7 @@
               </a:spcAft>
               <a:defRPr sz="1300">
                 <a:solidFill>
-                  <a:srgbClr val="CBD5E1"/>
+                  <a:srgbClr val="334155"/>
                 </a:solidFill>
                 <a:latin typeface="Segoe UI"/>
               </a:defRPr>
@@ -5288,7 +5288,7 @@
               </a:spcAft>
               <a:defRPr sz="1300">
                 <a:solidFill>
-                  <a:srgbClr val="CBD5E1"/>
+                  <a:srgbClr val="334155"/>
                 </a:solidFill>
                 <a:latin typeface="Segoe UI"/>
               </a:defRPr>
@@ -5314,11 +5314,11 @@
             <a:avLst/>
           </a:prstGeom>
           <a:solidFill>
-            <a:srgbClr val="131B2E"/>
+            <a:srgbClr val="F8FAFC"/>
           </a:solidFill>
-          <a:ln w="12700">
+          <a:ln w="15240">
             <a:solidFill>
-              <a:srgbClr val="283554"/>
+              <a:srgbClr val="E2E8F0"/>
             </a:solidFill>
           </a:ln>
         </p:spPr>
@@ -5369,7 +5369,7 @@
             <a:pPr>
               <a:defRPr sz="1500" b="1">
                 <a:solidFill>
-                  <a:srgbClr val="F59E0B"/>
+                  <a:srgbClr val="B45309"/>
                 </a:solidFill>
                 <a:latin typeface="Segoe UI"/>
               </a:defRPr>
@@ -5408,7 +5408,7 @@
               </a:spcAft>
               <a:defRPr sz="1300">
                 <a:solidFill>
-                  <a:srgbClr val="CBD5E1"/>
+                  <a:srgbClr val="334155"/>
                 </a:solidFill>
                 <a:latin typeface="Segoe UI"/>
               </a:defRPr>
@@ -5424,7 +5424,7 @@
               </a:spcAft>
               <a:defRPr sz="1300">
                 <a:solidFill>
-                  <a:srgbClr val="CBD5E1"/>
+                  <a:srgbClr val="334155"/>
                 </a:solidFill>
                 <a:latin typeface="Segoe UI"/>
               </a:defRPr>
@@ -5440,7 +5440,7 @@
               </a:spcAft>
               <a:defRPr sz="1300">
                 <a:solidFill>
-                  <a:srgbClr val="CBD5E1"/>
+                  <a:srgbClr val="334155"/>
                 </a:solidFill>
                 <a:latin typeface="Segoe UI"/>
               </a:defRPr>
@@ -5456,7 +5456,7 @@
               </a:spcAft>
               <a:defRPr sz="1300">
                 <a:solidFill>
-                  <a:srgbClr val="CBD5E1"/>
+                  <a:srgbClr val="334155"/>
                 </a:solidFill>
                 <a:latin typeface="Segoe UI"/>
               </a:defRPr>
@@ -5472,7 +5472,7 @@
               </a:spcAft>
               <a:defRPr sz="1300">
                 <a:solidFill>
-                  <a:srgbClr val="CBD5E1"/>
+                  <a:srgbClr val="334155"/>
                 </a:solidFill>
                 <a:latin typeface="Segoe UI"/>
               </a:defRPr>
@@ -5498,11 +5498,11 @@
             <a:avLst/>
           </a:prstGeom>
           <a:solidFill>
-            <a:srgbClr val="131B2E"/>
+            <a:srgbClr val="F8FAFC"/>
           </a:solidFill>
-          <a:ln w="12700">
+          <a:ln w="15240">
             <a:solidFill>
-              <a:srgbClr val="283554"/>
+              <a:srgbClr val="E2E8F0"/>
             </a:solidFill>
           </a:ln>
         </p:spPr>
@@ -5553,7 +5553,7 @@
             <a:pPr>
               <a:defRPr sz="1500" b="1">
                 <a:solidFill>
-                  <a:srgbClr val="06B6D4"/>
+                  <a:srgbClr val="0369A1"/>
                 </a:solidFill>
                 <a:latin typeface="Segoe UI"/>
               </a:defRPr>
@@ -5592,7 +5592,7 @@
               </a:spcAft>
               <a:defRPr sz="1300">
                 <a:solidFill>
-                  <a:srgbClr val="CBD5E1"/>
+                  <a:srgbClr val="334155"/>
                 </a:solidFill>
                 <a:latin typeface="Segoe UI"/>
               </a:defRPr>
@@ -5608,7 +5608,7 @@
               </a:spcAft>
               <a:defRPr sz="1300">
                 <a:solidFill>
-                  <a:srgbClr val="CBD5E1"/>
+                  <a:srgbClr val="334155"/>
                 </a:solidFill>
                 <a:latin typeface="Segoe UI"/>
               </a:defRPr>
@@ -5624,7 +5624,7 @@
               </a:spcAft>
               <a:defRPr sz="1300">
                 <a:solidFill>
-                  <a:srgbClr val="CBD5E1"/>
+                  <a:srgbClr val="334155"/>
                 </a:solidFill>
                 <a:latin typeface="Segoe UI"/>
               </a:defRPr>
@@ -5640,7 +5640,7 @@
               </a:spcAft>
               <a:defRPr sz="1300">
                 <a:solidFill>
-                  <a:srgbClr val="CBD5E1"/>
+                  <a:srgbClr val="334155"/>
                 </a:solidFill>
                 <a:latin typeface="Segoe UI"/>
               </a:defRPr>
@@ -5656,7 +5656,7 @@
               </a:spcAft>
               <a:defRPr sz="1300">
                 <a:solidFill>
-                  <a:srgbClr val="CBD5E1"/>
+                  <a:srgbClr val="334155"/>
                 </a:solidFill>
                 <a:latin typeface="Segoe UI"/>
               </a:defRPr>
@@ -5700,7 +5700,7 @@
             <a:avLst/>
           </a:prstGeom>
           <a:solidFill>
-            <a:srgbClr val="0B0F19"/>
+            <a:srgbClr val="FFFFFF"/>
           </a:solidFill>
           <a:ln>
             <a:noFill/>
@@ -5743,7 +5743,7 @@
             <a:avLst/>
           </a:prstGeom>
           <a:solidFill>
-            <a:srgbClr val="6366F1"/>
+            <a:srgbClr val="4338CA"/>
           </a:solidFill>
           <a:ln>
             <a:noFill/>
@@ -5799,7 +5799,7 @@
               </a:spcAft>
               <a:defRPr sz="1100" b="1">
                 <a:solidFill>
-                  <a:srgbClr val="06B6D4"/>
+                  <a:srgbClr val="4338CA"/>
                 </a:solidFill>
                 <a:latin typeface="Segoe UI"/>
               </a:defRPr>
@@ -5815,7 +5815,7 @@
               </a:spcAft>
               <a:defRPr sz="2200" b="1">
                 <a:solidFill>
-                  <a:srgbClr val="FFFFFF"/>
+                  <a:srgbClr val="0F172A"/>
                 </a:solidFill>
                 <a:latin typeface="Segoe UI"/>
               </a:defRPr>
@@ -5828,7 +5828,7 @@
             <a:pPr>
               <a:defRPr sz="1300">
                 <a:solidFill>
-                  <a:srgbClr val="94A3B8"/>
+                  <a:srgbClr val="64748B"/>
                 </a:solidFill>
                 <a:latin typeface="Segoe UI"/>
               </a:defRPr>
@@ -5854,11 +5854,11 @@
             <a:avLst/>
           </a:prstGeom>
           <a:solidFill>
-            <a:srgbClr val="131B2E"/>
+            <a:srgbClr val="F8FAFC"/>
           </a:solidFill>
-          <a:ln w="12700">
+          <a:ln w="15240">
             <a:solidFill>
-              <a:srgbClr val="283554"/>
+              <a:srgbClr val="E2E8F0"/>
             </a:solidFill>
           </a:ln>
         </p:spPr>
@@ -5909,7 +5909,7 @@
             <a:pPr>
               <a:defRPr sz="1500" b="1">
                 <a:solidFill>
-                  <a:srgbClr val="6366F1"/>
+                  <a:srgbClr val="4338CA"/>
                 </a:solidFill>
                 <a:latin typeface="Segoe UI"/>
               </a:defRPr>
@@ -5948,7 +5948,7 @@
               </a:spcAft>
               <a:defRPr sz="1300">
                 <a:solidFill>
-                  <a:srgbClr val="CBD5E1"/>
+                  <a:srgbClr val="334155"/>
                 </a:solidFill>
                 <a:latin typeface="Segoe UI"/>
               </a:defRPr>
@@ -5964,7 +5964,7 @@
               </a:spcAft>
               <a:defRPr sz="1300">
                 <a:solidFill>
-                  <a:srgbClr val="CBD5E1"/>
+                  <a:srgbClr val="334155"/>
                 </a:solidFill>
                 <a:latin typeface="Segoe UI"/>
               </a:defRPr>
@@ -5980,7 +5980,7 @@
               </a:spcAft>
               <a:defRPr sz="1300">
                 <a:solidFill>
-                  <a:srgbClr val="CBD5E1"/>
+                  <a:srgbClr val="334155"/>
                 </a:solidFill>
                 <a:latin typeface="Segoe UI"/>
               </a:defRPr>
@@ -5996,7 +5996,7 @@
               </a:spcAft>
               <a:defRPr sz="1300">
                 <a:solidFill>
-                  <a:srgbClr val="CBD5E1"/>
+                  <a:srgbClr val="334155"/>
                 </a:solidFill>
                 <a:latin typeface="Segoe UI"/>
               </a:defRPr>
@@ -6012,7 +6012,7 @@
               </a:spcAft>
               <a:defRPr sz="1300">
                 <a:solidFill>
-                  <a:srgbClr val="CBD5E1"/>
+                  <a:srgbClr val="334155"/>
                 </a:solidFill>
                 <a:latin typeface="Segoe UI"/>
               </a:defRPr>
@@ -6038,11 +6038,11 @@
             <a:avLst/>
           </a:prstGeom>
           <a:solidFill>
-            <a:srgbClr val="131B2E"/>
+            <a:srgbClr val="F8FAFC"/>
           </a:solidFill>
-          <a:ln w="12700">
+          <a:ln w="15240">
             <a:solidFill>
-              <a:srgbClr val="283554"/>
+              <a:srgbClr val="E2E8F0"/>
             </a:solidFill>
           </a:ln>
         </p:spPr>
@@ -6093,7 +6093,7 @@
             <a:pPr>
               <a:defRPr sz="1500" b="1">
                 <a:solidFill>
-                  <a:srgbClr val="10B981"/>
+                  <a:srgbClr val="047857"/>
                 </a:solidFill>
                 <a:latin typeface="Segoe UI"/>
               </a:defRPr>
@@ -6132,7 +6132,7 @@
               </a:spcAft>
               <a:defRPr sz="1300">
                 <a:solidFill>
-                  <a:srgbClr val="CBD5E1"/>
+                  <a:srgbClr val="334155"/>
                 </a:solidFill>
                 <a:latin typeface="Segoe UI"/>
               </a:defRPr>
@@ -6148,7 +6148,7 @@
               </a:spcAft>
               <a:defRPr sz="1300">
                 <a:solidFill>
-                  <a:srgbClr val="CBD5E1"/>
+                  <a:srgbClr val="334155"/>
                 </a:solidFill>
                 <a:latin typeface="Segoe UI"/>
               </a:defRPr>
@@ -6164,7 +6164,7 @@
               </a:spcAft>
               <a:defRPr sz="1300">
                 <a:solidFill>
-                  <a:srgbClr val="CBD5E1"/>
+                  <a:srgbClr val="334155"/>
                 </a:solidFill>
                 <a:latin typeface="Segoe UI"/>
               </a:defRPr>
@@ -6180,7 +6180,7 @@
               </a:spcAft>
               <a:defRPr sz="1300">
                 <a:solidFill>
-                  <a:srgbClr val="CBD5E1"/>
+                  <a:srgbClr val="334155"/>
                 </a:solidFill>
                 <a:latin typeface="Segoe UI"/>
               </a:defRPr>
@@ -6196,7 +6196,7 @@
               </a:spcAft>
               <a:defRPr sz="1300">
                 <a:solidFill>
-                  <a:srgbClr val="CBD5E1"/>
+                  <a:srgbClr val="334155"/>
                 </a:solidFill>
                 <a:latin typeface="Segoe UI"/>
               </a:defRPr>
@@ -6222,11 +6222,11 @@
             <a:avLst/>
           </a:prstGeom>
           <a:solidFill>
-            <a:srgbClr val="131B2E"/>
+            <a:srgbClr val="F8FAFC"/>
           </a:solidFill>
-          <a:ln w="12700">
+          <a:ln w="15240">
             <a:solidFill>
-              <a:srgbClr val="283554"/>
+              <a:srgbClr val="E2E8F0"/>
             </a:solidFill>
           </a:ln>
         </p:spPr>
@@ -6277,7 +6277,7 @@
             <a:pPr>
               <a:defRPr sz="1500" b="1">
                 <a:solidFill>
-                  <a:srgbClr val="06B6D4"/>
+                  <a:srgbClr val="0369A1"/>
                 </a:solidFill>
                 <a:latin typeface="Segoe UI"/>
               </a:defRPr>
@@ -6316,7 +6316,7 @@
               </a:spcAft>
               <a:defRPr sz="1300">
                 <a:solidFill>
-                  <a:srgbClr val="CBD5E1"/>
+                  <a:srgbClr val="334155"/>
                 </a:solidFill>
                 <a:latin typeface="Segoe UI"/>
               </a:defRPr>
@@ -6332,7 +6332,7 @@
               </a:spcAft>
               <a:defRPr sz="1300">
                 <a:solidFill>
-                  <a:srgbClr val="CBD5E1"/>
+                  <a:srgbClr val="334155"/>
                 </a:solidFill>
                 <a:latin typeface="Segoe UI"/>
               </a:defRPr>
@@ -6348,7 +6348,7 @@
               </a:spcAft>
               <a:defRPr sz="1300">
                 <a:solidFill>
-                  <a:srgbClr val="CBD5E1"/>
+                  <a:srgbClr val="334155"/>
                 </a:solidFill>
                 <a:latin typeface="Segoe UI"/>
               </a:defRPr>
@@ -6364,7 +6364,7 @@
               </a:spcAft>
               <a:defRPr sz="1300">
                 <a:solidFill>
-                  <a:srgbClr val="CBD5E1"/>
+                  <a:srgbClr val="334155"/>
                 </a:solidFill>
                 <a:latin typeface="Segoe UI"/>
               </a:defRPr>
@@ -6380,7 +6380,7 @@
               </a:spcAft>
               <a:defRPr sz="1300">
                 <a:solidFill>
-                  <a:srgbClr val="CBD5E1"/>
+                  <a:srgbClr val="334155"/>
                 </a:solidFill>
                 <a:latin typeface="Segoe UI"/>
               </a:defRPr>
@@ -6424,7 +6424,7 @@
             <a:avLst/>
           </a:prstGeom>
           <a:solidFill>
-            <a:srgbClr val="0B0F19"/>
+            <a:srgbClr val="FFFFFF"/>
           </a:solidFill>
           <a:ln>
             <a:noFill/>
@@ -6467,7 +6467,7 @@
             <a:avLst/>
           </a:prstGeom>
           <a:solidFill>
-            <a:srgbClr val="6366F1"/>
+            <a:srgbClr val="4338CA"/>
           </a:solidFill>
           <a:ln>
             <a:noFill/>
@@ -6523,7 +6523,7 @@
               </a:spcAft>
               <a:defRPr sz="1100" b="1">
                 <a:solidFill>
-                  <a:srgbClr val="06B6D4"/>
+                  <a:srgbClr val="4338CA"/>
                 </a:solidFill>
                 <a:latin typeface="Segoe UI"/>
               </a:defRPr>
@@ -6539,7 +6539,7 @@
               </a:spcAft>
               <a:defRPr sz="2200" b="1">
                 <a:solidFill>
-                  <a:srgbClr val="FFFFFF"/>
+                  <a:srgbClr val="0F172A"/>
                 </a:solidFill>
                 <a:latin typeface="Segoe UI"/>
               </a:defRPr>
@@ -6552,7 +6552,7 @@
             <a:pPr>
               <a:defRPr sz="1300">
                 <a:solidFill>
-                  <a:srgbClr val="94A3B8"/>
+                  <a:srgbClr val="64748B"/>
                 </a:solidFill>
                 <a:latin typeface="Segoe UI"/>
               </a:defRPr>
@@ -6578,11 +6578,11 @@
             <a:avLst/>
           </a:prstGeom>
           <a:solidFill>
-            <a:srgbClr val="131B2E"/>
+            <a:srgbClr val="F8FAFC"/>
           </a:solidFill>
-          <a:ln w="12700">
+          <a:ln w="15240">
             <a:solidFill>
-              <a:srgbClr val="283554"/>
+              <a:srgbClr val="E2E8F0"/>
             </a:solidFill>
           </a:ln>
         </p:spPr>
@@ -6633,7 +6633,7 @@
             <a:pPr>
               <a:defRPr sz="2800" b="1">
                 <a:solidFill>
-                  <a:srgbClr val="06B6D4"/>
+                  <a:srgbClr val="0369A1"/>
                 </a:solidFill>
                 <a:latin typeface="Segoe UI"/>
               </a:defRPr>
@@ -6646,7 +6646,7 @@
             <a:pPr>
               <a:defRPr sz="1200">
                 <a:solidFill>
-                  <a:srgbClr val="94A3B8"/>
+                  <a:srgbClr val="64748B"/>
                 </a:solidFill>
                 <a:latin typeface="Segoe UI"/>
               </a:defRPr>
@@ -6672,11 +6672,11 @@
             <a:avLst/>
           </a:prstGeom>
           <a:solidFill>
-            <a:srgbClr val="131B2E"/>
+            <a:srgbClr val="F8FAFC"/>
           </a:solidFill>
-          <a:ln w="12700">
+          <a:ln w="15240">
             <a:solidFill>
-              <a:srgbClr val="283554"/>
+              <a:srgbClr val="E2E8F0"/>
             </a:solidFill>
           </a:ln>
         </p:spPr>
@@ -6727,7 +6727,7 @@
             <a:pPr>
               <a:defRPr sz="2800" b="1">
                 <a:solidFill>
-                  <a:srgbClr val="6366F1"/>
+                  <a:srgbClr val="4338CA"/>
                 </a:solidFill>
                 <a:latin typeface="Segoe UI"/>
               </a:defRPr>
@@ -6740,7 +6740,7 @@
             <a:pPr>
               <a:defRPr sz="1200">
                 <a:solidFill>
-                  <a:srgbClr val="94A3B8"/>
+                  <a:srgbClr val="64748B"/>
                 </a:solidFill>
                 <a:latin typeface="Segoe UI"/>
               </a:defRPr>
@@ -6766,11 +6766,11 @@
             <a:avLst/>
           </a:prstGeom>
           <a:solidFill>
-            <a:srgbClr val="131B2E"/>
+            <a:srgbClr val="F8FAFC"/>
           </a:solidFill>
-          <a:ln w="12700">
+          <a:ln w="15240">
             <a:solidFill>
-              <a:srgbClr val="283554"/>
+              <a:srgbClr val="E2E8F0"/>
             </a:solidFill>
           </a:ln>
         </p:spPr>
@@ -6821,7 +6821,7 @@
             <a:pPr>
               <a:defRPr sz="2800" b="1">
                 <a:solidFill>
-                  <a:srgbClr val="10B981"/>
+                  <a:srgbClr val="047857"/>
                 </a:solidFill>
                 <a:latin typeface="Segoe UI"/>
               </a:defRPr>
@@ -6834,7 +6834,7 @@
             <a:pPr>
               <a:defRPr sz="1200">
                 <a:solidFill>
-                  <a:srgbClr val="94A3B8"/>
+                  <a:srgbClr val="64748B"/>
                 </a:solidFill>
                 <a:latin typeface="Segoe UI"/>
               </a:defRPr>
@@ -6860,11 +6860,11 @@
             <a:avLst/>
           </a:prstGeom>
           <a:solidFill>
-            <a:srgbClr val="131B2E"/>
+            <a:srgbClr val="F8FAFC"/>
           </a:solidFill>
-          <a:ln w="12700">
+          <a:ln w="15240">
             <a:solidFill>
-              <a:srgbClr val="283554"/>
+              <a:srgbClr val="E2E8F0"/>
             </a:solidFill>
           </a:ln>
         </p:spPr>
@@ -6915,7 +6915,7 @@
             <a:pPr>
               <a:defRPr sz="2600" b="1">
                 <a:solidFill>
-                  <a:srgbClr val="F59E0B"/>
+                  <a:srgbClr val="B45309"/>
                 </a:solidFill>
                 <a:latin typeface="Segoe UI"/>
               </a:defRPr>
@@ -6928,7 +6928,7 @@
             <a:pPr>
               <a:defRPr sz="1200">
                 <a:solidFill>
-                  <a:srgbClr val="94A3B8"/>
+                  <a:srgbClr val="64748B"/>
                 </a:solidFill>
                 <a:latin typeface="Segoe UI"/>
               </a:defRPr>
@@ -6954,11 +6954,11 @@
             <a:avLst/>
           </a:prstGeom>
           <a:solidFill>
-            <a:srgbClr val="131B2E"/>
+            <a:srgbClr val="F8FAFC"/>
           </a:solidFill>
-          <a:ln w="12700">
+          <a:ln w="15240">
             <a:solidFill>
-              <a:srgbClr val="283554"/>
+              <a:srgbClr val="E2E8F0"/>
             </a:solidFill>
           </a:ln>
         </p:spPr>
@@ -7009,7 +7009,7 @@
             <a:pPr>
               <a:defRPr sz="1500" b="1">
                 <a:solidFill>
-                  <a:srgbClr val="FFFFFF"/>
+                  <a:srgbClr val="0F172A"/>
                 </a:solidFill>
                 <a:latin typeface="Segoe UI"/>
               </a:defRPr>
@@ -7048,7 +7048,7 @@
               </a:spcAft>
               <a:defRPr sz="1300">
                 <a:solidFill>
-                  <a:srgbClr val="CBD5E1"/>
+                  <a:srgbClr val="334155"/>
                 </a:solidFill>
                 <a:latin typeface="Segoe UI"/>
               </a:defRPr>
@@ -7064,7 +7064,7 @@
               </a:spcAft>
               <a:defRPr sz="1300">
                 <a:solidFill>
-                  <a:srgbClr val="CBD5E1"/>
+                  <a:srgbClr val="334155"/>
                 </a:solidFill>
                 <a:latin typeface="Segoe UI"/>
               </a:defRPr>
@@ -7080,7 +7080,7 @@
               </a:spcAft>
               <a:defRPr sz="1300">
                 <a:solidFill>
-                  <a:srgbClr val="CBD5E1"/>
+                  <a:srgbClr val="334155"/>
                 </a:solidFill>
                 <a:latin typeface="Segoe UI"/>
               </a:defRPr>
@@ -7096,7 +7096,7 @@
               </a:spcAft>
               <a:defRPr sz="1300">
                 <a:solidFill>
-                  <a:srgbClr val="CBD5E1"/>
+                  <a:srgbClr val="334155"/>
                 </a:solidFill>
                 <a:latin typeface="Segoe UI"/>
               </a:defRPr>
@@ -7140,7 +7140,7 @@
             <a:avLst/>
           </a:prstGeom>
           <a:solidFill>
-            <a:srgbClr val="0B0F19"/>
+            <a:srgbClr val="FFFFFF"/>
           </a:solidFill>
           <a:ln>
             <a:noFill/>
@@ -7183,7 +7183,7 @@
             <a:avLst/>
           </a:prstGeom>
           <a:solidFill>
-            <a:srgbClr val="6366F1"/>
+            <a:srgbClr val="4338CA"/>
           </a:solidFill>
           <a:ln>
             <a:noFill/>
@@ -7239,7 +7239,7 @@
               </a:spcAft>
               <a:defRPr sz="1100" b="1">
                 <a:solidFill>
-                  <a:srgbClr val="06B6D4"/>
+                  <a:srgbClr val="4338CA"/>
                 </a:solidFill>
                 <a:latin typeface="Segoe UI"/>
               </a:defRPr>
@@ -7255,7 +7255,7 @@
               </a:spcAft>
               <a:defRPr sz="2200" b="1">
                 <a:solidFill>
-                  <a:srgbClr val="FFFFFF"/>
+                  <a:srgbClr val="0F172A"/>
                 </a:solidFill>
                 <a:latin typeface="Segoe UI"/>
               </a:defRPr>
@@ -7268,7 +7268,7 @@
             <a:pPr>
               <a:defRPr sz="1300">
                 <a:solidFill>
-                  <a:srgbClr val="94A3B8"/>
+                  <a:srgbClr val="64748B"/>
                 </a:solidFill>
                 <a:latin typeface="Segoe UI"/>
               </a:defRPr>
@@ -7294,11 +7294,11 @@
             <a:avLst/>
           </a:prstGeom>
           <a:solidFill>
-            <a:srgbClr val="131B2E"/>
+            <a:srgbClr val="F8FAFC"/>
           </a:solidFill>
-          <a:ln w="12700">
+          <a:ln w="15240">
             <a:solidFill>
-              <a:srgbClr val="283554"/>
+              <a:srgbClr val="E2E8F0"/>
             </a:solidFill>
           </a:ln>
         </p:spPr>
@@ -7349,7 +7349,7 @@
             <a:pPr>
               <a:defRPr sz="1500" b="1">
                 <a:solidFill>
-                  <a:srgbClr val="10B981"/>
+                  <a:srgbClr val="047857"/>
                 </a:solidFill>
                 <a:latin typeface="Segoe UI"/>
               </a:defRPr>
@@ -7388,7 +7388,7 @@
               </a:spcAft>
               <a:defRPr sz="1300">
                 <a:solidFill>
-                  <a:srgbClr val="CBD5E1"/>
+                  <a:srgbClr val="334155"/>
                 </a:solidFill>
                 <a:latin typeface="Segoe UI"/>
               </a:defRPr>
@@ -7404,7 +7404,7 @@
               </a:spcAft>
               <a:defRPr sz="1300">
                 <a:solidFill>
-                  <a:srgbClr val="CBD5E1"/>
+                  <a:srgbClr val="334155"/>
                 </a:solidFill>
                 <a:latin typeface="Segoe UI"/>
               </a:defRPr>
@@ -7420,7 +7420,7 @@
               </a:spcAft>
               <a:defRPr sz="1300">
                 <a:solidFill>
-                  <a:srgbClr val="CBD5E1"/>
+                  <a:srgbClr val="334155"/>
                 </a:solidFill>
                 <a:latin typeface="Segoe UI"/>
               </a:defRPr>
@@ -7436,7 +7436,7 @@
               </a:spcAft>
               <a:defRPr sz="1300">
                 <a:solidFill>
-                  <a:srgbClr val="CBD5E1"/>
+                  <a:srgbClr val="334155"/>
                 </a:solidFill>
                 <a:latin typeface="Segoe UI"/>
               </a:defRPr>
@@ -7452,7 +7452,7 @@
               </a:spcAft>
               <a:defRPr sz="1300">
                 <a:solidFill>
-                  <a:srgbClr val="CBD5E1"/>
+                  <a:srgbClr val="334155"/>
                 </a:solidFill>
                 <a:latin typeface="Segoe UI"/>
               </a:defRPr>
@@ -7478,11 +7478,11 @@
             <a:avLst/>
           </a:prstGeom>
           <a:solidFill>
-            <a:srgbClr val="131B2E"/>
+            <a:srgbClr val="F8FAFC"/>
           </a:solidFill>
-          <a:ln w="12700">
+          <a:ln w="15240">
             <a:solidFill>
-              <a:srgbClr val="283554"/>
+              <a:srgbClr val="E2E8F0"/>
             </a:solidFill>
           </a:ln>
         </p:spPr>
@@ -7533,7 +7533,7 @@
             <a:pPr>
               <a:defRPr sz="1500" b="1">
                 <a:solidFill>
-                  <a:srgbClr val="06B6D4"/>
+                  <a:srgbClr val="0369A1"/>
                 </a:solidFill>
                 <a:latin typeface="Segoe UI"/>
               </a:defRPr>
@@ -7572,7 +7572,7 @@
               </a:spcAft>
               <a:defRPr sz="1300">
                 <a:solidFill>
-                  <a:srgbClr val="CBD5E1"/>
+                  <a:srgbClr val="334155"/>
                 </a:solidFill>
                 <a:latin typeface="Segoe UI"/>
               </a:defRPr>
@@ -7588,7 +7588,7 @@
               </a:spcAft>
               <a:defRPr sz="1300">
                 <a:solidFill>
-                  <a:srgbClr val="CBD5E1"/>
+                  <a:srgbClr val="334155"/>
                 </a:solidFill>
                 <a:latin typeface="Segoe UI"/>
               </a:defRPr>
@@ -7604,7 +7604,7 @@
               </a:spcAft>
               <a:defRPr sz="1300">
                 <a:solidFill>
-                  <a:srgbClr val="CBD5E1"/>
+                  <a:srgbClr val="334155"/>
                 </a:solidFill>
                 <a:latin typeface="Segoe UI"/>
               </a:defRPr>
@@ -7620,7 +7620,7 @@
               </a:spcAft>
               <a:defRPr sz="1300">
                 <a:solidFill>
-                  <a:srgbClr val="CBD5E1"/>
+                  <a:srgbClr val="334155"/>
                 </a:solidFill>
                 <a:latin typeface="Segoe UI"/>
               </a:defRPr>
@@ -7636,7 +7636,7 @@
               </a:spcAft>
               <a:defRPr sz="1300">
                 <a:solidFill>
-                  <a:srgbClr val="CBD5E1"/>
+                  <a:srgbClr val="334155"/>
                 </a:solidFill>
                 <a:latin typeface="Segoe UI"/>
               </a:defRPr>
@@ -7680,7 +7680,7 @@
             <a:avLst/>
           </a:prstGeom>
           <a:solidFill>
-            <a:srgbClr val="0B0F19"/>
+            <a:srgbClr val="FFFFFF"/>
           </a:solidFill>
           <a:ln>
             <a:noFill/>
@@ -7723,7 +7723,7 @@
             <a:avLst/>
           </a:prstGeom>
           <a:solidFill>
-            <a:srgbClr val="6366F1"/>
+            <a:srgbClr val="4338CA"/>
           </a:solidFill>
           <a:ln>
             <a:noFill/>
@@ -7766,11 +7766,11 @@
             <a:avLst/>
           </a:prstGeom>
           <a:solidFill>
-            <a:srgbClr val="131B2E"/>
+            <a:srgbClr val="F8FAFC"/>
           </a:solidFill>
           <a:ln w="19050">
             <a:solidFill>
-              <a:srgbClr val="283554"/>
+              <a:srgbClr val="E2E8F0"/>
             </a:solidFill>
           </a:ln>
         </p:spPr>
@@ -7824,7 +7824,7 @@
               </a:spcAft>
               <a:defRPr sz="1300" b="1">
                 <a:solidFill>
-                  <a:srgbClr val="06B6D4"/>
+                  <a:srgbClr val="4338CA"/>
                 </a:solidFill>
                 <a:latin typeface="Segoe UI"/>
               </a:defRPr>
@@ -7840,7 +7840,7 @@
               </a:spcAft>
               <a:defRPr sz="2600" b="1">
                 <a:solidFill>
-                  <a:srgbClr val="FFFFFF"/>
+                  <a:srgbClr val="0F172A"/>
                 </a:solidFill>
                 <a:latin typeface="Segoe UI"/>
               </a:defRPr>
@@ -7856,7 +7856,7 @@
               </a:spcAft>
               <a:defRPr sz="1400">
                 <a:solidFill>
-                  <a:srgbClr val="10B981"/>
+                  <a:srgbClr val="4338CA"/>
                 </a:solidFill>
                 <a:latin typeface="Segoe UI"/>
               </a:defRPr>
@@ -7873,7 +7873,7 @@
             <a:pPr algn="ctr">
               <a:defRPr sz="1400" b="1">
                 <a:solidFill>
-                  <a:srgbClr val="CBD5E1"/>
+                  <a:srgbClr val="334155"/>
                 </a:solidFill>
                 <a:latin typeface="Segoe UI"/>
               </a:defRPr>
@@ -7917,7 +7917,7 @@
             <a:avLst/>
           </a:prstGeom>
           <a:solidFill>
-            <a:srgbClr val="0B0F19"/>
+            <a:srgbClr val="FFFFFF"/>
           </a:solidFill>
           <a:ln>
             <a:noFill/>
@@ -7960,7 +7960,7 @@
             <a:avLst/>
           </a:prstGeom>
           <a:solidFill>
-            <a:srgbClr val="6366F1"/>
+            <a:srgbClr val="4338CA"/>
           </a:solidFill>
           <a:ln>
             <a:noFill/>
@@ -8016,7 +8016,7 @@
               </a:spcAft>
               <a:defRPr sz="1100" b="1">
                 <a:solidFill>
-                  <a:srgbClr val="06B6D4"/>
+                  <a:srgbClr val="4338CA"/>
                 </a:solidFill>
                 <a:latin typeface="Segoe UI"/>
               </a:defRPr>
@@ -8032,7 +8032,7 @@
               </a:spcAft>
               <a:defRPr sz="2200" b="1">
                 <a:solidFill>
-                  <a:srgbClr val="FFFFFF"/>
+                  <a:srgbClr val="0F172A"/>
                 </a:solidFill>
                 <a:latin typeface="Segoe UI"/>
               </a:defRPr>
@@ -8045,7 +8045,7 @@
             <a:pPr>
               <a:defRPr sz="1300">
                 <a:solidFill>
-                  <a:srgbClr val="94A3B8"/>
+                  <a:srgbClr val="64748B"/>
                 </a:solidFill>
                 <a:latin typeface="Segoe UI"/>
               </a:defRPr>
@@ -8071,11 +8071,11 @@
             <a:avLst/>
           </a:prstGeom>
           <a:solidFill>
-            <a:srgbClr val="131B2E"/>
+            <a:srgbClr val="F8FAFC"/>
           </a:solidFill>
-          <a:ln w="12700">
+          <a:ln w="15240">
             <a:solidFill>
-              <a:srgbClr val="283554"/>
+              <a:srgbClr val="E2E8F0"/>
             </a:solidFill>
           </a:ln>
         </p:spPr>
@@ -8126,7 +8126,7 @@
             <a:pPr>
               <a:defRPr sz="1500" b="1">
                 <a:solidFill>
-                  <a:srgbClr val="F59E0B"/>
+                  <a:srgbClr val="B45309"/>
                 </a:solidFill>
                 <a:latin typeface="Segoe UI"/>
               </a:defRPr>
@@ -8165,7 +8165,7 @@
               </a:spcAft>
               <a:defRPr sz="1300">
                 <a:solidFill>
-                  <a:srgbClr val="CBD5E1"/>
+                  <a:srgbClr val="334155"/>
                 </a:solidFill>
                 <a:latin typeface="Segoe UI"/>
               </a:defRPr>
@@ -8181,7 +8181,7 @@
               </a:spcAft>
               <a:defRPr sz="1300">
                 <a:solidFill>
-                  <a:srgbClr val="CBD5E1"/>
+                  <a:srgbClr val="334155"/>
                 </a:solidFill>
                 <a:latin typeface="Segoe UI"/>
               </a:defRPr>
@@ -8197,7 +8197,7 @@
               </a:spcAft>
               <a:defRPr sz="1300">
                 <a:solidFill>
-                  <a:srgbClr val="CBD5E1"/>
+                  <a:srgbClr val="334155"/>
                 </a:solidFill>
                 <a:latin typeface="Segoe UI"/>
               </a:defRPr>
@@ -8213,7 +8213,7 @@
               </a:spcAft>
               <a:defRPr sz="1300">
                 <a:solidFill>
-                  <a:srgbClr val="CBD5E1"/>
+                  <a:srgbClr val="334155"/>
                 </a:solidFill>
                 <a:latin typeface="Segoe UI"/>
               </a:defRPr>
@@ -8229,7 +8229,7 @@
               </a:spcAft>
               <a:defRPr sz="1300">
                 <a:solidFill>
-                  <a:srgbClr val="CBD5E1"/>
+                  <a:srgbClr val="334155"/>
                 </a:solidFill>
                 <a:latin typeface="Segoe UI"/>
               </a:defRPr>
@@ -8255,11 +8255,11 @@
             <a:avLst/>
           </a:prstGeom>
           <a:solidFill>
-            <a:srgbClr val="131B2E"/>
+            <a:srgbClr val="F8FAFC"/>
           </a:solidFill>
-          <a:ln w="12700">
+          <a:ln w="15240">
             <a:solidFill>
-              <a:srgbClr val="283554"/>
+              <a:srgbClr val="E2E8F0"/>
             </a:solidFill>
           </a:ln>
         </p:spPr>
@@ -8310,7 +8310,7 @@
             <a:pPr>
               <a:defRPr sz="1500" b="1">
                 <a:solidFill>
-                  <a:srgbClr val="10B981"/>
+                  <a:srgbClr val="047857"/>
                 </a:solidFill>
                 <a:latin typeface="Segoe UI"/>
               </a:defRPr>
@@ -8349,7 +8349,7 @@
               </a:spcAft>
               <a:defRPr sz="1300">
                 <a:solidFill>
-                  <a:srgbClr val="CBD5E1"/>
+                  <a:srgbClr val="334155"/>
                 </a:solidFill>
                 <a:latin typeface="Segoe UI"/>
               </a:defRPr>
@@ -8365,7 +8365,7 @@
               </a:spcAft>
               <a:defRPr sz="1300">
                 <a:solidFill>
-                  <a:srgbClr val="CBD5E1"/>
+                  <a:srgbClr val="334155"/>
                 </a:solidFill>
                 <a:latin typeface="Segoe UI"/>
               </a:defRPr>
@@ -8381,7 +8381,7 @@
               </a:spcAft>
               <a:defRPr sz="1300">
                 <a:solidFill>
-                  <a:srgbClr val="CBD5E1"/>
+                  <a:srgbClr val="334155"/>
                 </a:solidFill>
                 <a:latin typeface="Segoe UI"/>
               </a:defRPr>
@@ -8397,7 +8397,7 @@
               </a:spcAft>
               <a:defRPr sz="1300">
                 <a:solidFill>
-                  <a:srgbClr val="CBD5E1"/>
+                  <a:srgbClr val="334155"/>
                 </a:solidFill>
                 <a:latin typeface="Segoe UI"/>
               </a:defRPr>
@@ -8413,7 +8413,7 @@
               </a:spcAft>
               <a:defRPr sz="1300">
                 <a:solidFill>
-                  <a:srgbClr val="CBD5E1"/>
+                  <a:srgbClr val="334155"/>
                 </a:solidFill>
                 <a:latin typeface="Segoe UI"/>
               </a:defRPr>
@@ -8457,7 +8457,7 @@
             <a:avLst/>
           </a:prstGeom>
           <a:solidFill>
-            <a:srgbClr val="0B0F19"/>
+            <a:srgbClr val="FFFFFF"/>
           </a:solidFill>
           <a:ln>
             <a:noFill/>
@@ -8500,7 +8500,7 @@
             <a:avLst/>
           </a:prstGeom>
           <a:solidFill>
-            <a:srgbClr val="6366F1"/>
+            <a:srgbClr val="4338CA"/>
           </a:solidFill>
           <a:ln>
             <a:noFill/>
@@ -8556,7 +8556,7 @@
               </a:spcAft>
               <a:defRPr sz="1100" b="1">
                 <a:solidFill>
-                  <a:srgbClr val="06B6D4"/>
+                  <a:srgbClr val="4338CA"/>
                 </a:solidFill>
                 <a:latin typeface="Segoe UI"/>
               </a:defRPr>
@@ -8572,20 +8572,20 @@
               </a:spcAft>
               <a:defRPr sz="2200" b="1">
                 <a:solidFill>
-                  <a:srgbClr val="FFFFFF"/>
-                </a:solidFill>
-                <a:latin typeface="Segoe UI"/>
-              </a:defRPr>
-            </a:pPr>
-            <a:r>
-              <a:t>Thành Viên &amp; Phân Công Công Việc</a:t>
-            </a:r>
-          </a:p>
-          <a:p>
-            <a:pPr>
-              <a:defRPr sz="1300">
-                <a:solidFill>
-                  <a:srgbClr val="94A3B8"/>
+                  <a:srgbClr val="0F172A"/>
+                </a:solidFill>
+                <a:latin typeface="Segoe UI"/>
+              </a:defRPr>
+            </a:pPr>
+            <a:r>
+              <a:t>Thành Viên &amp; PhÂN CÔNG CÔNG VIỆC</a:t>
+            </a:r>
+          </a:p>
+          <a:p>
+            <a:pPr>
+              <a:defRPr sz="1300">
+                <a:solidFill>
+                  <a:srgbClr val="64748B"/>
                 </a:solidFill>
                 <a:latin typeface="Segoe UI"/>
               </a:defRPr>
@@ -8611,11 +8611,11 @@
             <a:avLst/>
           </a:prstGeom>
           <a:solidFill>
-            <a:srgbClr val="131B2E"/>
+            <a:srgbClr val="F8FAFC"/>
           </a:solidFill>
-          <a:ln w="12700">
+          <a:ln w="15240">
             <a:solidFill>
-              <a:srgbClr val="283554"/>
+              <a:srgbClr val="E2E8F0"/>
             </a:solidFill>
           </a:ln>
         </p:spPr>
@@ -8666,7 +8666,7 @@
             <a:pPr>
               <a:defRPr sz="1500" b="1">
                 <a:solidFill>
-                  <a:srgbClr val="6366F1"/>
+                  <a:srgbClr val="4338CA"/>
                 </a:solidFill>
                 <a:latin typeface="Segoe UI"/>
               </a:defRPr>
@@ -8705,7 +8705,7 @@
               </a:spcAft>
               <a:defRPr sz="1300">
                 <a:solidFill>
-                  <a:srgbClr val="CBD5E1"/>
+                  <a:srgbClr val="334155"/>
                 </a:solidFill>
                 <a:latin typeface="Segoe UI"/>
               </a:defRPr>
@@ -8721,7 +8721,7 @@
               </a:spcAft>
               <a:defRPr sz="1300">
                 <a:solidFill>
-                  <a:srgbClr val="CBD5E1"/>
+                  <a:srgbClr val="334155"/>
                 </a:solidFill>
                 <a:latin typeface="Segoe UI"/>
               </a:defRPr>
@@ -8737,7 +8737,7 @@
               </a:spcAft>
               <a:defRPr sz="1300">
                 <a:solidFill>
-                  <a:srgbClr val="CBD5E1"/>
+                  <a:srgbClr val="334155"/>
                 </a:solidFill>
                 <a:latin typeface="Segoe UI"/>
               </a:defRPr>
@@ -8753,7 +8753,7 @@
               </a:spcAft>
               <a:defRPr sz="1300">
                 <a:solidFill>
-                  <a:srgbClr val="CBD5E1"/>
+                  <a:srgbClr val="334155"/>
                 </a:solidFill>
                 <a:latin typeface="Segoe UI"/>
               </a:defRPr>
@@ -8769,7 +8769,7 @@
               </a:spcAft>
               <a:defRPr sz="1300">
                 <a:solidFill>
-                  <a:srgbClr val="CBD5E1"/>
+                  <a:srgbClr val="334155"/>
                 </a:solidFill>
                 <a:latin typeface="Segoe UI"/>
               </a:defRPr>
@@ -8795,11 +8795,11 @@
             <a:avLst/>
           </a:prstGeom>
           <a:solidFill>
-            <a:srgbClr val="131B2E"/>
+            <a:srgbClr val="F8FAFC"/>
           </a:solidFill>
-          <a:ln w="12700">
+          <a:ln w="15240">
             <a:solidFill>
-              <a:srgbClr val="283554"/>
+              <a:srgbClr val="E2E8F0"/>
             </a:solidFill>
           </a:ln>
         </p:spPr>
@@ -8850,7 +8850,7 @@
             <a:pPr>
               <a:defRPr sz="1500" b="1">
                 <a:solidFill>
-                  <a:srgbClr val="06B6D4"/>
+                  <a:srgbClr val="0369A1"/>
                 </a:solidFill>
                 <a:latin typeface="Segoe UI"/>
               </a:defRPr>
@@ -8889,7 +8889,7 @@
               </a:spcAft>
               <a:defRPr sz="1300">
                 <a:solidFill>
-                  <a:srgbClr val="CBD5E1"/>
+                  <a:srgbClr val="334155"/>
                 </a:solidFill>
                 <a:latin typeface="Segoe UI"/>
               </a:defRPr>
@@ -8905,23 +8905,23 @@
               </a:spcAft>
               <a:defRPr sz="1300">
                 <a:solidFill>
-                  <a:srgbClr val="CBD5E1"/>
-                </a:solidFill>
-                <a:latin typeface="Segoe UI"/>
-              </a:defRPr>
-            </a:pPr>
-            <a:r>
-              <a:t>• Dark Mode hiện đại với TailwindCSS.</a:t>
-            </a:r>
-          </a:p>
-          <a:p>
-            <a:pPr>
-              <a:spcAft>
-                <a:spcPts val="700"/>
-              </a:spcAft>
-              <a:defRPr sz="1300">
-                <a:solidFill>
-                  <a:srgbClr val="CBD5E1"/>
+                  <a:srgbClr val="334155"/>
+                </a:solidFill>
+                <a:latin typeface="Segoe UI"/>
+              </a:defRPr>
+            </a:pPr>
+            <a:r>
+              <a:t>• Thiết kế giao diện hiện đại &amp; responsive.</a:t>
+            </a:r>
+          </a:p>
+          <a:p>
+            <a:pPr>
+              <a:spcAft>
+                <a:spcPts val="700"/>
+              </a:spcAft>
+              <a:defRPr sz="1300">
+                <a:solidFill>
+                  <a:srgbClr val="334155"/>
                 </a:solidFill>
                 <a:latin typeface="Segoe UI"/>
               </a:defRPr>
@@ -8937,7 +8937,7 @@
               </a:spcAft>
               <a:defRPr sz="1300">
                 <a:solidFill>
-                  <a:srgbClr val="CBD5E1"/>
+                  <a:srgbClr val="334155"/>
                 </a:solidFill>
                 <a:latin typeface="Segoe UI"/>
               </a:defRPr>
@@ -8953,7 +8953,7 @@
               </a:spcAft>
               <a:defRPr sz="1300">
                 <a:solidFill>
-                  <a:srgbClr val="CBD5E1"/>
+                  <a:srgbClr val="334155"/>
                 </a:solidFill>
                 <a:latin typeface="Segoe UI"/>
               </a:defRPr>
@@ -8979,11 +8979,11 @@
             <a:avLst/>
           </a:prstGeom>
           <a:solidFill>
-            <a:srgbClr val="131B2E"/>
+            <a:srgbClr val="F8FAFC"/>
           </a:solidFill>
-          <a:ln w="12700">
+          <a:ln w="15240">
             <a:solidFill>
-              <a:srgbClr val="283554"/>
+              <a:srgbClr val="E2E8F0"/>
             </a:solidFill>
           </a:ln>
         </p:spPr>
@@ -9034,7 +9034,7 @@
             <a:pPr>
               <a:defRPr sz="1500" b="1">
                 <a:solidFill>
-                  <a:srgbClr val="10B981"/>
+                  <a:srgbClr val="047857"/>
                 </a:solidFill>
                 <a:latin typeface="Segoe UI"/>
               </a:defRPr>
@@ -9073,7 +9073,7 @@
               </a:spcAft>
               <a:defRPr sz="1300">
                 <a:solidFill>
-                  <a:srgbClr val="CBD5E1"/>
+                  <a:srgbClr val="334155"/>
                 </a:solidFill>
                 <a:latin typeface="Segoe UI"/>
               </a:defRPr>
@@ -9089,7 +9089,7 @@
               </a:spcAft>
               <a:defRPr sz="1300">
                 <a:solidFill>
-                  <a:srgbClr val="CBD5E1"/>
+                  <a:srgbClr val="334155"/>
                 </a:solidFill>
                 <a:latin typeface="Segoe UI"/>
               </a:defRPr>
@@ -9105,7 +9105,7 @@
               </a:spcAft>
               <a:defRPr sz="1300">
                 <a:solidFill>
-                  <a:srgbClr val="CBD5E1"/>
+                  <a:srgbClr val="334155"/>
                 </a:solidFill>
                 <a:latin typeface="Segoe UI"/>
               </a:defRPr>
@@ -9121,7 +9121,7 @@
               </a:spcAft>
               <a:defRPr sz="1300">
                 <a:solidFill>
-                  <a:srgbClr val="CBD5E1"/>
+                  <a:srgbClr val="334155"/>
                 </a:solidFill>
                 <a:latin typeface="Segoe UI"/>
               </a:defRPr>
@@ -9137,7 +9137,7 @@
               </a:spcAft>
               <a:defRPr sz="1300">
                 <a:solidFill>
-                  <a:srgbClr val="CBD5E1"/>
+                  <a:srgbClr val="334155"/>
                 </a:solidFill>
                 <a:latin typeface="Segoe UI"/>
               </a:defRPr>
@@ -9181,7 +9181,7 @@
             <a:avLst/>
           </a:prstGeom>
           <a:solidFill>
-            <a:srgbClr val="0B0F19"/>
+            <a:srgbClr val="FFFFFF"/>
           </a:solidFill>
           <a:ln>
             <a:noFill/>
@@ -9224,7 +9224,7 @@
             <a:avLst/>
           </a:prstGeom>
           <a:solidFill>
-            <a:srgbClr val="6366F1"/>
+            <a:srgbClr val="4338CA"/>
           </a:solidFill>
           <a:ln>
             <a:noFill/>
@@ -9280,7 +9280,7 @@
               </a:spcAft>
               <a:defRPr sz="1100" b="1">
                 <a:solidFill>
-                  <a:srgbClr val="06B6D4"/>
+                  <a:srgbClr val="4338CA"/>
                 </a:solidFill>
                 <a:latin typeface="Segoe UI"/>
               </a:defRPr>
@@ -9296,7 +9296,7 @@
               </a:spcAft>
               <a:defRPr sz="2200" b="1">
                 <a:solidFill>
-                  <a:srgbClr val="FFFFFF"/>
+                  <a:srgbClr val="0F172A"/>
                 </a:solidFill>
                 <a:latin typeface="Segoe UI"/>
               </a:defRPr>
@@ -9309,7 +9309,7 @@
             <a:pPr>
               <a:defRPr sz="1300">
                 <a:solidFill>
-                  <a:srgbClr val="94A3B8"/>
+                  <a:srgbClr val="64748B"/>
                 </a:solidFill>
                 <a:latin typeface="Segoe UI"/>
               </a:defRPr>
@@ -9335,11 +9335,11 @@
             <a:avLst/>
           </a:prstGeom>
           <a:solidFill>
-            <a:srgbClr val="131B2E"/>
+            <a:srgbClr val="F8FAFC"/>
           </a:solidFill>
-          <a:ln w="12700">
+          <a:ln w="15240">
             <a:solidFill>
-              <a:srgbClr val="283554"/>
+              <a:srgbClr val="E2E8F0"/>
             </a:solidFill>
           </a:ln>
         </p:spPr>
@@ -9390,7 +9390,7 @@
             <a:pPr>
               <a:defRPr sz="1500" b="1">
                 <a:solidFill>
-                  <a:srgbClr val="6366F1"/>
+                  <a:srgbClr val="4338CA"/>
                 </a:solidFill>
                 <a:latin typeface="Segoe UI"/>
               </a:defRPr>
@@ -9429,7 +9429,7 @@
               </a:spcAft>
               <a:defRPr sz="1300">
                 <a:solidFill>
-                  <a:srgbClr val="CBD5E1"/>
+                  <a:srgbClr val="334155"/>
                 </a:solidFill>
                 <a:latin typeface="Segoe UI"/>
               </a:defRPr>
@@ -9445,7 +9445,7 @@
               </a:spcAft>
               <a:defRPr sz="1300">
                 <a:solidFill>
-                  <a:srgbClr val="CBD5E1"/>
+                  <a:srgbClr val="334155"/>
                 </a:solidFill>
                 <a:latin typeface="Segoe UI"/>
               </a:defRPr>
@@ -9461,7 +9461,7 @@
               </a:spcAft>
               <a:defRPr sz="1300">
                 <a:solidFill>
-                  <a:srgbClr val="CBD5E1"/>
+                  <a:srgbClr val="334155"/>
                 </a:solidFill>
                 <a:latin typeface="Segoe UI"/>
               </a:defRPr>
@@ -9477,7 +9477,7 @@
               </a:spcAft>
               <a:defRPr sz="1300">
                 <a:solidFill>
-                  <a:srgbClr val="CBD5E1"/>
+                  <a:srgbClr val="334155"/>
                 </a:solidFill>
                 <a:latin typeface="Segoe UI"/>
               </a:defRPr>
@@ -9503,11 +9503,11 @@
             <a:avLst/>
           </a:prstGeom>
           <a:solidFill>
-            <a:srgbClr val="131B2E"/>
+            <a:srgbClr val="F8FAFC"/>
           </a:solidFill>
-          <a:ln w="12700">
+          <a:ln w="15240">
             <a:solidFill>
-              <a:srgbClr val="283554"/>
+              <a:srgbClr val="E2E8F0"/>
             </a:solidFill>
           </a:ln>
         </p:spPr>
@@ -9558,7 +9558,7 @@
             <a:pPr>
               <a:defRPr sz="1500" b="1">
                 <a:solidFill>
-                  <a:srgbClr val="06B6D4"/>
+                  <a:srgbClr val="0369A1"/>
                 </a:solidFill>
                 <a:latin typeface="Segoe UI"/>
               </a:defRPr>
@@ -9597,7 +9597,7 @@
               </a:spcAft>
               <a:defRPr sz="1300">
                 <a:solidFill>
-                  <a:srgbClr val="CBD5E1"/>
+                  <a:srgbClr val="334155"/>
                 </a:solidFill>
                 <a:latin typeface="Segoe UI"/>
               </a:defRPr>
@@ -9613,7 +9613,7 @@
               </a:spcAft>
               <a:defRPr sz="1300">
                 <a:solidFill>
-                  <a:srgbClr val="CBD5E1"/>
+                  <a:srgbClr val="334155"/>
                 </a:solidFill>
                 <a:latin typeface="Segoe UI"/>
               </a:defRPr>
@@ -9629,7 +9629,7 @@
               </a:spcAft>
               <a:defRPr sz="1300">
                 <a:solidFill>
-                  <a:srgbClr val="CBD5E1"/>
+                  <a:srgbClr val="334155"/>
                 </a:solidFill>
                 <a:latin typeface="Segoe UI"/>
               </a:defRPr>
@@ -9645,7 +9645,7 @@
               </a:spcAft>
               <a:defRPr sz="1300">
                 <a:solidFill>
-                  <a:srgbClr val="CBD5E1"/>
+                  <a:srgbClr val="334155"/>
                 </a:solidFill>
                 <a:latin typeface="Segoe UI"/>
               </a:defRPr>
@@ -9671,11 +9671,11 @@
             <a:avLst/>
           </a:prstGeom>
           <a:solidFill>
-            <a:srgbClr val="131B2E"/>
+            <a:srgbClr val="F8FAFC"/>
           </a:solidFill>
-          <a:ln w="12700">
+          <a:ln w="15240">
             <a:solidFill>
-              <a:srgbClr val="283554"/>
+              <a:srgbClr val="E2E8F0"/>
             </a:solidFill>
           </a:ln>
         </p:spPr>
@@ -9726,7 +9726,7 @@
             <a:pPr>
               <a:defRPr sz="1500" b="1">
                 <a:solidFill>
-                  <a:srgbClr val="F59E0B"/>
+                  <a:srgbClr val="B45309"/>
                 </a:solidFill>
                 <a:latin typeface="Segoe UI"/>
               </a:defRPr>
@@ -9765,7 +9765,7 @@
               </a:spcAft>
               <a:defRPr sz="1300">
                 <a:solidFill>
-                  <a:srgbClr val="CBD5E1"/>
+                  <a:srgbClr val="334155"/>
                 </a:solidFill>
                 <a:latin typeface="Segoe UI"/>
               </a:defRPr>
@@ -9781,7 +9781,7 @@
               </a:spcAft>
               <a:defRPr sz="1300">
                 <a:solidFill>
-                  <a:srgbClr val="CBD5E1"/>
+                  <a:srgbClr val="334155"/>
                 </a:solidFill>
                 <a:latin typeface="Segoe UI"/>
               </a:defRPr>
@@ -9797,7 +9797,7 @@
               </a:spcAft>
               <a:defRPr sz="1300">
                 <a:solidFill>
-                  <a:srgbClr val="CBD5E1"/>
+                  <a:srgbClr val="334155"/>
                 </a:solidFill>
                 <a:latin typeface="Segoe UI"/>
               </a:defRPr>
@@ -9813,7 +9813,7 @@
               </a:spcAft>
               <a:defRPr sz="1300">
                 <a:solidFill>
-                  <a:srgbClr val="CBD5E1"/>
+                  <a:srgbClr val="334155"/>
                 </a:solidFill>
                 <a:latin typeface="Segoe UI"/>
               </a:defRPr>
@@ -9839,11 +9839,11 @@
             <a:avLst/>
           </a:prstGeom>
           <a:solidFill>
-            <a:srgbClr val="131B2E"/>
+            <a:srgbClr val="F8FAFC"/>
           </a:solidFill>
-          <a:ln w="12700">
+          <a:ln w="15240">
             <a:solidFill>
-              <a:srgbClr val="283554"/>
+              <a:srgbClr val="E2E8F0"/>
             </a:solidFill>
           </a:ln>
         </p:spPr>
@@ -9894,7 +9894,7 @@
             <a:pPr>
               <a:defRPr sz="1500" b="1">
                 <a:solidFill>
-                  <a:srgbClr val="10B981"/>
+                  <a:srgbClr val="047857"/>
                 </a:solidFill>
                 <a:latin typeface="Segoe UI"/>
               </a:defRPr>
@@ -9933,7 +9933,7 @@
               </a:spcAft>
               <a:defRPr sz="1300">
                 <a:solidFill>
-                  <a:srgbClr val="CBD5E1"/>
+                  <a:srgbClr val="334155"/>
                 </a:solidFill>
                 <a:latin typeface="Segoe UI"/>
               </a:defRPr>
@@ -9949,7 +9949,7 @@
               </a:spcAft>
               <a:defRPr sz="1300">
                 <a:solidFill>
-                  <a:srgbClr val="CBD5E1"/>
+                  <a:srgbClr val="334155"/>
                 </a:solidFill>
                 <a:latin typeface="Segoe UI"/>
               </a:defRPr>
@@ -9965,7 +9965,7 @@
               </a:spcAft>
               <a:defRPr sz="1300">
                 <a:solidFill>
-                  <a:srgbClr val="CBD5E1"/>
+                  <a:srgbClr val="334155"/>
                 </a:solidFill>
                 <a:latin typeface="Segoe UI"/>
               </a:defRPr>
@@ -9981,7 +9981,7 @@
               </a:spcAft>
               <a:defRPr sz="1300">
                 <a:solidFill>
-                  <a:srgbClr val="CBD5E1"/>
+                  <a:srgbClr val="334155"/>
                 </a:solidFill>
                 <a:latin typeface="Segoe UI"/>
               </a:defRPr>
@@ -10025,7 +10025,7 @@
             <a:avLst/>
           </a:prstGeom>
           <a:solidFill>
-            <a:srgbClr val="0B0F19"/>
+            <a:srgbClr val="FFFFFF"/>
           </a:solidFill>
           <a:ln>
             <a:noFill/>
@@ -10068,7 +10068,7 @@
             <a:avLst/>
           </a:prstGeom>
           <a:solidFill>
-            <a:srgbClr val="6366F1"/>
+            <a:srgbClr val="4338CA"/>
           </a:solidFill>
           <a:ln>
             <a:noFill/>
@@ -10124,7 +10124,7 @@
               </a:spcAft>
               <a:defRPr sz="1100" b="1">
                 <a:solidFill>
-                  <a:srgbClr val="06B6D4"/>
+                  <a:srgbClr val="4338CA"/>
                 </a:solidFill>
                 <a:latin typeface="Segoe UI"/>
               </a:defRPr>
@@ -10140,7 +10140,7 @@
               </a:spcAft>
               <a:defRPr sz="2200" b="1">
                 <a:solidFill>
-                  <a:srgbClr val="FFFFFF"/>
+                  <a:srgbClr val="0F172A"/>
                 </a:solidFill>
                 <a:latin typeface="Segoe UI"/>
               </a:defRPr>
@@ -10153,7 +10153,7 @@
             <a:pPr>
               <a:defRPr sz="1300">
                 <a:solidFill>
-                  <a:srgbClr val="94A3B8"/>
+                  <a:srgbClr val="64748B"/>
                 </a:solidFill>
                 <a:latin typeface="Segoe UI"/>
               </a:defRPr>
@@ -10179,11 +10179,11 @@
             <a:avLst/>
           </a:prstGeom>
           <a:solidFill>
-            <a:srgbClr val="131B2E"/>
+            <a:srgbClr val="F8FAFC"/>
           </a:solidFill>
-          <a:ln w="12700">
+          <a:ln w="15240">
             <a:solidFill>
-              <a:srgbClr val="283554"/>
+              <a:srgbClr val="E2E8F0"/>
             </a:solidFill>
           </a:ln>
         </p:spPr>
@@ -10234,7 +10234,7 @@
             <a:pPr>
               <a:defRPr sz="1500" b="1">
                 <a:solidFill>
-                  <a:srgbClr val="06B6D4"/>
+                  <a:srgbClr val="0369A1"/>
                 </a:solidFill>
                 <a:latin typeface="Segoe UI"/>
               </a:defRPr>
@@ -10273,7 +10273,7 @@
               </a:spcAft>
               <a:defRPr sz="1300">
                 <a:solidFill>
-                  <a:srgbClr val="CBD5E1"/>
+                  <a:srgbClr val="334155"/>
                 </a:solidFill>
                 <a:latin typeface="Segoe UI"/>
               </a:defRPr>
@@ -10289,7 +10289,7 @@
               </a:spcAft>
               <a:defRPr sz="1300">
                 <a:solidFill>
-                  <a:srgbClr val="CBD5E1"/>
+                  <a:srgbClr val="334155"/>
                 </a:solidFill>
                 <a:latin typeface="Segoe UI"/>
               </a:defRPr>
@@ -10305,7 +10305,7 @@
               </a:spcAft>
               <a:defRPr sz="1300">
                 <a:solidFill>
-                  <a:srgbClr val="CBD5E1"/>
+                  <a:srgbClr val="334155"/>
                 </a:solidFill>
                 <a:latin typeface="Segoe UI"/>
               </a:defRPr>
@@ -10321,7 +10321,7 @@
               </a:spcAft>
               <a:defRPr sz="1300">
                 <a:solidFill>
-                  <a:srgbClr val="CBD5E1"/>
+                  <a:srgbClr val="334155"/>
                 </a:solidFill>
                 <a:latin typeface="Segoe UI"/>
               </a:defRPr>
@@ -10337,7 +10337,7 @@
               </a:spcAft>
               <a:defRPr sz="1300">
                 <a:solidFill>
-                  <a:srgbClr val="CBD5E1"/>
+                  <a:srgbClr val="334155"/>
                 </a:solidFill>
                 <a:latin typeface="Segoe UI"/>
               </a:defRPr>
@@ -10363,11 +10363,11 @@
             <a:avLst/>
           </a:prstGeom>
           <a:solidFill>
-            <a:srgbClr val="131B2E"/>
+            <a:srgbClr val="F8FAFC"/>
           </a:solidFill>
-          <a:ln w="12700">
+          <a:ln w="15240">
             <a:solidFill>
-              <a:srgbClr val="283554"/>
+              <a:srgbClr val="E2E8F0"/>
             </a:solidFill>
           </a:ln>
         </p:spPr>
@@ -10418,7 +10418,7 @@
             <a:pPr>
               <a:defRPr sz="1500" b="1">
                 <a:solidFill>
-                  <a:srgbClr val="6366F1"/>
+                  <a:srgbClr val="4338CA"/>
                 </a:solidFill>
                 <a:latin typeface="Segoe UI"/>
               </a:defRPr>
@@ -10457,7 +10457,7 @@
               </a:spcAft>
               <a:defRPr sz="1300">
                 <a:solidFill>
-                  <a:srgbClr val="CBD5E1"/>
+                  <a:srgbClr val="334155"/>
                 </a:solidFill>
                 <a:latin typeface="Segoe UI"/>
               </a:defRPr>
@@ -10473,7 +10473,7 @@
               </a:spcAft>
               <a:defRPr sz="1300">
                 <a:solidFill>
-                  <a:srgbClr val="CBD5E1"/>
+                  <a:srgbClr val="334155"/>
                 </a:solidFill>
                 <a:latin typeface="Segoe UI"/>
               </a:defRPr>
@@ -10489,7 +10489,7 @@
               </a:spcAft>
               <a:defRPr sz="1300">
                 <a:solidFill>
-                  <a:srgbClr val="CBD5E1"/>
+                  <a:srgbClr val="334155"/>
                 </a:solidFill>
                 <a:latin typeface="Segoe UI"/>
               </a:defRPr>
@@ -10505,7 +10505,7 @@
               </a:spcAft>
               <a:defRPr sz="1300">
                 <a:solidFill>
-                  <a:srgbClr val="CBD5E1"/>
+                  <a:srgbClr val="334155"/>
                 </a:solidFill>
                 <a:latin typeface="Segoe UI"/>
               </a:defRPr>
@@ -10521,7 +10521,7 @@
               </a:spcAft>
               <a:defRPr sz="1300">
                 <a:solidFill>
-                  <a:srgbClr val="CBD5E1"/>
+                  <a:srgbClr val="334155"/>
                 </a:solidFill>
                 <a:latin typeface="Segoe UI"/>
               </a:defRPr>
@@ -10565,7 +10565,7 @@
             <a:avLst/>
           </a:prstGeom>
           <a:solidFill>
-            <a:srgbClr val="0B0F19"/>
+            <a:srgbClr val="FFFFFF"/>
           </a:solidFill>
           <a:ln>
             <a:noFill/>
@@ -10608,7 +10608,7 @@
             <a:avLst/>
           </a:prstGeom>
           <a:solidFill>
-            <a:srgbClr val="6366F1"/>
+            <a:srgbClr val="4338CA"/>
           </a:solidFill>
           <a:ln>
             <a:noFill/>
@@ -10664,7 +10664,7 @@
               </a:spcAft>
               <a:defRPr sz="1100" b="1">
                 <a:solidFill>
-                  <a:srgbClr val="06B6D4"/>
+                  <a:srgbClr val="4338CA"/>
                 </a:solidFill>
                 <a:latin typeface="Segoe UI"/>
               </a:defRPr>
@@ -10680,7 +10680,7 @@
               </a:spcAft>
               <a:defRPr sz="2200" b="1">
                 <a:solidFill>
-                  <a:srgbClr val="FFFFFF"/>
+                  <a:srgbClr val="0F172A"/>
                 </a:solidFill>
                 <a:latin typeface="Segoe UI"/>
               </a:defRPr>
@@ -10693,7 +10693,7 @@
             <a:pPr>
               <a:defRPr sz="1300">
                 <a:solidFill>
-                  <a:srgbClr val="94A3B8"/>
+                  <a:srgbClr val="64748B"/>
                 </a:solidFill>
                 <a:latin typeface="Segoe UI"/>
               </a:defRPr>
@@ -10719,11 +10719,11 @@
             <a:avLst/>
           </a:prstGeom>
           <a:solidFill>
-            <a:srgbClr val="131B2E"/>
+            <a:srgbClr val="F8FAFC"/>
           </a:solidFill>
-          <a:ln w="12700">
+          <a:ln w="15240">
             <a:solidFill>
-              <a:srgbClr val="283554"/>
+              <a:srgbClr val="E2E8F0"/>
             </a:solidFill>
           </a:ln>
         </p:spPr>
@@ -10774,7 +10774,7 @@
             <a:pPr>
               <a:defRPr sz="1500" b="1">
                 <a:solidFill>
-                  <a:srgbClr val="06B6D4"/>
+                  <a:srgbClr val="0369A1"/>
                 </a:solidFill>
                 <a:latin typeface="Segoe UI"/>
               </a:defRPr>
@@ -10813,7 +10813,7 @@
               </a:spcAft>
               <a:defRPr sz="1300">
                 <a:solidFill>
-                  <a:srgbClr val="CBD5E1"/>
+                  <a:srgbClr val="334155"/>
                 </a:solidFill>
                 <a:latin typeface="Segoe UI"/>
               </a:defRPr>
@@ -10829,7 +10829,7 @@
               </a:spcAft>
               <a:defRPr sz="1300">
                 <a:solidFill>
-                  <a:srgbClr val="CBD5E1"/>
+                  <a:srgbClr val="334155"/>
                 </a:solidFill>
                 <a:latin typeface="Segoe UI"/>
               </a:defRPr>
@@ -10845,23 +10845,23 @@
               </a:spcAft>
               <a:defRPr sz="1300">
                 <a:solidFill>
-                  <a:srgbClr val="CBD5E1"/>
-                </a:solidFill>
-                <a:latin typeface="Segoe UI"/>
-              </a:defRPr>
-            </a:pPr>
-            <a:r>
-              <a:t>• TailwindCSS: Giao diện Dark Mode.</a:t>
-            </a:r>
-          </a:p>
-          <a:p>
-            <a:pPr>
-              <a:spcAft>
-                <a:spcPts val="700"/>
-              </a:spcAft>
-              <a:defRPr sz="1300">
-                <a:solidFill>
-                  <a:srgbClr val="CBD5E1"/>
+                  <a:srgbClr val="334155"/>
+                </a:solidFill>
+                <a:latin typeface="Segoe UI"/>
+              </a:defRPr>
+            </a:pPr>
+            <a:r>
+              <a:t>• TailwindCSS: UI hiện đại, responsive.</a:t>
+            </a:r>
+          </a:p>
+          <a:p>
+            <a:pPr>
+              <a:spcAft>
+                <a:spcPts val="700"/>
+              </a:spcAft>
+              <a:defRPr sz="1300">
+                <a:solidFill>
+                  <a:srgbClr val="334155"/>
                 </a:solidFill>
                 <a:latin typeface="Segoe UI"/>
               </a:defRPr>
@@ -10877,7 +10877,7 @@
               </a:spcAft>
               <a:defRPr sz="1300">
                 <a:solidFill>
-                  <a:srgbClr val="CBD5E1"/>
+                  <a:srgbClr val="334155"/>
                 </a:solidFill>
                 <a:latin typeface="Segoe UI"/>
               </a:defRPr>
@@ -10903,11 +10903,11 @@
             <a:avLst/>
           </a:prstGeom>
           <a:solidFill>
-            <a:srgbClr val="131B2E"/>
+            <a:srgbClr val="F8FAFC"/>
           </a:solidFill>
-          <a:ln w="12700">
+          <a:ln w="15240">
             <a:solidFill>
-              <a:srgbClr val="283554"/>
+              <a:srgbClr val="E2E8F0"/>
             </a:solidFill>
           </a:ln>
         </p:spPr>
@@ -10958,7 +10958,7 @@
             <a:pPr>
               <a:defRPr sz="1500" b="1">
                 <a:solidFill>
-                  <a:srgbClr val="6366F1"/>
+                  <a:srgbClr val="4338CA"/>
                 </a:solidFill>
                 <a:latin typeface="Segoe UI"/>
               </a:defRPr>
@@ -10997,7 +10997,7 @@
               </a:spcAft>
               <a:defRPr sz="1300">
                 <a:solidFill>
-                  <a:srgbClr val="CBD5E1"/>
+                  <a:srgbClr val="334155"/>
                 </a:solidFill>
                 <a:latin typeface="Segoe UI"/>
               </a:defRPr>
@@ -11013,7 +11013,7 @@
               </a:spcAft>
               <a:defRPr sz="1300">
                 <a:solidFill>
-                  <a:srgbClr val="CBD5E1"/>
+                  <a:srgbClr val="334155"/>
                 </a:solidFill>
                 <a:latin typeface="Segoe UI"/>
               </a:defRPr>
@@ -11029,7 +11029,7 @@
               </a:spcAft>
               <a:defRPr sz="1300">
                 <a:solidFill>
-                  <a:srgbClr val="CBD5E1"/>
+                  <a:srgbClr val="334155"/>
                 </a:solidFill>
                 <a:latin typeface="Segoe UI"/>
               </a:defRPr>
@@ -11045,7 +11045,7 @@
               </a:spcAft>
               <a:defRPr sz="1300">
                 <a:solidFill>
-                  <a:srgbClr val="CBD5E1"/>
+                  <a:srgbClr val="334155"/>
                 </a:solidFill>
                 <a:latin typeface="Segoe UI"/>
               </a:defRPr>
@@ -11061,7 +11061,7 @@
               </a:spcAft>
               <a:defRPr sz="1300">
                 <a:solidFill>
-                  <a:srgbClr val="CBD5E1"/>
+                  <a:srgbClr val="334155"/>
                 </a:solidFill>
                 <a:latin typeface="Segoe UI"/>
               </a:defRPr>
@@ -11087,11 +11087,11 @@
             <a:avLst/>
           </a:prstGeom>
           <a:solidFill>
-            <a:srgbClr val="131B2E"/>
+            <a:srgbClr val="F8FAFC"/>
           </a:solidFill>
-          <a:ln w="12700">
+          <a:ln w="15240">
             <a:solidFill>
-              <a:srgbClr val="283554"/>
+              <a:srgbClr val="E2E8F0"/>
             </a:solidFill>
           </a:ln>
         </p:spPr>
@@ -11142,7 +11142,7 @@
             <a:pPr>
               <a:defRPr sz="1500" b="1">
                 <a:solidFill>
-                  <a:srgbClr val="10B981"/>
+                  <a:srgbClr val="047857"/>
                 </a:solidFill>
                 <a:latin typeface="Segoe UI"/>
               </a:defRPr>
@@ -11181,7 +11181,7 @@
               </a:spcAft>
               <a:defRPr sz="1300">
                 <a:solidFill>
-                  <a:srgbClr val="CBD5E1"/>
+                  <a:srgbClr val="334155"/>
                 </a:solidFill>
                 <a:latin typeface="Segoe UI"/>
               </a:defRPr>
@@ -11197,7 +11197,7 @@
               </a:spcAft>
               <a:defRPr sz="1300">
                 <a:solidFill>
-                  <a:srgbClr val="CBD5E1"/>
+                  <a:srgbClr val="334155"/>
                 </a:solidFill>
                 <a:latin typeface="Segoe UI"/>
               </a:defRPr>
@@ -11213,7 +11213,7 @@
               </a:spcAft>
               <a:defRPr sz="1300">
                 <a:solidFill>
-                  <a:srgbClr val="CBD5E1"/>
+                  <a:srgbClr val="334155"/>
                 </a:solidFill>
                 <a:latin typeface="Segoe UI"/>
               </a:defRPr>
@@ -11229,7 +11229,7 @@
               </a:spcAft>
               <a:defRPr sz="1300">
                 <a:solidFill>
-                  <a:srgbClr val="CBD5E1"/>
+                  <a:srgbClr val="334155"/>
                 </a:solidFill>
                 <a:latin typeface="Segoe UI"/>
               </a:defRPr>
@@ -11245,7 +11245,7 @@
               </a:spcAft>
               <a:defRPr sz="1300">
                 <a:solidFill>
-                  <a:srgbClr val="CBD5E1"/>
+                  <a:srgbClr val="334155"/>
                 </a:solidFill>
                 <a:latin typeface="Segoe UI"/>
               </a:defRPr>
@@ -11289,7 +11289,7 @@
             <a:avLst/>
           </a:prstGeom>
           <a:solidFill>
-            <a:srgbClr val="0B0F19"/>
+            <a:srgbClr val="FFFFFF"/>
           </a:solidFill>
           <a:ln>
             <a:noFill/>
@@ -11332,7 +11332,7 @@
             <a:avLst/>
           </a:prstGeom>
           <a:solidFill>
-            <a:srgbClr val="6366F1"/>
+            <a:srgbClr val="4338CA"/>
           </a:solidFill>
           <a:ln>
             <a:noFill/>
@@ -11388,7 +11388,7 @@
               </a:spcAft>
               <a:defRPr sz="1100" b="1">
                 <a:solidFill>
-                  <a:srgbClr val="06B6D4"/>
+                  <a:srgbClr val="4338CA"/>
                 </a:solidFill>
                 <a:latin typeface="Segoe UI"/>
               </a:defRPr>
@@ -11404,7 +11404,7 @@
               </a:spcAft>
               <a:defRPr sz="2200" b="1">
                 <a:solidFill>
-                  <a:srgbClr val="FFFFFF"/>
+                  <a:srgbClr val="0F172A"/>
                 </a:solidFill>
                 <a:latin typeface="Segoe UI"/>
               </a:defRPr>
@@ -11417,7 +11417,7 @@
             <a:pPr>
               <a:defRPr sz="1300">
                 <a:solidFill>
-                  <a:srgbClr val="94A3B8"/>
+                  <a:srgbClr val="64748B"/>
                 </a:solidFill>
                 <a:latin typeface="Segoe UI"/>
               </a:defRPr>
@@ -11443,11 +11443,11 @@
             <a:avLst/>
           </a:prstGeom>
           <a:solidFill>
-            <a:srgbClr val="131B2E"/>
+            <a:srgbClr val="F8FAFC"/>
           </a:solidFill>
-          <a:ln w="12700">
+          <a:ln w="15240">
             <a:solidFill>
-              <a:srgbClr val="283554"/>
+              <a:srgbClr val="E2E8F0"/>
             </a:solidFill>
           </a:ln>
         </p:spPr>
@@ -11498,7 +11498,7 @@
             <a:pPr>
               <a:defRPr sz="1500" b="1">
                 <a:solidFill>
-                  <a:srgbClr val="06B6D4"/>
+                  <a:srgbClr val="0369A1"/>
                 </a:solidFill>
                 <a:latin typeface="Segoe UI"/>
               </a:defRPr>
@@ -11537,7 +11537,7 @@
               </a:spcAft>
               <a:defRPr sz="1300">
                 <a:solidFill>
-                  <a:srgbClr val="CBD5E1"/>
+                  <a:srgbClr val="334155"/>
                 </a:solidFill>
                 <a:latin typeface="Segoe UI"/>
               </a:defRPr>
@@ -11553,7 +11553,7 @@
               </a:spcAft>
               <a:defRPr sz="1300">
                 <a:solidFill>
-                  <a:srgbClr val="CBD5E1"/>
+                  <a:srgbClr val="334155"/>
                 </a:solidFill>
                 <a:latin typeface="Segoe UI"/>
               </a:defRPr>
@@ -11569,7 +11569,7 @@
               </a:spcAft>
               <a:defRPr sz="1300">
                 <a:solidFill>
-                  <a:srgbClr val="CBD5E1"/>
+                  <a:srgbClr val="334155"/>
                 </a:solidFill>
                 <a:latin typeface="Segoe UI"/>
               </a:defRPr>
@@ -11585,7 +11585,7 @@
               </a:spcAft>
               <a:defRPr sz="1300">
                 <a:solidFill>
-                  <a:srgbClr val="CBD5E1"/>
+                  <a:srgbClr val="334155"/>
                 </a:solidFill>
                 <a:latin typeface="Segoe UI"/>
               </a:defRPr>
@@ -11601,7 +11601,7 @@
               </a:spcAft>
               <a:defRPr sz="1300">
                 <a:solidFill>
-                  <a:srgbClr val="CBD5E1"/>
+                  <a:srgbClr val="334155"/>
                 </a:solidFill>
                 <a:latin typeface="Segoe UI"/>
               </a:defRPr>
@@ -11627,11 +11627,11 @@
             <a:avLst/>
           </a:prstGeom>
           <a:solidFill>
-            <a:srgbClr val="131B2E"/>
+            <a:srgbClr val="F8FAFC"/>
           </a:solidFill>
-          <a:ln w="12700">
+          <a:ln w="15240">
             <a:solidFill>
-              <a:srgbClr val="283554"/>
+              <a:srgbClr val="E2E8F0"/>
             </a:solidFill>
           </a:ln>
         </p:spPr>
@@ -11682,7 +11682,7 @@
             <a:pPr>
               <a:defRPr sz="1500" b="1">
                 <a:solidFill>
-                  <a:srgbClr val="6366F1"/>
+                  <a:srgbClr val="4338CA"/>
                 </a:solidFill>
                 <a:latin typeface="Segoe UI"/>
               </a:defRPr>
@@ -11721,7 +11721,7 @@
               </a:spcAft>
               <a:defRPr sz="1300">
                 <a:solidFill>
-                  <a:srgbClr val="CBD5E1"/>
+                  <a:srgbClr val="334155"/>
                 </a:solidFill>
                 <a:latin typeface="Segoe UI"/>
               </a:defRPr>
@@ -11737,7 +11737,7 @@
               </a:spcAft>
               <a:defRPr sz="1300">
                 <a:solidFill>
-                  <a:srgbClr val="CBD5E1"/>
+                  <a:srgbClr val="334155"/>
                 </a:solidFill>
                 <a:latin typeface="Segoe UI"/>
               </a:defRPr>
@@ -11753,7 +11753,7 @@
               </a:spcAft>
               <a:defRPr sz="1300">
                 <a:solidFill>
-                  <a:srgbClr val="CBD5E1"/>
+                  <a:srgbClr val="334155"/>
                 </a:solidFill>
                 <a:latin typeface="Segoe UI"/>
               </a:defRPr>
@@ -11769,7 +11769,7 @@
               </a:spcAft>
               <a:defRPr sz="1300">
                 <a:solidFill>
-                  <a:srgbClr val="CBD5E1"/>
+                  <a:srgbClr val="334155"/>
                 </a:solidFill>
                 <a:latin typeface="Segoe UI"/>
               </a:defRPr>
@@ -11785,7 +11785,7 @@
               </a:spcAft>
               <a:defRPr sz="1300">
                 <a:solidFill>
-                  <a:srgbClr val="CBD5E1"/>
+                  <a:srgbClr val="334155"/>
                 </a:solidFill>
                 <a:latin typeface="Segoe UI"/>
               </a:defRPr>
@@ -11811,11 +11811,11 @@
             <a:avLst/>
           </a:prstGeom>
           <a:solidFill>
-            <a:srgbClr val="131B2E"/>
+            <a:srgbClr val="F8FAFC"/>
           </a:solidFill>
-          <a:ln w="12700">
+          <a:ln w="15240">
             <a:solidFill>
-              <a:srgbClr val="283554"/>
+              <a:srgbClr val="E2E8F0"/>
             </a:solidFill>
           </a:ln>
         </p:spPr>
@@ -11866,7 +11866,7 @@
             <a:pPr>
               <a:defRPr sz="1500" b="1">
                 <a:solidFill>
-                  <a:srgbClr val="10B981"/>
+                  <a:srgbClr val="047857"/>
                 </a:solidFill>
                 <a:latin typeface="Segoe UI"/>
               </a:defRPr>
@@ -11905,7 +11905,7 @@
               </a:spcAft>
               <a:defRPr sz="1300">
                 <a:solidFill>
-                  <a:srgbClr val="CBD5E1"/>
+                  <a:srgbClr val="334155"/>
                 </a:solidFill>
                 <a:latin typeface="Segoe UI"/>
               </a:defRPr>
@@ -11921,7 +11921,7 @@
               </a:spcAft>
               <a:defRPr sz="1300">
                 <a:solidFill>
-                  <a:srgbClr val="CBD5E1"/>
+                  <a:srgbClr val="334155"/>
                 </a:solidFill>
                 <a:latin typeface="Segoe UI"/>
               </a:defRPr>
@@ -11937,7 +11937,7 @@
               </a:spcAft>
               <a:defRPr sz="1300">
                 <a:solidFill>
-                  <a:srgbClr val="CBD5E1"/>
+                  <a:srgbClr val="334155"/>
                 </a:solidFill>
                 <a:latin typeface="Segoe UI"/>
               </a:defRPr>
@@ -11953,7 +11953,7 @@
               </a:spcAft>
               <a:defRPr sz="1300">
                 <a:solidFill>
-                  <a:srgbClr val="CBD5E1"/>
+                  <a:srgbClr val="334155"/>
                 </a:solidFill>
                 <a:latin typeface="Segoe UI"/>
               </a:defRPr>
@@ -11969,7 +11969,7 @@
               </a:spcAft>
               <a:defRPr sz="1300">
                 <a:solidFill>
-                  <a:srgbClr val="CBD5E1"/>
+                  <a:srgbClr val="334155"/>
                 </a:solidFill>
                 <a:latin typeface="Segoe UI"/>
               </a:defRPr>
@@ -12013,7 +12013,7 @@
             <a:avLst/>
           </a:prstGeom>
           <a:solidFill>
-            <a:srgbClr val="0B0F19"/>
+            <a:srgbClr val="FFFFFF"/>
           </a:solidFill>
           <a:ln>
             <a:noFill/>
@@ -12056,7 +12056,7 @@
             <a:avLst/>
           </a:prstGeom>
           <a:solidFill>
-            <a:srgbClr val="6366F1"/>
+            <a:srgbClr val="4338CA"/>
           </a:solidFill>
           <a:ln>
             <a:noFill/>
@@ -12112,7 +12112,7 @@
               </a:spcAft>
               <a:defRPr sz="1100" b="1">
                 <a:solidFill>
-                  <a:srgbClr val="06B6D4"/>
+                  <a:srgbClr val="4338CA"/>
                 </a:solidFill>
                 <a:latin typeface="Segoe UI"/>
               </a:defRPr>
@@ -12128,7 +12128,7 @@
               </a:spcAft>
               <a:defRPr sz="2200" b="1">
                 <a:solidFill>
-                  <a:srgbClr val="FFFFFF"/>
+                  <a:srgbClr val="0F172A"/>
                 </a:solidFill>
                 <a:latin typeface="Segoe UI"/>
               </a:defRPr>
@@ -12141,7 +12141,7 @@
             <a:pPr>
               <a:defRPr sz="1300">
                 <a:solidFill>
-                  <a:srgbClr val="94A3B8"/>
+                  <a:srgbClr val="64748B"/>
                 </a:solidFill>
                 <a:latin typeface="Segoe UI"/>
               </a:defRPr>
@@ -12167,11 +12167,11 @@
             <a:avLst/>
           </a:prstGeom>
           <a:solidFill>
-            <a:srgbClr val="131B2E"/>
+            <a:srgbClr val="F8FAFC"/>
           </a:solidFill>
-          <a:ln w="12700">
+          <a:ln w="15240">
             <a:solidFill>
-              <a:srgbClr val="283554"/>
+              <a:srgbClr val="E2E8F0"/>
             </a:solidFill>
           </a:ln>
         </p:spPr>
@@ -12222,7 +12222,7 @@
             <a:pPr>
               <a:defRPr sz="1500" b="1">
                 <a:solidFill>
-                  <a:srgbClr val="06B6D4"/>
+                  <a:srgbClr val="0369A1"/>
                 </a:solidFill>
                 <a:latin typeface="Segoe UI"/>
               </a:defRPr>
@@ -12261,7 +12261,7 @@
               </a:spcAft>
               <a:defRPr sz="1300">
                 <a:solidFill>
-                  <a:srgbClr val="CBD5E1"/>
+                  <a:srgbClr val="334155"/>
                 </a:solidFill>
                 <a:latin typeface="Segoe UI"/>
               </a:defRPr>
@@ -12277,7 +12277,7 @@
               </a:spcAft>
               <a:defRPr sz="1300">
                 <a:solidFill>
-                  <a:srgbClr val="CBD5E1"/>
+                  <a:srgbClr val="334155"/>
                 </a:solidFill>
                 <a:latin typeface="Segoe UI"/>
               </a:defRPr>
@@ -12293,7 +12293,7 @@
               </a:spcAft>
               <a:defRPr sz="1300">
                 <a:solidFill>
-                  <a:srgbClr val="CBD5E1"/>
+                  <a:srgbClr val="334155"/>
                 </a:solidFill>
                 <a:latin typeface="Segoe UI"/>
               </a:defRPr>
@@ -12309,7 +12309,7 @@
               </a:spcAft>
               <a:defRPr sz="1300">
                 <a:solidFill>
-                  <a:srgbClr val="CBD5E1"/>
+                  <a:srgbClr val="334155"/>
                 </a:solidFill>
                 <a:latin typeface="Segoe UI"/>
               </a:defRPr>
@@ -12325,7 +12325,7 @@
               </a:spcAft>
               <a:defRPr sz="1300">
                 <a:solidFill>
-                  <a:srgbClr val="CBD5E1"/>
+                  <a:srgbClr val="334155"/>
                 </a:solidFill>
                 <a:latin typeface="Segoe UI"/>
               </a:defRPr>
@@ -12351,11 +12351,11 @@
             <a:avLst/>
           </a:prstGeom>
           <a:solidFill>
-            <a:srgbClr val="131B2E"/>
+            <a:srgbClr val="F8FAFC"/>
           </a:solidFill>
-          <a:ln w="12700">
+          <a:ln w="15240">
             <a:solidFill>
-              <a:srgbClr val="283554"/>
+              <a:srgbClr val="E2E8F0"/>
             </a:solidFill>
           </a:ln>
         </p:spPr>
@@ -12406,7 +12406,7 @@
             <a:pPr>
               <a:defRPr sz="1500" b="1">
                 <a:solidFill>
-                  <a:srgbClr val="10B981"/>
+                  <a:srgbClr val="047857"/>
                 </a:solidFill>
                 <a:latin typeface="Segoe UI"/>
               </a:defRPr>
@@ -12445,7 +12445,7 @@
               </a:spcAft>
               <a:defRPr sz="1300">
                 <a:solidFill>
-                  <a:srgbClr val="CBD5E1"/>
+                  <a:srgbClr val="334155"/>
                 </a:solidFill>
                 <a:latin typeface="Segoe UI"/>
               </a:defRPr>
@@ -12461,7 +12461,7 @@
               </a:spcAft>
               <a:defRPr sz="1300">
                 <a:solidFill>
-                  <a:srgbClr val="CBD5E1"/>
+                  <a:srgbClr val="334155"/>
                 </a:solidFill>
                 <a:latin typeface="Segoe UI"/>
               </a:defRPr>
@@ -12477,7 +12477,7 @@
               </a:spcAft>
               <a:defRPr sz="1300">
                 <a:solidFill>
-                  <a:srgbClr val="CBD5E1"/>
+                  <a:srgbClr val="334155"/>
                 </a:solidFill>
                 <a:latin typeface="Segoe UI"/>
               </a:defRPr>
@@ -12493,7 +12493,7 @@
               </a:spcAft>
               <a:defRPr sz="1300">
                 <a:solidFill>
-                  <a:srgbClr val="CBD5E1"/>
+                  <a:srgbClr val="334155"/>
                 </a:solidFill>
                 <a:latin typeface="Segoe UI"/>
               </a:defRPr>
@@ -12509,7 +12509,7 @@
               </a:spcAft>
               <a:defRPr sz="1300">
                 <a:solidFill>
-                  <a:srgbClr val="CBD5E1"/>
+                  <a:srgbClr val="334155"/>
                 </a:solidFill>
                 <a:latin typeface="Segoe UI"/>
               </a:defRPr>
@@ -12553,7 +12553,7 @@
             <a:avLst/>
           </a:prstGeom>
           <a:solidFill>
-            <a:srgbClr val="0B0F19"/>
+            <a:srgbClr val="FFFFFF"/>
           </a:solidFill>
           <a:ln>
             <a:noFill/>
@@ -12596,7 +12596,7 @@
             <a:avLst/>
           </a:prstGeom>
           <a:solidFill>
-            <a:srgbClr val="6366F1"/>
+            <a:srgbClr val="4338CA"/>
           </a:solidFill>
           <a:ln>
             <a:noFill/>
@@ -12652,7 +12652,7 @@
               </a:spcAft>
               <a:defRPr sz="1100" b="1">
                 <a:solidFill>
-                  <a:srgbClr val="06B6D4"/>
+                  <a:srgbClr val="4338CA"/>
                 </a:solidFill>
                 <a:latin typeface="Segoe UI"/>
               </a:defRPr>
@@ -12668,7 +12668,7 @@
               </a:spcAft>
               <a:defRPr sz="2200" b="1">
                 <a:solidFill>
-                  <a:srgbClr val="FFFFFF"/>
+                  <a:srgbClr val="0F172A"/>
                 </a:solidFill>
                 <a:latin typeface="Segoe UI"/>
               </a:defRPr>
@@ -12681,7 +12681,7 @@
             <a:pPr>
               <a:defRPr sz="1300">
                 <a:solidFill>
-                  <a:srgbClr val="94A3B8"/>
+                  <a:srgbClr val="64748B"/>
                 </a:solidFill>
                 <a:latin typeface="Segoe UI"/>
               </a:defRPr>
@@ -12707,11 +12707,11 @@
             <a:avLst/>
           </a:prstGeom>
           <a:solidFill>
-            <a:srgbClr val="131B2E"/>
+            <a:srgbClr val="F8FAFC"/>
           </a:solidFill>
-          <a:ln w="12700">
+          <a:ln w="15240">
             <a:solidFill>
-              <a:srgbClr val="283554"/>
+              <a:srgbClr val="E2E8F0"/>
             </a:solidFill>
           </a:ln>
         </p:spPr>
@@ -12762,7 +12762,7 @@
             <a:pPr>
               <a:defRPr sz="1500" b="1">
                 <a:solidFill>
-                  <a:srgbClr val="F59E0B"/>
+                  <a:srgbClr val="B45309"/>
                 </a:solidFill>
                 <a:latin typeface="Segoe UI"/>
               </a:defRPr>
@@ -12801,7 +12801,7 @@
               </a:spcAft>
               <a:defRPr sz="1300">
                 <a:solidFill>
-                  <a:srgbClr val="CBD5E1"/>
+                  <a:srgbClr val="334155"/>
                 </a:solidFill>
                 <a:latin typeface="Segoe UI"/>
               </a:defRPr>
@@ -12817,7 +12817,7 @@
               </a:spcAft>
               <a:defRPr sz="1300">
                 <a:solidFill>
-                  <a:srgbClr val="CBD5E1"/>
+                  <a:srgbClr val="334155"/>
                 </a:solidFill>
                 <a:latin typeface="Segoe UI"/>
               </a:defRPr>
@@ -12833,7 +12833,7 @@
               </a:spcAft>
               <a:defRPr sz="1300">
                 <a:solidFill>
-                  <a:srgbClr val="CBD5E1"/>
+                  <a:srgbClr val="334155"/>
                 </a:solidFill>
                 <a:latin typeface="Segoe UI"/>
               </a:defRPr>
@@ -12849,7 +12849,7 @@
               </a:spcAft>
               <a:defRPr sz="1300">
                 <a:solidFill>
-                  <a:srgbClr val="CBD5E1"/>
+                  <a:srgbClr val="334155"/>
                 </a:solidFill>
                 <a:latin typeface="Segoe UI"/>
               </a:defRPr>
@@ -12865,7 +12865,7 @@
               </a:spcAft>
               <a:defRPr sz="1300">
                 <a:solidFill>
-                  <a:srgbClr val="CBD5E1"/>
+                  <a:srgbClr val="334155"/>
                 </a:solidFill>
                 <a:latin typeface="Segoe UI"/>
               </a:defRPr>
@@ -12891,11 +12891,11 @@
             <a:avLst/>
           </a:prstGeom>
           <a:solidFill>
-            <a:srgbClr val="131B2E"/>
+            <a:srgbClr val="F8FAFC"/>
           </a:solidFill>
-          <a:ln w="12700">
+          <a:ln w="15240">
             <a:solidFill>
-              <a:srgbClr val="283554"/>
+              <a:srgbClr val="E2E8F0"/>
             </a:solidFill>
           </a:ln>
         </p:spPr>
@@ -12946,7 +12946,7 @@
             <a:pPr>
               <a:defRPr sz="1500" b="1">
                 <a:solidFill>
-                  <a:srgbClr val="10B981"/>
+                  <a:srgbClr val="047857"/>
                 </a:solidFill>
                 <a:latin typeface="Segoe UI"/>
               </a:defRPr>
@@ -12985,7 +12985,7 @@
               </a:spcAft>
               <a:defRPr sz="1300">
                 <a:solidFill>
-                  <a:srgbClr val="CBD5E1"/>
+                  <a:srgbClr val="334155"/>
                 </a:solidFill>
                 <a:latin typeface="Segoe UI"/>
               </a:defRPr>
@@ -13001,7 +13001,7 @@
               </a:spcAft>
               <a:defRPr sz="1300">
                 <a:solidFill>
-                  <a:srgbClr val="CBD5E1"/>
+                  <a:srgbClr val="334155"/>
                 </a:solidFill>
                 <a:latin typeface="Segoe UI"/>
               </a:defRPr>
@@ -13017,7 +13017,7 @@
               </a:spcAft>
               <a:defRPr sz="1300">
                 <a:solidFill>
-                  <a:srgbClr val="CBD5E1"/>
+                  <a:srgbClr val="334155"/>
                 </a:solidFill>
                 <a:latin typeface="Segoe UI"/>
               </a:defRPr>
@@ -13033,7 +13033,7 @@
               </a:spcAft>
               <a:defRPr sz="1300">
                 <a:solidFill>
-                  <a:srgbClr val="CBD5E1"/>
+                  <a:srgbClr val="334155"/>
                 </a:solidFill>
                 <a:latin typeface="Segoe UI"/>
               </a:defRPr>
@@ -13049,7 +13049,7 @@
               </a:spcAft>
               <a:defRPr sz="1300">
                 <a:solidFill>
-                  <a:srgbClr val="CBD5E1"/>
+                  <a:srgbClr val="334155"/>
                 </a:solidFill>
                 <a:latin typeface="Segoe UI"/>
               </a:defRPr>
